--- a/Faculty_Introduction.pptx
+++ b/Faculty_Introduction.pptx
@@ -601,7 +601,7 @@
           <a:p>
             <a:r>
               <a:rPr lang="en-US" dirty="0"/>
-              <a:t/>
+              <a:t>Describe the timeline concretely. Students and colleagues want to know this is a real plan, not a vague aspiration.</a:t>
             </a:r>
             <a:endParaRPr lang="en-US" dirty="0"/>
           </a:p>
@@ -689,7 +689,7 @@
           <a:p>
             <a:r>
               <a:rPr lang="en-US" dirty="0"/>
-              <a:t/>
+              <a:t>Your most important intellectual argument. Acknowledge LLMs honestly. The key: competition training builds the meta-skills that make an engineer valuable *because* of AI, not despite it.</a:t>
             </a:r>
             <a:endParaRPr lang="en-US" dirty="0"/>
           </a:p>
@@ -777,7 +777,7 @@
           <a:p>
             <a:r>
               <a:rPr lang="en-US" dirty="0"/>
-              <a:t/>
+              <a:t>End with warmth and a clear invitation. Leave time for 2-3 questions.</a:t>
             </a:r>
             <a:endParaRPr lang="en-US" dirty="0"/>
           </a:p>
@@ -865,7 +865,7 @@
           <a:p>
             <a:r>
               <a:rPr lang="en-US" dirty="0"/>
-              <a:t/>
+              <a:t>Introduce yourself personally: background, hometown, how you got into CS. A photo makes you approachable. ~90 seconds.</a:t>
             </a:r>
             <a:endParaRPr lang="en-US" dirty="0"/>
           </a:p>
@@ -953,7 +953,7 @@
           <a:p>
             <a:r>
               <a:rPr lang="en-US" dirty="0"/>
-              <a:t/>
+              <a:t>~60 seconds. Students want to know your style, not a full CV. #2 sets expectations for this course.</a:t>
             </a:r>
             <a:endParaRPr lang="en-US" dirty="0"/>
           </a:p>
@@ -1041,7 +1041,7 @@
           <a:p>
             <a:r>
               <a:rPr lang="en-US" dirty="0"/>
-              <a:t/>
+              <a:t>60-second overview of your research. Students want to know what excites you and how it might connect to their future.</a:t>
             </a:r>
             <a:endParaRPr lang="en-US" dirty="0"/>
           </a:p>
@@ -1129,7 +1129,7 @@
           <a:p>
             <a:r>
               <a:rPr lang="en-US" dirty="0"/>
-              <a:t/>
+              <a:t>Transition point. Invite any quick questions about Part 1 before continuing.</a:t>
             </a:r>
             <a:endParaRPr lang="en-US" dirty="0"/>
           </a:p>
@@ -1217,7 +1217,7 @@
           <a:p>
             <a:r>
               <a:rPr lang="en-US" dirty="0"/>
-              <a:t/>
+              <a:t>Conversational — students want to know your values. Keep to ~60 seconds.</a:t>
             </a:r>
             <a:endParaRPr lang="en-US" dirty="0"/>
           </a:p>
@@ -1305,7 +1305,7 @@
           <a:p>
             <a:r>
               <a:rPr lang="en-US" dirty="0"/>
-              <a:t/>
+              <a:t>60-second roadmap overview. Emphasize the project-based progression — each phase builds toward the final demo.</a:t>
             </a:r>
             <a:endParaRPr lang="en-US" dirty="0"/>
           </a:p>
@@ -1393,7 +1393,7 @@
           <a:p>
             <a:r>
               <a:rPr lang="en-US" dirty="0"/>
-              <a:t/>
+              <a:t>Mention a real example where you changed course based on feedback — it builds trust immediately.</a:t>
             </a:r>
             <a:endParaRPr lang="en-US" dirty="0"/>
           </a:p>
@@ -1481,7 +1481,7 @@
           <a:p>
             <a:r>
               <a:rPr lang="en-US" dirty="0"/>
-              <a:t/>
+              <a:t>P-E-M-C: your teaching operating model. ~45 seconds.</a:t>
             </a:r>
             <a:endParaRPr lang="en-US" dirty="0"/>
           </a:p>
@@ -1862,8 +1862,8 @@
         </p:nvSpPr>
         <p:spPr>
           <a:xfrm>
-            <a:off x="5943600" y="-1097280"/>
-            <a:ext cx="5029200" cy="5029200"/>
+            <a:off x="6217920" y="-1371600"/>
+            <a:ext cx="4572000" cy="4572000"/>
           </a:xfrm>
           <a:prstGeom prst="ellipse">
             <a:avLst/>
@@ -1884,7 +1884,7 @@
         </p:nvSpPr>
         <p:spPr>
           <a:xfrm>
-            <a:off x="6858000" y="2560320"/>
+            <a:off x="7132320" y="2286000"/>
             <a:ext cx="3657600" cy="3657600"/>
           </a:xfrm>
           <a:prstGeom prst="ellipse">
@@ -1892,7 +1892,7 @@
           </a:prstGeom>
           <a:solidFill>
             <a:srgbClr val="1C7293">
-              <a:alpha val="45000"/>
+              <a:alpha val="50000"/>
             </a:srgbClr>
           </a:solidFill>
           <a:ln/>
@@ -1906,34 +1906,34 @@
         </p:nvSpPr>
         <p:spPr>
           <a:xfrm>
-            <a:off x="640080" y="777240"/>
-            <a:ext cx="6858000" cy="914400"/>
-          </a:xfrm>
-          <a:prstGeom prst="rect">
-            <a:avLst/>
-          </a:prstGeom>
-          <a:noFill/>
-          <a:ln/>
-        </p:spPr>
-        <p:txBody>
-          <a:bodyPr wrap="square" rtlCol="0" anchor="ctr"/>
-          <a:lstStyle/>
-          <a:p>
-            <a:pPr indent="0" marL="0">
-              <a:buNone/>
-            </a:pPr>
-            <a:r>
-              <a:rPr lang="en-US" sz="4200" b="1" dirty="0">
-                <a:solidFill>
-                  <a:srgbClr val="FFFFFF"/>
+            <a:off x="731520" y="685800"/>
+            <a:ext cx="6400800" cy="594360"/>
+          </a:xfrm>
+          <a:prstGeom prst="rect">
+            <a:avLst/>
+          </a:prstGeom>
+          <a:noFill/>
+          <a:ln/>
+        </p:spPr>
+        <p:txBody>
+          <a:bodyPr wrap="square" lIns="0" tIns="0" rIns="0" bIns="0" rtlCol="0" anchor="ctr"/>
+          <a:lstStyle/>
+          <a:p>
+            <a:pPr indent="0" marL="0">
+              <a:buNone/>
+            </a:pPr>
+            <a:r>
+              <a:rPr lang="en-US" sz="2800" dirty="0">
+                <a:solidFill>
+                  <a:srgbClr val="21D19F"/>
                 </a:solidFill>
                 <a:latin typeface="Georgia" pitchFamily="34" charset="0"/>
                 <a:ea typeface="Georgia" pitchFamily="34" charset="-122"/>
                 <a:cs typeface="Georgia" pitchFamily="34" charset="-120"/>
               </a:rPr>
-              <a:t>Hello, I'm Jiarui Zhang</a:t>
-            </a:r>
-            <a:endParaRPr lang="en-US" sz="4200" dirty="0"/>
+              <a:t>Hello, I’m</a:t>
+            </a:r>
+            <a:endParaRPr lang="en-US" sz="2800" dirty="0"/>
           </a:p>
         </p:txBody>
       </p:sp>
@@ -1945,34 +1945,34 @@
         </p:nvSpPr>
         <p:spPr>
           <a:xfrm>
-            <a:off x="640080" y="1691640"/>
-            <a:ext cx="5486400" cy="548640"/>
-          </a:xfrm>
-          <a:prstGeom prst="rect">
-            <a:avLst/>
-          </a:prstGeom>
-          <a:noFill/>
-          <a:ln/>
-        </p:spPr>
-        <p:txBody>
-          <a:bodyPr wrap="square" rtlCol="0" anchor="ctr"/>
-          <a:lstStyle/>
-          <a:p>
-            <a:pPr indent="0" marL="0">
-              <a:buNone/>
-            </a:pPr>
-            <a:r>
-              <a:rPr lang="en-US" sz="2400" dirty="0">
-                <a:solidFill>
-                  <a:srgbClr val="21D19F"/>
+            <a:off x="731520" y="1234440"/>
+            <a:ext cx="6400800" cy="1005840"/>
+          </a:xfrm>
+          <a:prstGeom prst="rect">
+            <a:avLst/>
+          </a:prstGeom>
+          <a:noFill/>
+          <a:ln/>
+        </p:spPr>
+        <p:txBody>
+          <a:bodyPr wrap="square" lIns="0" tIns="0" rIns="0" bIns="0" rtlCol="0" anchor="ctr"/>
+          <a:lstStyle/>
+          <a:p>
+            <a:pPr indent="0" marL="0">
+              <a:buNone/>
+            </a:pPr>
+            <a:r>
+              <a:rPr lang="en-US" sz="5200" b="1" dirty="0">
+                <a:solidFill>
+                  <a:srgbClr val="FFFFFF"/>
                 </a:solidFill>
                 <a:latin typeface="Georgia" pitchFamily="34" charset="0"/>
                 <a:ea typeface="Georgia" pitchFamily="34" charset="-122"/>
                 <a:cs typeface="Georgia" pitchFamily="34" charset="-120"/>
               </a:rPr>
-              <a:t>Faculty Introduction</a:t>
-            </a:r>
-            <a:endParaRPr lang="en-US" sz="2400" dirty="0"/>
+              <a:t>Jiarui Zhang</a:t>
+            </a:r>
+            <a:endParaRPr lang="en-US" sz="5200" dirty="0"/>
           </a:p>
         </p:txBody>
       </p:sp>
@@ -1984,7 +1984,7 @@
         </p:nvSpPr>
         <p:spPr>
           <a:xfrm>
-            <a:off x="640080" y="2377440"/>
+            <a:off x="731520" y="2377440"/>
             <a:ext cx="2286000" cy="36576"/>
           </a:xfrm>
           <a:prstGeom prst="rect">
@@ -2004,8 +2004,8 @@
         </p:nvSpPr>
         <p:spPr>
           <a:xfrm>
-            <a:off x="640080" y="2514600"/>
-            <a:ext cx="5486400" cy="822960"/>
+            <a:off x="731520" y="2560320"/>
+            <a:ext cx="4572000" cy="822960"/>
           </a:xfrm>
           <a:prstGeom prst="rect">
             <a:avLst/>
@@ -2021,14 +2021,14 @@
               <a:buNone/>
             </a:pPr>
             <a:r>
-              <a:rPr lang="en-US" sz="1500" dirty="0">
-                <a:solidFill>
-                  <a:srgbClr val="EAF4F8"/>
+              <a:rPr lang="en-US" sz="1600" b="1" dirty="0">
+                <a:solidFill>
+                  <a:srgbClr val="FFFFFF"/>
                 </a:solidFill>
               </a:rPr>
               <a:t>Department of Computer Engineering</a:t>
             </a:r>
-            <a:endParaRPr lang="en-US" sz="1500" dirty="0"/>
+            <a:endParaRPr lang="en-US" sz="1600" dirty="0"/>
           </a:p>
           <a:p>
             <a:pPr indent="0" marL="0">
@@ -2040,9 +2040,67 @@
                   <a:srgbClr val="5A7184"/>
                 </a:solidFill>
               </a:rPr>
-              <a:t>15-Minute Introduction • 2026</a:t>
-            </a:r>
-            <a:endParaRPr lang="en-US" sz="1500" dirty="0"/>
+              <a:t>[Institution Name]</a:t>
+            </a:r>
+            <a:endParaRPr lang="en-US" sz="1600" dirty="0"/>
+          </a:p>
+        </p:txBody>
+      </p:sp>
+      <p:sp>
+        <p:nvSpPr>
+          <p:cNvPr id="8" name="Shape 6"/>
+          <p:cNvSpPr/>
+          <p:nvPr/>
+        </p:nvSpPr>
+        <p:spPr>
+          <a:xfrm>
+            <a:off x="0" y="4754880"/>
+            <a:ext cx="9144000" cy="388620"/>
+          </a:xfrm>
+          <a:prstGeom prst="rect">
+            <a:avLst/>
+          </a:prstGeom>
+          <a:solidFill>
+            <a:srgbClr val="065A82">
+              <a:alpha val="70000"/>
+            </a:srgbClr>
+          </a:solidFill>
+          <a:ln/>
+        </p:spPr>
+      </p:sp>
+      <p:sp>
+        <p:nvSpPr>
+          <p:cNvPr id="9" name="Text 7"/>
+          <p:cNvSpPr/>
+          <p:nvPr/>
+        </p:nvSpPr>
+        <p:spPr>
+          <a:xfrm>
+            <a:off x="731520" y="4754880"/>
+            <a:ext cx="4572000" cy="384048"/>
+          </a:xfrm>
+          <a:prstGeom prst="rect">
+            <a:avLst/>
+          </a:prstGeom>
+          <a:noFill/>
+          <a:ln/>
+        </p:spPr>
+        <p:txBody>
+          <a:bodyPr wrap="square" rtlCol="0" anchor="ctr"/>
+          <a:lstStyle/>
+          <a:p>
+            <a:pPr indent="0" marL="0">
+              <a:buNone/>
+            </a:pPr>
+            <a:r>
+              <a:rPr lang="en-US" sz="1100" dirty="0">
+                <a:solidFill>
+                  <a:srgbClr val="1C7293"/>
+                </a:solidFill>
+              </a:rPr>
+              <a:t>15-Minute Faculty Introduction</a:t>
+            </a:r>
+            <a:endParaRPr lang="en-US" sz="1100" dirty="0"/>
           </a:p>
         </p:txBody>
       </p:sp>
@@ -2060,7 +2118,7 @@
     <p:bg>
       <p:bgPr>
         <a:solidFill>
-          <a:srgbClr val="F5F9FB"/>
+          <a:srgbClr val="0B1D3A"/>
         </a:solidFill>
       </p:bgPr>
     </p:bg>
@@ -2086,28 +2144,52 @@
         </p:nvSpPr>
         <p:spPr>
           <a:xfrm>
-            <a:off x="0" y="0"/>
-            <a:ext cx="9144000" cy="914400"/>
-          </a:xfrm>
-          <a:prstGeom prst="rect">
-            <a:avLst/>
-          </a:prstGeom>
-          <a:solidFill>
-            <a:srgbClr val="FF6B35"/>
-          </a:solidFill>
-          <a:ln/>
-        </p:spPr>
-      </p:sp>
-      <p:sp>
-        <p:nvSpPr>
-          <p:cNvPr id="3" name="Text 1"/>
-          <p:cNvSpPr/>
-          <p:nvPr/>
-        </p:nvSpPr>
-        <p:spPr>
-          <a:xfrm>
-            <a:off x="548640" y="91440"/>
-            <a:ext cx="8229600" cy="685800"/>
+            <a:off x="-1371600" y="3200400"/>
+            <a:ext cx="3657600" cy="3657600"/>
+          </a:xfrm>
+          <a:prstGeom prst="ellipse">
+            <a:avLst/>
+          </a:prstGeom>
+          <a:solidFill>
+            <a:srgbClr val="065A82">
+              <a:alpha val="50000"/>
+            </a:srgbClr>
+          </a:solidFill>
+          <a:ln/>
+        </p:spPr>
+      </p:sp>
+      <p:sp>
+        <p:nvSpPr>
+          <p:cNvPr id="3" name="Shape 1"/>
+          <p:cNvSpPr/>
+          <p:nvPr/>
+        </p:nvSpPr>
+        <p:spPr>
+          <a:xfrm>
+            <a:off x="7772400" y="-914400"/>
+            <a:ext cx="2743200" cy="2743200"/>
+          </a:xfrm>
+          <a:prstGeom prst="ellipse">
+            <a:avLst/>
+          </a:prstGeom>
+          <a:solidFill>
+            <a:srgbClr val="FF6B35">
+              <a:alpha val="40000"/>
+            </a:srgbClr>
+          </a:solidFill>
+          <a:ln/>
+        </p:spPr>
+      </p:sp>
+      <p:sp>
+        <p:nvSpPr>
+          <p:cNvPr id="4" name="Text 2"/>
+          <p:cNvSpPr/>
+          <p:nvPr/>
+        </p:nvSpPr>
+        <p:spPr>
+          <a:xfrm>
+            <a:off x="548640" y="256032"/>
+            <a:ext cx="8046720" cy="411480"/>
           </a:xfrm>
           <a:prstGeom prst="rect">
             <a:avLst/>
@@ -2123,7 +2205,43 @@
               <a:buNone/>
             </a:pPr>
             <a:r>
-              <a:rPr lang="en-US" sz="2600" b="1" dirty="0">
+              <a:rPr lang="en-US" sz="1600" i="1" dirty="0">
+                <a:solidFill>
+                  <a:srgbClr val="FF6B35"/>
+                </a:solidFill>
+              </a:rPr>
+              <a:t>Highlight 1</a:t>
+            </a:r>
+            <a:endParaRPr lang="en-US" sz="1600" dirty="0"/>
+          </a:p>
+        </p:txBody>
+      </p:sp>
+      <p:sp>
+        <p:nvSpPr>
+          <p:cNvPr id="5" name="Text 3"/>
+          <p:cNvSpPr/>
+          <p:nvPr/>
+        </p:nvSpPr>
+        <p:spPr>
+          <a:xfrm>
+            <a:off x="548640" y="621792"/>
+            <a:ext cx="8046720" cy="658368"/>
+          </a:xfrm>
+          <a:prstGeom prst="rect">
+            <a:avLst/>
+          </a:prstGeom>
+          <a:noFill/>
+          <a:ln/>
+        </p:spPr>
+        <p:txBody>
+          <a:bodyPr wrap="square" lIns="0" tIns="0" rIns="0" bIns="0" rtlCol="0" anchor="ctr"/>
+          <a:lstStyle/>
+          <a:p>
+            <a:pPr indent="0" marL="0">
+              <a:buNone/>
+            </a:pPr>
+            <a:r>
+              <a:rPr lang="en-US" sz="3400" b="1" dirty="0">
                 <a:solidFill>
                   <a:srgbClr val="FFFFFF"/>
                 </a:solidFill>
@@ -2131,42 +2249,64 @@
                 <a:ea typeface="Georgia" pitchFamily="34" charset="-122"/>
                 <a:cs typeface="Georgia" pitchFamily="34" charset="-120"/>
               </a:rPr>
-              <a:t>Highlight 1: ICPC Competition Plan</a:t>
-            </a:r>
-            <a:endParaRPr lang="en-US" sz="2600" dirty="0"/>
-          </a:p>
-        </p:txBody>
-      </p:sp>
-      <p:sp>
-        <p:nvSpPr>
-          <p:cNvPr id="4" name="Shape 2"/>
-          <p:cNvSpPr/>
-          <p:nvPr/>
-        </p:nvSpPr>
-        <p:spPr>
-          <a:xfrm>
-            <a:off x="0" y="914400"/>
-            <a:ext cx="9144000" cy="27432"/>
-          </a:xfrm>
-          <a:prstGeom prst="rect">
-            <a:avLst/>
-          </a:prstGeom>
-          <a:solidFill>
-            <a:srgbClr val="F4C430"/>
-          </a:solidFill>
-          <a:ln/>
-        </p:spPr>
-      </p:sp>
-      <p:sp>
-        <p:nvSpPr>
-          <p:cNvPr id="5" name="Text 3"/>
-          <p:cNvSpPr/>
-          <p:nvPr/>
-        </p:nvSpPr>
-        <p:spPr>
-          <a:xfrm>
-            <a:off x="502920" y="1024128"/>
-            <a:ext cx="8229600" cy="3611880"/>
+              <a:t>ICPC Competition Plan</a:t>
+            </a:r>
+            <a:endParaRPr lang="en-US" sz="3400" dirty="0"/>
+          </a:p>
+        </p:txBody>
+      </p:sp>
+      <p:sp>
+        <p:nvSpPr>
+          <p:cNvPr id="6" name="Shape 4"/>
+          <p:cNvSpPr/>
+          <p:nvPr/>
+        </p:nvSpPr>
+        <p:spPr>
+          <a:xfrm>
+            <a:off x="548640" y="1508760"/>
+            <a:ext cx="8046720" cy="502920"/>
+          </a:xfrm>
+          <a:prstGeom prst="rect">
+            <a:avLst/>
+          </a:prstGeom>
+          <a:solidFill>
+            <a:srgbClr val="065A82">
+              <a:alpha val="80000"/>
+            </a:srgbClr>
+          </a:solidFill>
+          <a:ln/>
+        </p:spPr>
+      </p:sp>
+      <p:sp>
+        <p:nvSpPr>
+          <p:cNvPr id="7" name="Shape 5"/>
+          <p:cNvSpPr/>
+          <p:nvPr/>
+        </p:nvSpPr>
+        <p:spPr>
+          <a:xfrm>
+            <a:off x="548640" y="1508760"/>
+            <a:ext cx="54864" cy="502920"/>
+          </a:xfrm>
+          <a:prstGeom prst="rect">
+            <a:avLst/>
+          </a:prstGeom>
+          <a:solidFill>
+            <a:srgbClr val="21D19F"/>
+          </a:solidFill>
+          <a:ln/>
+        </p:spPr>
+      </p:sp>
+      <p:sp>
+        <p:nvSpPr>
+          <p:cNvPr id="8" name="Text 6"/>
+          <p:cNvSpPr/>
+          <p:nvPr/>
+        </p:nvSpPr>
+        <p:spPr>
+          <a:xfrm>
+            <a:off x="822960" y="1508760"/>
+            <a:ext cx="7589520" cy="502920"/>
           </a:xfrm>
           <a:prstGeom prst="rect">
             <a:avLst/>
@@ -2178,172 +2318,274 @@
           <a:bodyPr wrap="square" rtlCol="0" anchor="ctr"/>
           <a:lstStyle/>
           <a:p>
-            <a:pPr marL="190500" indent="-190500">
-              <a:buSzPct val="100000"/>
-              <a:buChar char="•"/>
-            </a:pPr>
-            <a:r>
-              <a:rPr lang="en-US" sz="1900" b="1" dirty="0">
-                <a:solidFill>
-                  <a:srgbClr val="1A1A2E"/>
-                </a:solidFill>
-              </a:rPr>
-              <a:t>Goal</a:t>
-            </a:r>
-            <a:endParaRPr lang="en-US" sz="1800" dirty="0"/>
-          </a:p>
-          <a:p>
-            <a:pPr lvl="1" marL="508000" indent="-254000">
-              <a:buSzPct val="100000"/>
-              <a:buChar char="•"/>
-            </a:pPr>
-            <a:r>
-              <a:rPr lang="en-US" sz="1600" dirty="0">
-                <a:solidFill>
-                  <a:srgbClr val="5A7184"/>
-                </a:solidFill>
-              </a:rPr>
-              <a:t>Field a competitive team at ACM-ICPC Regional within 2 years</a:t>
-            </a:r>
-            <a:endParaRPr lang="en-US" sz="1800" dirty="0"/>
-          </a:p>
-          <a:p>
-            <a:pPr indent="0" marL="0">
-              <a:buNone/>
-            </a:pPr>
-            <a:endParaRPr lang="en-US" sz="1800" dirty="0"/>
-          </a:p>
-          <a:p>
-            <a:pPr marL="190500" indent="-190500">
-              <a:buSzPct val="100000"/>
-              <a:buChar char="•"/>
-            </a:pPr>
-            <a:r>
-              <a:rPr lang="en-US" sz="1900" b="1" dirty="0">
-                <a:solidFill>
-                  <a:srgbClr val="1A1A2E"/>
-                </a:solidFill>
-              </a:rPr>
-              <a:t>Roadmap</a:t>
-            </a:r>
-            <a:endParaRPr lang="en-US" sz="1800" dirty="0"/>
-          </a:p>
-          <a:p>
-            <a:pPr lvl="1" marL="508000" indent="-254000">
-              <a:buSzPct val="100000"/>
-              <a:buChar char="•"/>
-            </a:pPr>
-            <a:r>
-              <a:rPr lang="en-US" sz="1600" dirty="0">
-                <a:solidFill>
-                  <a:srgbClr val="5A7184"/>
-                </a:solidFill>
-              </a:rPr>
-              <a:t>Semester 1 — Weekly training sessions; recruit top 20 students</a:t>
-            </a:r>
-            <a:endParaRPr lang="en-US" sz="1800" dirty="0"/>
-          </a:p>
-          <a:p>
-            <a:pPr lvl="1" marL="508000" indent="-254000">
-              <a:buSzPct val="100000"/>
-              <a:buChar char="•"/>
-            </a:pPr>
-            <a:r>
-              <a:rPr lang="en-US" sz="1600" dirty="0">
-                <a:solidFill>
-                  <a:srgbClr val="5A7184"/>
-                </a:solidFill>
-              </a:rPr>
-              <a:t>Semester 2 — Internal mock contest; select team of 3</a:t>
-            </a:r>
-            <a:endParaRPr lang="en-US" sz="1800" dirty="0"/>
-          </a:p>
-          <a:p>
-            <a:pPr lvl="1" marL="508000" indent="-254000">
-              <a:buSzPct val="100000"/>
-              <a:buChar char="•"/>
-            </a:pPr>
-            <a:r>
-              <a:rPr lang="en-US" sz="1600" dirty="0">
-                <a:solidFill>
-                  <a:srgbClr val="5A7184"/>
-                </a:solidFill>
-              </a:rPr>
-              <a:t>Year 2     — Regional competition + post-analysis</a:t>
-            </a:r>
-            <a:endParaRPr lang="en-US" sz="1800" dirty="0"/>
-          </a:p>
-          <a:p>
-            <a:pPr indent="0" marL="0">
-              <a:buNone/>
-            </a:pPr>
-            <a:endParaRPr lang="en-US" sz="1800" dirty="0"/>
-          </a:p>
-          <a:p>
-            <a:pPr marL="190500" indent="-190500">
-              <a:buSzPct val="100000"/>
-              <a:buChar char="•"/>
-            </a:pPr>
-            <a:r>
-              <a:rPr lang="en-US" sz="1900" b="1" dirty="0">
-                <a:solidFill>
-                  <a:srgbClr val="1A1A2E"/>
-                </a:solidFill>
-              </a:rPr>
-              <a:t>What Students Gain</a:t>
-            </a:r>
-            <a:endParaRPr lang="en-US" sz="1800" dirty="0"/>
-          </a:p>
-          <a:p>
-            <a:pPr lvl="1" marL="508000" indent="-254000">
-              <a:buSzPct val="100000"/>
-              <a:buChar char="•"/>
-            </a:pPr>
-            <a:r>
-              <a:rPr lang="en-US" sz="1600" dirty="0">
-                <a:solidFill>
-                  <a:srgbClr val="5A7184"/>
-                </a:solidFill>
-              </a:rPr>
-              <a:t>Deep algorithmic problem-solving under time pressure</a:t>
-            </a:r>
-            <a:endParaRPr lang="en-US" sz="1800" dirty="0"/>
-          </a:p>
-          <a:p>
-            <a:pPr lvl="1" marL="508000" indent="-254000">
-              <a:buSzPct val="100000"/>
-              <a:buChar char="•"/>
-            </a:pPr>
-            <a:r>
-              <a:rPr lang="en-US" sz="1600" dirty="0">
-                <a:solidFill>
-                  <a:srgbClr val="5A7184"/>
-                </a:solidFill>
-              </a:rPr>
-              <a:t>Team communication and division-of-labor skills</a:t>
-            </a:r>
-            <a:endParaRPr lang="en-US" sz="1800" dirty="0"/>
-          </a:p>
-          <a:p>
-            <a:pPr lvl="1" marL="508000" indent="-254000">
-              <a:buSzPct val="100000"/>
-              <a:buChar char="•"/>
-            </a:pPr>
-            <a:r>
-              <a:rPr lang="en-US" sz="1600" dirty="0">
-                <a:solidFill>
-                  <a:srgbClr val="5A7184"/>
-                </a:solidFill>
-              </a:rPr>
-              <a:t>A standout credential recognized by top tech employers</a:t>
-            </a:r>
-            <a:endParaRPr lang="en-US" sz="1800" dirty="0"/>
-          </a:p>
-        </p:txBody>
-      </p:sp>
-      <p:sp>
-        <p:nvSpPr>
-          <p:cNvPr id="6" name="Text 4"/>
+            <a:pPr indent="0" marL="0">
+              <a:buNone/>
+            </a:pPr>
+            <a:r>
+              <a:rPr lang="en-US" sz="1500" dirty="0">
+                <a:solidFill>
+                  <a:srgbClr val="FFFFFF"/>
+                </a:solidFill>
+              </a:rPr>
+              <a:t>Semester 1 — Weekly training sessions; identify and recruit top students</a:t>
+            </a:r>
+            <a:endParaRPr lang="en-US" sz="1500" dirty="0"/>
+          </a:p>
+        </p:txBody>
+      </p:sp>
+      <p:sp>
+        <p:nvSpPr>
+          <p:cNvPr id="9" name="Shape 7"/>
+          <p:cNvSpPr/>
+          <p:nvPr/>
+        </p:nvSpPr>
+        <p:spPr>
+          <a:xfrm>
+            <a:off x="548640" y="2103120"/>
+            <a:ext cx="8046720" cy="502920"/>
+          </a:xfrm>
+          <a:prstGeom prst="rect">
+            <a:avLst/>
+          </a:prstGeom>
+          <a:solidFill>
+            <a:srgbClr val="065A82">
+              <a:alpha val="80000"/>
+            </a:srgbClr>
+          </a:solidFill>
+          <a:ln/>
+        </p:spPr>
+      </p:sp>
+      <p:sp>
+        <p:nvSpPr>
+          <p:cNvPr id="10" name="Shape 8"/>
+          <p:cNvSpPr/>
+          <p:nvPr/>
+        </p:nvSpPr>
+        <p:spPr>
+          <a:xfrm>
+            <a:off x="548640" y="2103120"/>
+            <a:ext cx="54864" cy="502920"/>
+          </a:xfrm>
+          <a:prstGeom prst="rect">
+            <a:avLst/>
+          </a:prstGeom>
+          <a:solidFill>
+            <a:srgbClr val="21D19F"/>
+          </a:solidFill>
+          <a:ln/>
+        </p:spPr>
+      </p:sp>
+      <p:sp>
+        <p:nvSpPr>
+          <p:cNvPr id="11" name="Text 9"/>
+          <p:cNvSpPr/>
+          <p:nvPr/>
+        </p:nvSpPr>
+        <p:spPr>
+          <a:xfrm>
+            <a:off x="822960" y="2103120"/>
+            <a:ext cx="7589520" cy="502920"/>
+          </a:xfrm>
+          <a:prstGeom prst="rect">
+            <a:avLst/>
+          </a:prstGeom>
+          <a:noFill/>
+          <a:ln/>
+        </p:spPr>
+        <p:txBody>
+          <a:bodyPr wrap="square" rtlCol="0" anchor="ctr"/>
+          <a:lstStyle/>
+          <a:p>
+            <a:pPr indent="0" marL="0">
+              <a:buNone/>
+            </a:pPr>
+            <a:r>
+              <a:rPr lang="en-US" sz="1500" dirty="0">
+                <a:solidFill>
+                  <a:srgbClr val="FFFFFF"/>
+                </a:solidFill>
+              </a:rPr>
+              <a:t>Semester 2 — Internal mock contest; select a team of 3 for regional</a:t>
+            </a:r>
+            <a:endParaRPr lang="en-US" sz="1500" dirty="0"/>
+          </a:p>
+        </p:txBody>
+      </p:sp>
+      <p:sp>
+        <p:nvSpPr>
+          <p:cNvPr id="12" name="Shape 10"/>
+          <p:cNvSpPr/>
+          <p:nvPr/>
+        </p:nvSpPr>
+        <p:spPr>
+          <a:xfrm>
+            <a:off x="548640" y="2697480"/>
+            <a:ext cx="8046720" cy="502920"/>
+          </a:xfrm>
+          <a:prstGeom prst="rect">
+            <a:avLst/>
+          </a:prstGeom>
+          <a:solidFill>
+            <a:srgbClr val="065A82">
+              <a:alpha val="80000"/>
+            </a:srgbClr>
+          </a:solidFill>
+          <a:ln/>
+        </p:spPr>
+      </p:sp>
+      <p:sp>
+        <p:nvSpPr>
+          <p:cNvPr id="13" name="Shape 11"/>
+          <p:cNvSpPr/>
+          <p:nvPr/>
+        </p:nvSpPr>
+        <p:spPr>
+          <a:xfrm>
+            <a:off x="548640" y="2697480"/>
+            <a:ext cx="54864" cy="502920"/>
+          </a:xfrm>
+          <a:prstGeom prst="rect">
+            <a:avLst/>
+          </a:prstGeom>
+          <a:solidFill>
+            <a:srgbClr val="21D19F"/>
+          </a:solidFill>
+          <a:ln/>
+        </p:spPr>
+      </p:sp>
+      <p:sp>
+        <p:nvSpPr>
+          <p:cNvPr id="14" name="Text 12"/>
+          <p:cNvSpPr/>
+          <p:nvPr/>
+        </p:nvSpPr>
+        <p:spPr>
+          <a:xfrm>
+            <a:off x="822960" y="2697480"/>
+            <a:ext cx="7589520" cy="502920"/>
+          </a:xfrm>
+          <a:prstGeom prst="rect">
+            <a:avLst/>
+          </a:prstGeom>
+          <a:noFill/>
+          <a:ln/>
+        </p:spPr>
+        <p:txBody>
+          <a:bodyPr wrap="square" rtlCol="0" anchor="ctr"/>
+          <a:lstStyle/>
+          <a:p>
+            <a:pPr indent="0" marL="0">
+              <a:buNone/>
+            </a:pPr>
+            <a:r>
+              <a:rPr lang="en-US" sz="1500" dirty="0">
+                <a:solidFill>
+                  <a:srgbClr val="FFFFFF"/>
+                </a:solidFill>
+              </a:rPr>
+              <a:t>Year 2     — Regional competition + structured post-analysis workshop</a:t>
+            </a:r>
+            <a:endParaRPr lang="en-US" sz="1500" dirty="0"/>
+          </a:p>
+        </p:txBody>
+      </p:sp>
+      <p:sp>
+        <p:nvSpPr>
+          <p:cNvPr id="15" name="Shape 13"/>
+          <p:cNvSpPr/>
+          <p:nvPr/>
+        </p:nvSpPr>
+        <p:spPr>
+          <a:xfrm>
+            <a:off x="548640" y="3383280"/>
+            <a:ext cx="8046720" cy="1234440"/>
+          </a:xfrm>
+          <a:prstGeom prst="rect">
+            <a:avLst/>
+          </a:prstGeom>
+          <a:solidFill>
+            <a:srgbClr val="065A82">
+              <a:alpha val="85000"/>
+            </a:srgbClr>
+          </a:solidFill>
+          <a:ln/>
+        </p:spPr>
+      </p:sp>
+      <p:sp>
+        <p:nvSpPr>
+          <p:cNvPr id="16" name="Text 14"/>
+          <p:cNvSpPr/>
+          <p:nvPr/>
+        </p:nvSpPr>
+        <p:spPr>
+          <a:xfrm>
+            <a:off x="777240" y="3447288"/>
+            <a:ext cx="7589520" cy="347472"/>
+          </a:xfrm>
+          <a:prstGeom prst="rect">
+            <a:avLst/>
+          </a:prstGeom>
+          <a:noFill/>
+          <a:ln/>
+        </p:spPr>
+        <p:txBody>
+          <a:bodyPr wrap="square" rtlCol="0" anchor="ctr"/>
+          <a:lstStyle/>
+          <a:p>
+            <a:pPr indent="0" marL="0">
+              <a:buNone/>
+            </a:pPr>
+            <a:r>
+              <a:rPr lang="en-US" sz="1400" b="1" dirty="0">
+                <a:solidFill>
+                  <a:srgbClr val="21D19F"/>
+                </a:solidFill>
+              </a:rPr>
+              <a:t>What students gain:</a:t>
+            </a:r>
+            <a:endParaRPr lang="en-US" sz="1400" dirty="0"/>
+          </a:p>
+        </p:txBody>
+      </p:sp>
+      <p:sp>
+        <p:nvSpPr>
+          <p:cNvPr id="17" name="Text 15"/>
+          <p:cNvSpPr/>
+          <p:nvPr/>
+        </p:nvSpPr>
+        <p:spPr>
+          <a:xfrm>
+            <a:off x="777240" y="3776472"/>
+            <a:ext cx="7589520" cy="749808"/>
+          </a:xfrm>
+          <a:prstGeom prst="rect">
+            <a:avLst/>
+          </a:prstGeom>
+          <a:noFill/>
+          <a:ln/>
+        </p:spPr>
+        <p:txBody>
+          <a:bodyPr wrap="square" rtlCol="0" anchor="ctr"/>
+          <a:lstStyle/>
+          <a:p>
+            <a:pPr indent="0" marL="0">
+              <a:buNone/>
+            </a:pPr>
+            <a:r>
+              <a:rPr lang="en-US" sz="1300" dirty="0">
+                <a:solidFill>
+                  <a:srgbClr val="EAF4F8"/>
+                </a:solidFill>
+              </a:rPr>
+              <a:t>Deep algorithmic problem-solving under time pressure  •  Team communication skills  •  A standout credential recognized by top tech employers</a:t>
+            </a:r>
+            <a:endParaRPr lang="en-US" sz="1300" dirty="0"/>
+          </a:p>
+        </p:txBody>
+      </p:sp>
+      <p:sp>
+        <p:nvSpPr>
+          <p:cNvPr id="18" name="Text 16"/>
           <p:cNvSpPr/>
           <p:nvPr/>
         </p:nvSpPr>
@@ -2368,46 +2610,10 @@
             <a:r>
               <a:rPr lang="en-US" sz="1000" dirty="0">
                 <a:solidFill>
-                  <a:srgbClr val="5A7184"/>
+                  <a:srgbClr val="1C7293"/>
                 </a:solidFill>
               </a:rPr>
               <a:t>10 / 12</a:t>
-            </a:r>
-            <a:endParaRPr lang="en-US" sz="1000" dirty="0"/>
-          </a:p>
-        </p:txBody>
-      </p:sp>
-      <p:sp>
-        <p:nvSpPr>
-          <p:cNvPr id="7" name="Text 5"/>
-          <p:cNvSpPr/>
-          <p:nvPr/>
-        </p:nvSpPr>
-        <p:spPr>
-          <a:xfrm>
-            <a:off x="457200" y="4709160"/>
-            <a:ext cx="3657600" cy="320040"/>
-          </a:xfrm>
-          <a:prstGeom prst="rect">
-            <a:avLst/>
-          </a:prstGeom>
-          <a:noFill/>
-          <a:ln/>
-        </p:spPr>
-        <p:txBody>
-          <a:bodyPr wrap="square" rtlCol="0" anchor="ctr"/>
-          <a:lstStyle/>
-          <a:p>
-            <a:pPr indent="0" marL="0">
-              <a:buNone/>
-            </a:pPr>
-            <a:r>
-              <a:rPr lang="en-US" sz="1000" i="1" dirty="0">
-                <a:solidFill>
-                  <a:srgbClr val="5A7184"/>
-                </a:solidFill>
-              </a:rPr>
-              <a:t>Jiarui Zhang — Faculty Introduction</a:t>
             </a:r>
             <a:endParaRPr lang="en-US" sz="1000" dirty="0"/>
           </a:p>
@@ -2427,7 +2633,7 @@
     <p:bg>
       <p:bgPr>
         <a:solidFill>
-          <a:srgbClr val="F5F9FB"/>
+          <a:srgbClr val="0B1D3A"/>
         </a:solidFill>
       </p:bgPr>
     </p:bg>
@@ -2453,28 +2659,52 @@
         </p:nvSpPr>
         <p:spPr>
           <a:xfrm>
-            <a:off x="0" y="0"/>
-            <a:ext cx="9144000" cy="914400"/>
-          </a:xfrm>
-          <a:prstGeom prst="rect">
-            <a:avLst/>
-          </a:prstGeom>
-          <a:solidFill>
-            <a:srgbClr val="065A82"/>
-          </a:solidFill>
-          <a:ln/>
-        </p:spPr>
-      </p:sp>
-      <p:sp>
-        <p:nvSpPr>
-          <p:cNvPr id="3" name="Text 1"/>
-          <p:cNvSpPr/>
-          <p:nvPr/>
-        </p:nvSpPr>
-        <p:spPr>
-          <a:xfrm>
-            <a:off x="457200" y="91440"/>
-            <a:ext cx="8412480" cy="685800"/>
+            <a:off x="-1371600" y="-914400"/>
+            <a:ext cx="3657600" cy="3657600"/>
+          </a:xfrm>
+          <a:prstGeom prst="ellipse">
+            <a:avLst/>
+          </a:prstGeom>
+          <a:solidFill>
+            <a:srgbClr val="1C7293">
+              <a:alpha val="45000"/>
+            </a:srgbClr>
+          </a:solidFill>
+          <a:ln/>
+        </p:spPr>
+      </p:sp>
+      <p:sp>
+        <p:nvSpPr>
+          <p:cNvPr id="3" name="Shape 1"/>
+          <p:cNvSpPr/>
+          <p:nvPr/>
+        </p:nvSpPr>
+        <p:spPr>
+          <a:xfrm>
+            <a:off x="7315200" y="2743200"/>
+            <a:ext cx="3657600" cy="3657600"/>
+          </a:xfrm>
+          <a:prstGeom prst="ellipse">
+            <a:avLst/>
+          </a:prstGeom>
+          <a:solidFill>
+            <a:srgbClr val="065A82">
+              <a:alpha val="50000"/>
+            </a:srgbClr>
+          </a:solidFill>
+          <a:ln/>
+        </p:spPr>
+      </p:sp>
+      <p:sp>
+        <p:nvSpPr>
+          <p:cNvPr id="4" name="Text 2"/>
+          <p:cNvSpPr/>
+          <p:nvPr/>
+        </p:nvSpPr>
+        <p:spPr>
+          <a:xfrm>
+            <a:off x="548640" y="256032"/>
+            <a:ext cx="8046720" cy="411480"/>
           </a:xfrm>
           <a:prstGeom prst="rect">
             <a:avLst/>
@@ -2490,7 +2720,43 @@
               <a:buNone/>
             </a:pPr>
             <a:r>
-              <a:rPr lang="en-US" sz="2200" b="1" dirty="0">
+              <a:rPr lang="en-US" sz="1600" i="1" dirty="0">
+                <a:solidFill>
+                  <a:srgbClr val="21D19F"/>
+                </a:solidFill>
+              </a:rPr>
+              <a:t>Highlight 2</a:t>
+            </a:r>
+            <a:endParaRPr lang="en-US" sz="1600" dirty="0"/>
+          </a:p>
+        </p:txBody>
+      </p:sp>
+      <p:sp>
+        <p:nvSpPr>
+          <p:cNvPr id="5" name="Text 3"/>
+          <p:cNvSpPr/>
+          <p:nvPr/>
+        </p:nvSpPr>
+        <p:spPr>
+          <a:xfrm>
+            <a:off x="548640" y="621792"/>
+            <a:ext cx="8046720" cy="658368"/>
+          </a:xfrm>
+          <a:prstGeom prst="rect">
+            <a:avLst/>
+          </a:prstGeom>
+          <a:noFill/>
+          <a:ln/>
+        </p:spPr>
+        <p:txBody>
+          <a:bodyPr wrap="square" lIns="0" tIns="0" rIns="0" bIns="0" rtlCol="0" anchor="ctr"/>
+          <a:lstStyle/>
+          <a:p>
+            <a:pPr indent="0" marL="0">
+              <a:buNone/>
+            </a:pPr>
+            <a:r>
+              <a:rPr lang="en-US" sz="2800" b="1" dirty="0">
                 <a:solidFill>
                   <a:srgbClr val="FFFFFF"/>
                 </a:solidFill>
@@ -2498,42 +2764,66 @@
                 <a:ea typeface="Georgia" pitchFamily="34" charset="-122"/>
                 <a:cs typeface="Georgia" pitchFamily="34" charset="-120"/>
               </a:rPr>
-              <a:t>Highlight 2: Why Competitions Still Matter in the AI Era</a:t>
-            </a:r>
-            <a:endParaRPr lang="en-US" sz="2200" dirty="0"/>
-          </a:p>
-        </p:txBody>
-      </p:sp>
-      <p:sp>
-        <p:nvSpPr>
-          <p:cNvPr id="4" name="Shape 2"/>
-          <p:cNvSpPr/>
-          <p:nvPr/>
-        </p:nvSpPr>
-        <p:spPr>
-          <a:xfrm>
-            <a:off x="0" y="914400"/>
-            <a:ext cx="9144000" cy="27432"/>
-          </a:xfrm>
-          <a:prstGeom prst="rect">
-            <a:avLst/>
-          </a:prstGeom>
-          <a:solidFill>
-            <a:srgbClr val="21D19F"/>
-          </a:solidFill>
-          <a:ln/>
-        </p:spPr>
-      </p:sp>
-      <p:sp>
-        <p:nvSpPr>
-          <p:cNvPr id="5" name="Text 3"/>
-          <p:cNvSpPr/>
-          <p:nvPr/>
-        </p:nvSpPr>
-        <p:spPr>
-          <a:xfrm>
-            <a:off x="457200" y="1051560"/>
-            <a:ext cx="4114800" cy="640080"/>
+              <a:t>Why Competitions Still Matter in the AI Era</a:t>
+            </a:r>
+            <a:endParaRPr lang="en-US" sz="2800" dirty="0"/>
+          </a:p>
+        </p:txBody>
+      </p:sp>
+      <p:sp>
+        <p:nvSpPr>
+          <p:cNvPr id="6" name="Shape 4"/>
+          <p:cNvSpPr/>
+          <p:nvPr/>
+        </p:nvSpPr>
+        <p:spPr>
+          <a:xfrm>
+            <a:off x="548640" y="1417320"/>
+            <a:ext cx="3794760" cy="3063240"/>
+          </a:xfrm>
+          <a:prstGeom prst="rect">
+            <a:avLst/>
+          </a:prstGeom>
+          <a:solidFill>
+            <a:srgbClr val="065A82">
+              <a:alpha val="80000"/>
+            </a:srgbClr>
+          </a:solidFill>
+          <a:ln/>
+        </p:spPr>
+      </p:sp>
+      <p:sp>
+        <p:nvSpPr>
+          <p:cNvPr id="7" name="Shape 5"/>
+          <p:cNvSpPr/>
+          <p:nvPr/>
+        </p:nvSpPr>
+        <p:spPr>
+          <a:xfrm>
+            <a:off x="548640" y="1417320"/>
+            <a:ext cx="3794760" cy="411480"/>
+          </a:xfrm>
+          <a:prstGeom prst="rect">
+            <a:avLst/>
+          </a:prstGeom>
+          <a:solidFill>
+            <a:srgbClr val="FF6B35">
+              <a:alpha val="80000"/>
+            </a:srgbClr>
+          </a:solidFill>
+          <a:ln/>
+        </p:spPr>
+      </p:sp>
+      <p:sp>
+        <p:nvSpPr>
+          <p:cNvPr id="8" name="Text 6"/>
+          <p:cNvSpPr/>
+          <p:nvPr/>
+        </p:nvSpPr>
+        <p:spPr>
+          <a:xfrm>
+            <a:off x="640080" y="1417320"/>
+            <a:ext cx="3611880" cy="411480"/>
           </a:xfrm>
           <a:prstGeom prst="rect">
             <a:avLst/>
@@ -2549,41 +2839,27 @@
               <a:buNone/>
             </a:pPr>
             <a:r>
-              <a:rPr lang="en-US" sz="1700" b="1" i="1" dirty="0">
-                <a:solidFill>
-                  <a:srgbClr val="FF6B35"/>
-                </a:solidFill>
-              </a:rPr>
-              <a:t>LLMs can solve many</a:t>
-            </a:r>
-            <a:endParaRPr lang="en-US" sz="1700" dirty="0"/>
-          </a:p>
-          <a:p>
-            <a:pPr indent="0" marL="0">
-              <a:buNone/>
-            </a:pPr>
-            <a:r>
-              <a:rPr lang="en-US" sz="1700" b="1" i="1" dirty="0">
-                <a:solidFill>
-                  <a:srgbClr val="FF6B35"/>
-                </a:solidFill>
-              </a:rPr>
-              <a:t>competition problems…</a:t>
-            </a:r>
-            <a:endParaRPr lang="en-US" sz="1700" dirty="0"/>
-          </a:p>
-        </p:txBody>
-      </p:sp>
-      <p:sp>
-        <p:nvSpPr>
-          <p:cNvPr id="6" name="Text 4"/>
-          <p:cNvSpPr/>
-          <p:nvPr/>
-        </p:nvSpPr>
-        <p:spPr>
-          <a:xfrm>
-            <a:off x="4572000" y="1051560"/>
-            <a:ext cx="4114800" cy="640080"/>
+              <a:rPr lang="en-US" sz="1400" b="1" dirty="0">
+                <a:solidFill>
+                  <a:srgbClr val="FFFFFF"/>
+                </a:solidFill>
+              </a:rPr>
+              <a:t>LLMs can already…</a:t>
+            </a:r>
+            <a:endParaRPr lang="en-US" sz="1400" dirty="0"/>
+          </a:p>
+        </p:txBody>
+      </p:sp>
+      <p:sp>
+        <p:nvSpPr>
+          <p:cNvPr id="9" name="Text 7"/>
+          <p:cNvSpPr/>
+          <p:nvPr/>
+        </p:nvSpPr>
+        <p:spPr>
+          <a:xfrm>
+            <a:off x="685800" y="1920240"/>
+            <a:ext cx="3474720" cy="2423160"/>
           </a:xfrm>
           <a:prstGeom prst="rect">
             <a:avLst/>
@@ -2595,120 +2871,134 @@
           <a:bodyPr wrap="square" rtlCol="0" anchor="ctr"/>
           <a:lstStyle/>
           <a:p>
-            <a:pPr indent="0" marL="0">
-              <a:buNone/>
-            </a:pPr>
-            <a:r>
-              <a:rPr lang="en-US" sz="1700" b="1" i="1" dirty="0">
-                <a:solidFill>
-                  <a:srgbClr val="1C7293"/>
-                </a:solidFill>
-              </a:rPr>
-              <a:t>…so why train humans to do it?</a:t>
-            </a:r>
-            <a:endParaRPr lang="en-US" sz="1700" dirty="0"/>
-          </a:p>
-        </p:txBody>
-      </p:sp>
-      <p:sp>
-        <p:nvSpPr>
-          <p:cNvPr id="7" name="Shape 5"/>
-          <p:cNvSpPr/>
-          <p:nvPr/>
-        </p:nvSpPr>
-        <p:spPr>
-          <a:xfrm>
-            <a:off x="4434840" y="1005840"/>
-            <a:ext cx="27432" cy="3657600"/>
-          </a:xfrm>
-          <a:prstGeom prst="rect">
-            <a:avLst/>
-          </a:prstGeom>
-          <a:solidFill>
-            <a:srgbClr val="5A7184">
-              <a:alpha val="50000"/>
-            </a:srgbClr>
-          </a:solidFill>
-          <a:ln/>
-        </p:spPr>
-      </p:sp>
-      <p:sp>
-        <p:nvSpPr>
-          <p:cNvPr id="8" name="Text 6"/>
-          <p:cNvSpPr/>
-          <p:nvPr/>
-        </p:nvSpPr>
-        <p:spPr>
-          <a:xfrm>
-            <a:off x="457200" y="1691640"/>
-            <a:ext cx="3840480" cy="2377440"/>
-          </a:xfrm>
-          <a:prstGeom prst="rect">
-            <a:avLst/>
-          </a:prstGeom>
-          <a:noFill/>
-          <a:ln/>
-        </p:spPr>
-        <p:txBody>
-          <a:bodyPr wrap="square" rtlCol="0" anchor="ctr"/>
-          <a:lstStyle/>
-          <a:p>
-            <a:pPr marL="190500" indent="-190500">
+            <a:pPr marL="342900" indent="-342900">
               <a:buSzPct val="100000"/>
               <a:buChar char="•"/>
             </a:pPr>
             <a:r>
-              <a:rPr lang="en-US" sz="1900" dirty="0">
-                <a:solidFill>
-                  <a:srgbClr val="1A1A2E"/>
-                </a:solidFill>
-              </a:rPr>
-              <a:t>Generates working code quickly</a:t>
-            </a:r>
-            <a:endParaRPr lang="en-US" sz="1600" dirty="0"/>
-          </a:p>
-          <a:p>
-            <a:pPr marL="190500" indent="-190500">
+              <a:rPr lang="en-US" sz="1300" dirty="0">
+                <a:solidFill>
+                  <a:srgbClr val="EAF4F8"/>
+                </a:solidFill>
+              </a:rPr>
+              <a:t>Generate working code quickly</a:t>
+            </a:r>
+            <a:endParaRPr lang="en-US" sz="1300" dirty="0"/>
+          </a:p>
+          <a:p>
+            <a:pPr marL="342900" indent="-342900">
               <a:buSzPct val="100000"/>
               <a:buChar char="•"/>
             </a:pPr>
             <a:r>
-              <a:rPr lang="en-US" sz="1900" dirty="0">
-                <a:solidFill>
-                  <a:srgbClr val="1A1A2E"/>
-                </a:solidFill>
-              </a:rPr>
-              <a:t>Handles routine algorithm patterns</a:t>
-            </a:r>
-            <a:endParaRPr lang="en-US" sz="1600" dirty="0"/>
-          </a:p>
-          <a:p>
-            <a:pPr marL="190500" indent="-190500">
+              <a:rPr lang="en-US" sz="1300" dirty="0">
+                <a:solidFill>
+                  <a:srgbClr val="EAF4F8"/>
+                </a:solidFill>
+              </a:rPr>
+              <a:t>Handle routine algorithm patterns</a:t>
+            </a:r>
+            <a:endParaRPr lang="en-US" sz="1300" dirty="0"/>
+          </a:p>
+          <a:p>
+            <a:pPr marL="342900" indent="-342900">
               <a:buSzPct val="100000"/>
               <a:buChar char="•"/>
             </a:pPr>
             <a:r>
-              <a:rPr lang="en-US" sz="1900" dirty="0">
-                <a:solidFill>
-                  <a:srgbClr val="1A1A2E"/>
-                </a:solidFill>
-              </a:rPr>
-              <a:t>Passes many OJ problems with prompting</a:t>
-            </a:r>
-            <a:endParaRPr lang="en-US" sz="1600" dirty="0"/>
-          </a:p>
-        </p:txBody>
-      </p:sp>
-      <p:sp>
-        <p:nvSpPr>
-          <p:cNvPr id="9" name="Text 7"/>
-          <p:cNvSpPr/>
-          <p:nvPr/>
-        </p:nvSpPr>
-        <p:spPr>
-          <a:xfrm>
-            <a:off x="4663440" y="1691640"/>
-            <a:ext cx="4023360" cy="2834640"/>
+              <a:rPr lang="en-US" sz="1300" dirty="0">
+                <a:solidFill>
+                  <a:srgbClr val="EAF4F8"/>
+                </a:solidFill>
+              </a:rPr>
+              <a:t>Pass many OJ problems with prompting</a:t>
+            </a:r>
+            <a:endParaRPr lang="en-US" sz="1300" dirty="0"/>
+          </a:p>
+          <a:p>
+            <a:pPr indent="0" marL="0">
+              <a:buNone/>
+            </a:pPr>
+            <a:r>
+              <a:rPr lang="en-US" sz="800" dirty="0">
+                <a:solidFill>
+                  <a:srgbClr val="000000"/>
+                </a:solidFill>
+              </a:rPr>
+              <a:t> </a:t>
+            </a:r>
+            <a:endParaRPr lang="en-US" sz="1300" dirty="0"/>
+          </a:p>
+          <a:p>
+            <a:pPr indent="0" marL="0">
+              <a:buNone/>
+            </a:pPr>
+            <a:r>
+              <a:rPr lang="en-US" sz="1300" i="1" dirty="0">
+                <a:solidFill>
+                  <a:srgbClr val="FF6B35"/>
+                </a:solidFill>
+              </a:rPr>
+              <a:t>So why train humans to compete?</a:t>
+            </a:r>
+            <a:endParaRPr lang="en-US" sz="1300" dirty="0"/>
+          </a:p>
+        </p:txBody>
+      </p:sp>
+      <p:sp>
+        <p:nvSpPr>
+          <p:cNvPr id="10" name="Shape 8"/>
+          <p:cNvSpPr/>
+          <p:nvPr/>
+        </p:nvSpPr>
+        <p:spPr>
+          <a:xfrm>
+            <a:off x="4800600" y="1417320"/>
+            <a:ext cx="3794760" cy="3063240"/>
+          </a:xfrm>
+          <a:prstGeom prst="rect">
+            <a:avLst/>
+          </a:prstGeom>
+          <a:solidFill>
+            <a:srgbClr val="1C7293">
+              <a:alpha val="70000"/>
+            </a:srgbClr>
+          </a:solidFill>
+          <a:ln/>
+        </p:spPr>
+      </p:sp>
+      <p:sp>
+        <p:nvSpPr>
+          <p:cNvPr id="11" name="Shape 9"/>
+          <p:cNvSpPr/>
+          <p:nvPr/>
+        </p:nvSpPr>
+        <p:spPr>
+          <a:xfrm>
+            <a:off x="4800600" y="1417320"/>
+            <a:ext cx="3794760" cy="411480"/>
+          </a:xfrm>
+          <a:prstGeom prst="rect">
+            <a:avLst/>
+          </a:prstGeom>
+          <a:solidFill>
+            <a:srgbClr val="21D19F">
+              <a:alpha val="80000"/>
+            </a:srgbClr>
+          </a:solidFill>
+          <a:ln/>
+        </p:spPr>
+      </p:sp>
+      <p:sp>
+        <p:nvSpPr>
+          <p:cNvPr id="12" name="Text 10"/>
+          <p:cNvSpPr/>
+          <p:nvPr/>
+        </p:nvSpPr>
+        <p:spPr>
+          <a:xfrm>
+            <a:off x="4892040" y="1417320"/>
+            <a:ext cx="3611880" cy="411480"/>
           </a:xfrm>
           <a:prstGeom prst="rect">
             <a:avLst/>
@@ -2720,85 +3010,134 @@
           <a:bodyPr wrap="square" rtlCol="0" anchor="ctr"/>
           <a:lstStyle/>
           <a:p>
-            <a:pPr marL="190500" indent="-190500">
+            <a:pPr indent="0" marL="0">
+              <a:buNone/>
+            </a:pPr>
+            <a:r>
+              <a:rPr lang="en-US" sz="1400" b="1" dirty="0">
+                <a:solidFill>
+                  <a:srgbClr val="0B1D3A"/>
+                </a:solidFill>
+              </a:rPr>
+              <a:t>Humans still need to…</a:t>
+            </a:r>
+            <a:endParaRPr lang="en-US" sz="1400" dirty="0"/>
+          </a:p>
+        </p:txBody>
+      </p:sp>
+      <p:sp>
+        <p:nvSpPr>
+          <p:cNvPr id="13" name="Text 11"/>
+          <p:cNvSpPr/>
+          <p:nvPr/>
+        </p:nvSpPr>
+        <p:spPr>
+          <a:xfrm>
+            <a:off x="4937760" y="1920240"/>
+            <a:ext cx="3474720" cy="2423160"/>
+          </a:xfrm>
+          <a:prstGeom prst="rect">
+            <a:avLst/>
+          </a:prstGeom>
+          <a:noFill/>
+          <a:ln/>
+        </p:spPr>
+        <p:txBody>
+          <a:bodyPr wrap="square" rtlCol="0" anchor="ctr"/>
+          <a:lstStyle/>
+          <a:p>
+            <a:pPr marL="342900" indent="-342900">
               <a:buSzPct val="100000"/>
               <a:buChar char="•"/>
             </a:pPr>
             <a:r>
-              <a:rPr lang="en-US" sz="1900" b="1" dirty="0">
-                <a:solidFill>
-                  <a:srgbClr val="1A1A2E"/>
-                </a:solidFill>
-              </a:rPr>
-              <a:t>Verify, judge &amp; debug AI output</a:t>
-            </a:r>
-            <a:endParaRPr lang="en-US" sz="1500" dirty="0"/>
-          </a:p>
-          <a:p>
-            <a:pPr marL="190500" indent="-190500">
+              <a:rPr lang="en-US" sz="1300" dirty="0">
+                <a:solidFill>
+                  <a:srgbClr val="FFFFFF"/>
+                </a:solidFill>
+              </a:rPr>
+              <a:t>Verify, judge, and debug AI output</a:t>
+            </a:r>
+            <a:endParaRPr lang="en-US" sz="1300" dirty="0"/>
+          </a:p>
+          <a:p>
+            <a:pPr marL="342900" indent="-342900">
               <a:buSzPct val="100000"/>
               <a:buChar char="•"/>
             </a:pPr>
             <a:r>
-              <a:rPr lang="en-US" sz="1900" dirty="0">
-                <a:solidFill>
-                  <a:srgbClr val="1A1A2E"/>
-                </a:solidFill>
-              </a:rPr>
-              <a:t>Novel problem formulation — AI needs a human to frame the problem</a:t>
-            </a:r>
-            <a:endParaRPr lang="en-US" sz="1500" dirty="0"/>
-          </a:p>
-          <a:p>
-            <a:pPr marL="190500" indent="-190500">
+              <a:rPr lang="en-US" sz="1300" dirty="0">
+                <a:solidFill>
+                  <a:srgbClr val="FFFFFF"/>
+                </a:solidFill>
+              </a:rPr>
+              <a:t>Frame novel problems AI hasn’t seen</a:t>
+            </a:r>
+            <a:endParaRPr lang="en-US" sz="1300" dirty="0"/>
+          </a:p>
+          <a:p>
+            <a:pPr marL="342900" indent="-342900">
               <a:buSzPct val="100000"/>
               <a:buChar char="•"/>
             </a:pPr>
             <a:r>
-              <a:rPr lang="en-US" sz="1900" dirty="0">
-                <a:solidFill>
-                  <a:srgbClr val="1A1A2E"/>
-                </a:solidFill>
-              </a:rPr>
-              <a:t>Combinatorial intuition under constraints AI hasn't seen</a:t>
-            </a:r>
-            <a:endParaRPr lang="en-US" sz="1500" dirty="0"/>
-          </a:p>
-          <a:p>
-            <a:pPr marL="190500" indent="-190500">
+              <a:rPr lang="en-US" sz="1300" dirty="0">
+                <a:solidFill>
+                  <a:srgbClr val="FFFFFF"/>
+                </a:solidFill>
+              </a:rPr>
+              <a:t>Apply combinatorial intuition under real constraints</a:t>
+            </a:r>
+            <a:endParaRPr lang="en-US" sz="1300" dirty="0"/>
+          </a:p>
+          <a:p>
+            <a:pPr marL="342900" indent="-342900">
               <a:buSzPct val="100000"/>
               <a:buChar char="•"/>
             </a:pPr>
             <a:r>
-              <a:rPr lang="en-US" sz="1900" dirty="0">
-                <a:solidFill>
-                  <a:srgbClr val="1A1A2E"/>
-                </a:solidFill>
-              </a:rPr>
-              <a:t>Competitions build resilience, not just code</a:t>
-            </a:r>
-            <a:endParaRPr lang="en-US" sz="1500" dirty="0"/>
-          </a:p>
-          <a:p>
-            <a:pPr marL="190500" indent="-190500">
-              <a:buSzPct val="100000"/>
-              <a:buChar char="•"/>
-            </a:pPr>
-            <a:r>
-              <a:rPr lang="en-US" sz="1900" b="1" dirty="0">
-                <a:solidFill>
-                  <a:srgbClr val="1A1A2E"/>
-                </a:solidFill>
-              </a:rPr>
-              <a:t>The best engineers direct AI, not follow it</a:t>
-            </a:r>
-            <a:endParaRPr lang="en-US" sz="1500" dirty="0"/>
-          </a:p>
-        </p:txBody>
-      </p:sp>
-      <p:sp>
-        <p:nvSpPr>
-          <p:cNvPr id="10" name="Text 8"/>
+              <a:rPr lang="en-US" sz="1300" dirty="0">
+                <a:solidFill>
+                  <a:srgbClr val="FFFFFF"/>
+                </a:solidFill>
+              </a:rPr>
+              <a:t>Build resilience and perseverance</a:t>
+            </a:r>
+            <a:endParaRPr lang="en-US" sz="1300" dirty="0"/>
+          </a:p>
+          <a:p>
+            <a:pPr indent="0" marL="0">
+              <a:buNone/>
+            </a:pPr>
+            <a:r>
+              <a:rPr lang="en-US" sz="800" dirty="0">
+                <a:solidFill>
+                  <a:srgbClr val="000000"/>
+                </a:solidFill>
+              </a:rPr>
+              <a:t> </a:t>
+            </a:r>
+            <a:endParaRPr lang="en-US" sz="1300" dirty="0"/>
+          </a:p>
+          <a:p>
+            <a:pPr indent="0" marL="0">
+              <a:buNone/>
+            </a:pPr>
+            <a:r>
+              <a:rPr lang="en-US" sz="1300" b="1" dirty="0">
+                <a:solidFill>
+                  <a:srgbClr val="21D19F"/>
+                </a:solidFill>
+              </a:rPr>
+              <a:t>The best engineers direct AI — not follow it.</a:t>
+            </a:r>
+            <a:endParaRPr lang="en-US" sz="1300" dirty="0"/>
+          </a:p>
+        </p:txBody>
+      </p:sp>
+      <p:sp>
+        <p:nvSpPr>
+          <p:cNvPr id="14" name="Text 12"/>
           <p:cNvSpPr/>
           <p:nvPr/>
         </p:nvSpPr>
@@ -2823,46 +3162,10 @@
             <a:r>
               <a:rPr lang="en-US" sz="1000" dirty="0">
                 <a:solidFill>
-                  <a:srgbClr val="5A7184"/>
+                  <a:srgbClr val="1C7293"/>
                 </a:solidFill>
               </a:rPr>
               <a:t>11 / 12</a:t>
-            </a:r>
-            <a:endParaRPr lang="en-US" sz="1000" dirty="0"/>
-          </a:p>
-        </p:txBody>
-      </p:sp>
-      <p:sp>
-        <p:nvSpPr>
-          <p:cNvPr id="11" name="Text 9"/>
-          <p:cNvSpPr/>
-          <p:nvPr/>
-        </p:nvSpPr>
-        <p:spPr>
-          <a:xfrm>
-            <a:off x="457200" y="4709160"/>
-            <a:ext cx="3657600" cy="320040"/>
-          </a:xfrm>
-          <a:prstGeom prst="rect">
-            <a:avLst/>
-          </a:prstGeom>
-          <a:noFill/>
-          <a:ln/>
-        </p:spPr>
-        <p:txBody>
-          <a:bodyPr wrap="square" rtlCol="0" anchor="ctr"/>
-          <a:lstStyle/>
-          <a:p>
-            <a:pPr indent="0" marL="0">
-              <a:buNone/>
-            </a:pPr>
-            <a:r>
-              <a:rPr lang="en-US" sz="1000" i="1" dirty="0">
-                <a:solidFill>
-                  <a:srgbClr val="5A7184"/>
-                </a:solidFill>
-              </a:rPr>
-              <a:t>Jiarui Zhang — Faculty Introduction</a:t>
             </a:r>
             <a:endParaRPr lang="en-US" sz="1000" dirty="0"/>
           </a:p>
@@ -2908,15 +3211,15 @@
         </p:nvSpPr>
         <p:spPr>
           <a:xfrm>
-            <a:off x="5943600" y="-914400"/>
-            <a:ext cx="4572000" cy="4572000"/>
+            <a:off x="-1371600" y="3200400"/>
+            <a:ext cx="3657600" cy="3657600"/>
           </a:xfrm>
           <a:prstGeom prst="ellipse">
             <a:avLst/>
           </a:prstGeom>
           <a:solidFill>
             <a:srgbClr val="065A82">
-              <a:alpha val="55000"/>
+              <a:alpha val="50000"/>
             </a:srgbClr>
           </a:solidFill>
           <a:ln/>
@@ -2930,15 +3233,15 @@
         </p:nvSpPr>
         <p:spPr>
           <a:xfrm>
-            <a:off x="6583680" y="2743200"/>
-            <a:ext cx="3657600" cy="3657600"/>
+            <a:off x="7772400" y="-914400"/>
+            <a:ext cx="2743200" cy="2743200"/>
           </a:xfrm>
           <a:prstGeom prst="ellipse">
             <a:avLst/>
           </a:prstGeom>
           <a:solidFill>
             <a:srgbClr val="1C7293">
-              <a:alpha val="45000"/>
+              <a:alpha val="50000"/>
             </a:srgbClr>
           </a:solidFill>
           <a:ln/>
@@ -2952,24 +3255,24 @@
         </p:nvSpPr>
         <p:spPr>
           <a:xfrm>
-            <a:off x="731520" y="822960"/>
-            <a:ext cx="6400800" cy="914400"/>
-          </a:xfrm>
-          <a:prstGeom prst="rect">
-            <a:avLst/>
-          </a:prstGeom>
-          <a:noFill/>
-          <a:ln/>
-        </p:spPr>
-        <p:txBody>
-          <a:bodyPr wrap="square" rtlCol="0" anchor="ctr"/>
-          <a:lstStyle/>
-          <a:p>
-            <a:pPr indent="0" marL="0">
-              <a:buNone/>
-            </a:pPr>
-            <a:r>
-              <a:rPr lang="en-US" sz="4200" b="1" dirty="0">
+            <a:off x="548640" y="274320"/>
+            <a:ext cx="8046720" cy="640080"/>
+          </a:xfrm>
+          <a:prstGeom prst="rect">
+            <a:avLst/>
+          </a:prstGeom>
+          <a:noFill/>
+          <a:ln/>
+        </p:spPr>
+        <p:txBody>
+          <a:bodyPr wrap="square" lIns="0" tIns="0" rIns="0" bIns="0" rtlCol="0" anchor="ctr"/>
+          <a:lstStyle/>
+          <a:p>
+            <a:pPr indent="0" marL="0">
+              <a:buNone/>
+            </a:pPr>
+            <a:r>
+              <a:rPr lang="en-US" sz="3200" b="1" dirty="0">
                 <a:solidFill>
                   <a:srgbClr val="FFFFFF"/>
                 </a:solidFill>
@@ -2977,9 +3280,9 @@
                 <a:ea typeface="Georgia" pitchFamily="34" charset="-122"/>
                 <a:cs typeface="Georgia" pitchFamily="34" charset="-120"/>
               </a:rPr>
-              <a:t>Let's Build Together</a:t>
-            </a:r>
-            <a:endParaRPr lang="en-US" sz="4200" dirty="0"/>
+              <a:t>What I Hope You’ll Remember</a:t>
+            </a:r>
+            <a:endParaRPr lang="en-US" sz="3200" dirty="0"/>
           </a:p>
         </p:txBody>
       </p:sp>
@@ -2991,8 +3294,30 @@
         </p:nvSpPr>
         <p:spPr>
           <a:xfrm>
-            <a:off x="731520" y="1828800"/>
-            <a:ext cx="2286000" cy="36576"/>
+            <a:off x="548640" y="1188720"/>
+            <a:ext cx="8046720" cy="548640"/>
+          </a:xfrm>
+          <a:prstGeom prst="rect">
+            <a:avLst/>
+          </a:prstGeom>
+          <a:solidFill>
+            <a:srgbClr val="065A82">
+              <a:alpha val="80000"/>
+            </a:srgbClr>
+          </a:solidFill>
+          <a:ln/>
+        </p:spPr>
+      </p:sp>
+      <p:sp>
+        <p:nvSpPr>
+          <p:cNvPr id="6" name="Shape 4"/>
+          <p:cNvSpPr/>
+          <p:nvPr/>
+        </p:nvSpPr>
+        <p:spPr>
+          <a:xfrm>
+            <a:off x="548640" y="1188720"/>
+            <a:ext cx="54864" cy="548640"/>
           </a:xfrm>
           <a:prstGeom prst="rect">
             <a:avLst/>
@@ -3005,14 +3330,14 @@
       </p:sp>
       <p:sp>
         <p:nvSpPr>
-          <p:cNvPr id="6" name="Text 4"/>
-          <p:cNvSpPr/>
-          <p:nvPr/>
-        </p:nvSpPr>
-        <p:spPr>
-          <a:xfrm>
-            <a:off x="731520" y="2011680"/>
-            <a:ext cx="6400800" cy="2743200"/>
+          <p:cNvPr id="7" name="Text 5"/>
+          <p:cNvSpPr/>
+          <p:nvPr/>
+        </p:nvSpPr>
+        <p:spPr>
+          <a:xfrm>
+            <a:off x="822960" y="1188720"/>
+            <a:ext cx="7589520" cy="548640"/>
           </a:xfrm>
           <a:prstGeom prst="rect">
             <a:avLst/>
@@ -3028,104 +3353,323 @@
               <a:buNone/>
             </a:pPr>
             <a:r>
-              <a:rPr lang="en-US" sz="2000" b="1" dirty="0">
+              <a:rPr lang="en-US" sz="1600" dirty="0">
+                <a:solidFill>
+                  <a:srgbClr val="FFFFFF"/>
+                </a:solidFill>
+              </a:rPr>
+              <a:t>Teaching is about building thinkers, not just coders</a:t>
+            </a:r>
+            <a:endParaRPr lang="en-US" sz="1600" dirty="0"/>
+          </a:p>
+        </p:txBody>
+      </p:sp>
+      <p:sp>
+        <p:nvSpPr>
+          <p:cNvPr id="8" name="Shape 6"/>
+          <p:cNvSpPr/>
+          <p:nvPr/>
+        </p:nvSpPr>
+        <p:spPr>
+          <a:xfrm>
+            <a:off x="548640" y="1874520"/>
+            <a:ext cx="8046720" cy="548640"/>
+          </a:xfrm>
+          <a:prstGeom prst="rect">
+            <a:avLst/>
+          </a:prstGeom>
+          <a:solidFill>
+            <a:srgbClr val="065A82">
+              <a:alpha val="80000"/>
+            </a:srgbClr>
+          </a:solidFill>
+          <a:ln/>
+        </p:spPr>
+      </p:sp>
+      <p:sp>
+        <p:nvSpPr>
+          <p:cNvPr id="9" name="Shape 7"/>
+          <p:cNvSpPr/>
+          <p:nvPr/>
+        </p:nvSpPr>
+        <p:spPr>
+          <a:xfrm>
+            <a:off x="548640" y="1874520"/>
+            <a:ext cx="54864" cy="548640"/>
+          </a:xfrm>
+          <a:prstGeom prst="rect">
+            <a:avLst/>
+          </a:prstGeom>
+          <a:solidFill>
+            <a:srgbClr val="21D19F"/>
+          </a:solidFill>
+          <a:ln/>
+        </p:spPr>
+      </p:sp>
+      <p:sp>
+        <p:nvSpPr>
+          <p:cNvPr id="10" name="Text 8"/>
+          <p:cNvSpPr/>
+          <p:nvPr/>
+        </p:nvSpPr>
+        <p:spPr>
+          <a:xfrm>
+            <a:off x="822960" y="1874520"/>
+            <a:ext cx="7589520" cy="548640"/>
+          </a:xfrm>
+          <a:prstGeom prst="rect">
+            <a:avLst/>
+          </a:prstGeom>
+          <a:noFill/>
+          <a:ln/>
+        </p:spPr>
+        <p:txBody>
+          <a:bodyPr wrap="square" rtlCol="0" anchor="ctr"/>
+          <a:lstStyle/>
+          <a:p>
+            <a:pPr indent="0" marL="0">
+              <a:buNone/>
+            </a:pPr>
+            <a:r>
+              <a:rPr lang="en-US" sz="1600" dirty="0">
+                <a:solidFill>
+                  <a:srgbClr val="FFFFFF"/>
+                </a:solidFill>
+              </a:rPr>
+              <a:t>ICPC training builds skills that AI cannot replace</a:t>
+            </a:r>
+            <a:endParaRPr lang="en-US" sz="1600" dirty="0"/>
+          </a:p>
+        </p:txBody>
+      </p:sp>
+      <p:sp>
+        <p:nvSpPr>
+          <p:cNvPr id="11" name="Shape 9"/>
+          <p:cNvSpPr/>
+          <p:nvPr/>
+        </p:nvSpPr>
+        <p:spPr>
+          <a:xfrm>
+            <a:off x="548640" y="2560320"/>
+            <a:ext cx="8046720" cy="548640"/>
+          </a:xfrm>
+          <a:prstGeom prst="rect">
+            <a:avLst/>
+          </a:prstGeom>
+          <a:solidFill>
+            <a:srgbClr val="065A82">
+              <a:alpha val="80000"/>
+            </a:srgbClr>
+          </a:solidFill>
+          <a:ln/>
+        </p:spPr>
+      </p:sp>
+      <p:sp>
+        <p:nvSpPr>
+          <p:cNvPr id="12" name="Shape 10"/>
+          <p:cNvSpPr/>
+          <p:nvPr/>
+        </p:nvSpPr>
+        <p:spPr>
+          <a:xfrm>
+            <a:off x="548640" y="2560320"/>
+            <a:ext cx="54864" cy="548640"/>
+          </a:xfrm>
+          <a:prstGeom prst="rect">
+            <a:avLst/>
+          </a:prstGeom>
+          <a:solidFill>
+            <a:srgbClr val="21D19F"/>
+          </a:solidFill>
+          <a:ln/>
+        </p:spPr>
+      </p:sp>
+      <p:sp>
+        <p:nvSpPr>
+          <p:cNvPr id="13" name="Text 11"/>
+          <p:cNvSpPr/>
+          <p:nvPr/>
+        </p:nvSpPr>
+        <p:spPr>
+          <a:xfrm>
+            <a:off x="822960" y="2560320"/>
+            <a:ext cx="7589520" cy="548640"/>
+          </a:xfrm>
+          <a:prstGeom prst="rect">
+            <a:avLst/>
+          </a:prstGeom>
+          <a:noFill/>
+          <a:ln/>
+        </p:spPr>
+        <p:txBody>
+          <a:bodyPr wrap="square" rtlCol="0" anchor="ctr"/>
+          <a:lstStyle/>
+          <a:p>
+            <a:pPr indent="0" marL="0">
+              <a:buNone/>
+            </a:pPr>
+            <a:r>
+              <a:rPr lang="en-US" sz="1600" dirty="0">
+                <a:solidFill>
+                  <a:srgbClr val="FFFFFF"/>
+                </a:solidFill>
+              </a:rPr>
+              <a:t>I adapt to my students — my door is always open</a:t>
+            </a:r>
+            <a:endParaRPr lang="en-US" sz="1600" dirty="0"/>
+          </a:p>
+        </p:txBody>
+      </p:sp>
+      <p:sp>
+        <p:nvSpPr>
+          <p:cNvPr id="14" name="Shape 12"/>
+          <p:cNvSpPr/>
+          <p:nvPr/>
+        </p:nvSpPr>
+        <p:spPr>
+          <a:xfrm>
+            <a:off x="548640" y="3246120"/>
+            <a:ext cx="8046720" cy="548640"/>
+          </a:xfrm>
+          <a:prstGeom prst="rect">
+            <a:avLst/>
+          </a:prstGeom>
+          <a:solidFill>
+            <a:srgbClr val="065A82">
+              <a:alpha val="80000"/>
+            </a:srgbClr>
+          </a:solidFill>
+          <a:ln/>
+        </p:spPr>
+      </p:sp>
+      <p:sp>
+        <p:nvSpPr>
+          <p:cNvPr id="15" name="Shape 13"/>
+          <p:cNvSpPr/>
+          <p:nvPr/>
+        </p:nvSpPr>
+        <p:spPr>
+          <a:xfrm>
+            <a:off x="548640" y="3246120"/>
+            <a:ext cx="54864" cy="548640"/>
+          </a:xfrm>
+          <a:prstGeom prst="rect">
+            <a:avLst/>
+          </a:prstGeom>
+          <a:solidFill>
+            <a:srgbClr val="21D19F"/>
+          </a:solidFill>
+          <a:ln/>
+        </p:spPr>
+      </p:sp>
+      <p:sp>
+        <p:nvSpPr>
+          <p:cNvPr id="16" name="Text 14"/>
+          <p:cNvSpPr/>
+          <p:nvPr/>
+        </p:nvSpPr>
+        <p:spPr>
+          <a:xfrm>
+            <a:off x="822960" y="3246120"/>
+            <a:ext cx="7589520" cy="548640"/>
+          </a:xfrm>
+          <a:prstGeom prst="rect">
+            <a:avLst/>
+          </a:prstGeom>
+          <a:noFill/>
+          <a:ln/>
+        </p:spPr>
+        <p:txBody>
+          <a:bodyPr wrap="square" rtlCol="0" anchor="ctr"/>
+          <a:lstStyle/>
+          <a:p>
+            <a:pPr indent="0" marL="0">
+              <a:buNone/>
+            </a:pPr>
+            <a:r>
+              <a:rPr lang="en-US" sz="1600" dirty="0">
+                <a:solidFill>
+                  <a:srgbClr val="FFFFFF"/>
+                </a:solidFill>
+              </a:rPr>
+              <a:t>I’m excited to build something great with all of you</a:t>
+            </a:r>
+            <a:endParaRPr lang="en-US" sz="1600" dirty="0"/>
+          </a:p>
+        </p:txBody>
+      </p:sp>
+      <p:sp>
+        <p:nvSpPr>
+          <p:cNvPr id="17" name="Shape 15"/>
+          <p:cNvSpPr/>
+          <p:nvPr/>
+        </p:nvSpPr>
+        <p:spPr>
+          <a:xfrm>
+            <a:off x="548640" y="4023360"/>
+            <a:ext cx="8046720" cy="640080"/>
+          </a:xfrm>
+          <a:prstGeom prst="rect">
+            <a:avLst/>
+          </a:prstGeom>
+          <a:solidFill>
+            <a:srgbClr val="1C7293">
+              <a:alpha val="30000"/>
+            </a:srgbClr>
+          </a:solidFill>
+          <a:ln/>
+        </p:spPr>
+      </p:sp>
+      <p:sp>
+        <p:nvSpPr>
+          <p:cNvPr id="18" name="Text 16"/>
+          <p:cNvSpPr/>
+          <p:nvPr/>
+        </p:nvSpPr>
+        <p:spPr>
+          <a:xfrm>
+            <a:off x="777240" y="4023360"/>
+            <a:ext cx="7589520" cy="640080"/>
+          </a:xfrm>
+          <a:prstGeom prst="rect">
+            <a:avLst/>
+          </a:prstGeom>
+          <a:noFill/>
+          <a:ln/>
+        </p:spPr>
+        <p:txBody>
+          <a:bodyPr wrap="square" rtlCol="0" anchor="ctr"/>
+          <a:lstStyle/>
+          <a:p>
+            <a:pPr indent="0" marL="0">
+              <a:buNone/>
+            </a:pPr>
+            <a:r>
+              <a:rPr lang="en-US" sz="1400" b="1" dirty="0">
                 <a:solidFill>
                   <a:srgbClr val="21D19F"/>
                 </a:solidFill>
               </a:rPr>
-              <a:t>My door is open.</a:t>
-            </a:r>
-            <a:endParaRPr lang="en-US" sz="2000" dirty="0"/>
-          </a:p>
-          <a:p>
-            <a:pPr indent="0" marL="0">
-              <a:buNone/>
-            </a:pPr>
-            <a:r>
-              <a:rPr lang="en-US" sz="1000" dirty="0">
-                <a:solidFill>
-                  <a:srgbClr val="000000"/>
-                </a:solidFill>
-              </a:rPr>
-              <a:t> </a:t>
-            </a:r>
-            <a:endParaRPr lang="en-US" sz="2000" dirty="0"/>
-          </a:p>
-          <a:p>
-            <a:pPr indent="0" marL="0">
-              <a:buNone/>
-            </a:pPr>
-            <a:r>
-              <a:rPr lang="en-US" sz="1700" dirty="0">
-                <a:solidFill>
-                  <a:srgbClr val="EAF4F8"/>
-                </a:solidFill>
-              </a:rPr>
-              <a:t>Questions, ideas, collaborations —</a:t>
-            </a:r>
-            <a:endParaRPr lang="en-US" sz="2000" dirty="0"/>
-          </a:p>
-          <a:p>
-            <a:pPr indent="0" marL="0">
-              <a:buNone/>
-            </a:pPr>
-            <a:r>
-              <a:rPr lang="en-US" sz="1700" dirty="0">
-                <a:solidFill>
-                  <a:srgbClr val="EAF4F8"/>
-                </a:solidFill>
-              </a:rPr>
-              <a:t>I'm excited to meet every one of you.</a:t>
-            </a:r>
-            <a:endParaRPr lang="en-US" sz="2000" dirty="0"/>
-          </a:p>
-          <a:p>
-            <a:pPr indent="0" marL="0">
-              <a:buNone/>
-            </a:pPr>
-            <a:r>
-              <a:rPr lang="en-US" sz="1200" dirty="0">
-                <a:solidFill>
-                  <a:srgbClr val="000000"/>
-                </a:solidFill>
-              </a:rPr>
-              <a:t> </a:t>
-            </a:r>
-            <a:endParaRPr lang="en-US" sz="2000" dirty="0"/>
-          </a:p>
-          <a:p>
+              <a:t>[your.email@university.edu]  •  </a:t>
+            </a:r>
             <a:pPr indent="0" marL="0">
               <a:buNone/>
             </a:pPr>
             <a:r>
               <a:rPr lang="en-US" sz="1400" dirty="0">
                 <a:solidFill>
-                  <a:srgbClr val="5A7184"/>
-                </a:solidFill>
-              </a:rPr>
-              <a:t>[your.email@university.edu]</a:t>
-            </a:r>
-            <a:endParaRPr lang="en-US" sz="2000" dirty="0"/>
-          </a:p>
-          <a:p>
-            <a:pPr indent="0" marL="0">
-              <a:buNone/>
-            </a:pPr>
-            <a:r>
-              <a:rPr lang="en-US" sz="1400" dirty="0">
-                <a:solidFill>
-                  <a:srgbClr val="5A7184"/>
-                </a:solidFill>
-              </a:rPr>
-              <a:t>Office: [Room Number] — Office Hours: [Days/Times]</a:t>
-            </a:r>
-            <a:endParaRPr lang="en-US" sz="2000" dirty="0"/>
-          </a:p>
-        </p:txBody>
-      </p:sp>
-      <p:sp>
-        <p:nvSpPr>
-          <p:cNvPr id="7" name="Text 5"/>
+                  <a:srgbClr val="FFFFFF"/>
+                </a:solidFill>
+              </a:rPr>
+              <a:t>Office [Room]  •  Office Hours: [Days / Times]</a:t>
+            </a:r>
+            <a:endParaRPr lang="en-US" sz="1400" dirty="0"/>
+          </a:p>
+        </p:txBody>
+      </p:sp>
+      <p:sp>
+        <p:nvSpPr>
+          <p:cNvPr id="19" name="Text 17"/>
           <p:cNvSpPr/>
           <p:nvPr/>
         </p:nvSpPr>
@@ -3150,46 +3694,10 @@
             <a:r>
               <a:rPr lang="en-US" sz="1000" dirty="0">
                 <a:solidFill>
-                  <a:srgbClr val="5A7184"/>
+                  <a:srgbClr val="1C7293"/>
                 </a:solidFill>
               </a:rPr>
               <a:t>12 / 12</a:t>
-            </a:r>
-            <a:endParaRPr lang="en-US" sz="1000" dirty="0"/>
-          </a:p>
-        </p:txBody>
-      </p:sp>
-      <p:sp>
-        <p:nvSpPr>
-          <p:cNvPr id="8" name="Text 6"/>
-          <p:cNvSpPr/>
-          <p:nvPr/>
-        </p:nvSpPr>
-        <p:spPr>
-          <a:xfrm>
-            <a:off x="457200" y="4709160"/>
-            <a:ext cx="3657600" cy="320040"/>
-          </a:xfrm>
-          <a:prstGeom prst="rect">
-            <a:avLst/>
-          </a:prstGeom>
-          <a:noFill/>
-          <a:ln/>
-        </p:spPr>
-        <p:txBody>
-          <a:bodyPr wrap="square" rtlCol="0" anchor="ctr"/>
-          <a:lstStyle/>
-          <a:p>
-            <a:pPr indent="0" marL="0">
-              <a:buNone/>
-            </a:pPr>
-            <a:r>
-              <a:rPr lang="en-US" sz="1000" i="1" dirty="0">
-                <a:solidFill>
-                  <a:srgbClr val="5A7184"/>
-                </a:solidFill>
-              </a:rPr>
-              <a:t>Jiarui Zhang — Faculty Introduction</a:t>
             </a:r>
             <a:endParaRPr lang="en-US" sz="1000" dirty="0"/>
           </a:p>
@@ -3235,24 +3743,24 @@
         </p:nvSpPr>
         <p:spPr>
           <a:xfrm>
-            <a:off x="548640" y="256032"/>
-            <a:ext cx="8046720" cy="566928"/>
-          </a:xfrm>
-          <a:prstGeom prst="rect">
-            <a:avLst/>
-          </a:prstGeom>
-          <a:noFill/>
-          <a:ln/>
-        </p:spPr>
-        <p:txBody>
-          <a:bodyPr wrap="square" rtlCol="0" anchor="ctr"/>
-          <a:lstStyle/>
-          <a:p>
-            <a:pPr indent="0" marL="0">
-              <a:buNone/>
-            </a:pPr>
-            <a:r>
-              <a:rPr lang="en-US" sz="2800" b="1" dirty="0">
+            <a:off x="548640" y="274320"/>
+            <a:ext cx="8046720" cy="594360"/>
+          </a:xfrm>
+          <a:prstGeom prst="rect">
+            <a:avLst/>
+          </a:prstGeom>
+          <a:noFill/>
+          <a:ln/>
+        </p:spPr>
+        <p:txBody>
+          <a:bodyPr wrap="square" lIns="0" tIns="0" rIns="0" bIns="0" rtlCol="0" anchor="ctr"/>
+          <a:lstStyle/>
+          <a:p>
+            <a:pPr indent="0" marL="0">
+              <a:buNone/>
+            </a:pPr>
+            <a:r>
+              <a:rPr lang="en-US" sz="3000" b="1" dirty="0">
                 <a:solidFill>
                   <a:srgbClr val="0B1D3A"/>
                 </a:solidFill>
@@ -3262,29 +3770,45 @@
               </a:rPr>
               <a:t>About Me</a:t>
             </a:r>
-            <a:endParaRPr lang="en-US" sz="2800" dirty="0"/>
-          </a:p>
-        </p:txBody>
-      </p:sp>
-      <p:sp>
-        <p:nvSpPr>
-          <p:cNvPr id="3" name="Shape 1"/>
-          <p:cNvSpPr/>
-          <p:nvPr/>
-        </p:nvSpPr>
-        <p:spPr>
-          <a:xfrm>
-            <a:off x="548640" y="822960"/>
-            <a:ext cx="8046720" cy="27432"/>
-          </a:xfrm>
-          <a:prstGeom prst="rect">
-            <a:avLst/>
-          </a:prstGeom>
-          <a:solidFill>
-            <a:srgbClr val="1C7293"/>
-          </a:solidFill>
-          <a:ln/>
-        </p:spPr>
+            <a:endParaRPr lang="en-US" sz="3000" dirty="0"/>
+          </a:p>
+        </p:txBody>
+      </p:sp>
+      <p:sp>
+        <p:nvSpPr>
+          <p:cNvPr id="3" name="Text 1"/>
+          <p:cNvSpPr/>
+          <p:nvPr/>
+        </p:nvSpPr>
+        <p:spPr>
+          <a:xfrm>
+            <a:off x="8046720" y="4709160"/>
+            <a:ext cx="914400" cy="320040"/>
+          </a:xfrm>
+          <a:prstGeom prst="rect">
+            <a:avLst/>
+          </a:prstGeom>
+          <a:noFill/>
+          <a:ln/>
+        </p:spPr>
+        <p:txBody>
+          <a:bodyPr wrap="square" rtlCol="0" anchor="ctr"/>
+          <a:lstStyle/>
+          <a:p>
+            <a:pPr algn="r" indent="0" marL="0">
+              <a:buNone/>
+            </a:pPr>
+            <a:r>
+              <a:rPr lang="en-US" sz="1000" dirty="0">
+                <a:solidFill>
+                  <a:srgbClr val="5A7184"/>
+                </a:solidFill>
+              </a:rPr>
+              <a:t>2 / 12</a:t>
+            </a:r>
+            <a:endParaRPr lang="en-US" sz="1000" dirty="0"/>
+          </a:p>
+        </p:txBody>
       </p:sp>
       <p:sp>
         <p:nvSpPr>
@@ -3294,8 +3818,8 @@
         </p:nvSpPr>
         <p:spPr>
           <a:xfrm>
-            <a:off x="502920" y="960120"/>
-            <a:ext cx="4754880" cy="3657600"/>
+            <a:off x="457200" y="4709160"/>
+            <a:ext cx="2743200" cy="320040"/>
           </a:xfrm>
           <a:prstGeom prst="rect">
             <a:avLst/>
@@ -3307,283 +3831,309 @@
           <a:bodyPr wrap="square" rtlCol="0" anchor="ctr"/>
           <a:lstStyle/>
           <a:p>
-            <a:pPr marL="190500" indent="-190500">
+            <a:pPr indent="0" marL="0">
+              <a:buNone/>
+            </a:pPr>
+            <a:r>
+              <a:rPr lang="en-US" sz="1000" i="1" dirty="0">
+                <a:solidFill>
+                  <a:srgbClr val="5A7184"/>
+                </a:solidFill>
+              </a:rPr>
+              <a:t>Faculty Introduction</a:t>
+            </a:r>
+            <a:endParaRPr lang="en-US" sz="1000" dirty="0"/>
+          </a:p>
+        </p:txBody>
+      </p:sp>
+      <p:sp>
+        <p:nvSpPr>
+          <p:cNvPr id="5" name="Shape 3"/>
+          <p:cNvSpPr/>
+          <p:nvPr/>
+        </p:nvSpPr>
+        <p:spPr>
+          <a:xfrm>
+            <a:off x="548640" y="1005840"/>
+            <a:ext cx="4572000" cy="3566160"/>
+          </a:xfrm>
+          <a:prstGeom prst="rect">
+            <a:avLst/>
+          </a:prstGeom>
+          <a:solidFill>
+            <a:srgbClr val="FFFFFF"/>
+          </a:solidFill>
+          <a:ln/>
+          <a:effectLst>
+            <a:outerShdw sx="100000" sy="100000" kx="0" ky="0" algn="bl" rotWithShape="0" blurRad="101600" dist="38100" dir="8100000">
+              <a:srgbClr val="000000">
+                <a:alpha val="12000"/>
+              </a:srgbClr>
+            </a:outerShdw>
+          </a:effectLst>
+        </p:spPr>
+      </p:sp>
+      <p:sp>
+        <p:nvSpPr>
+          <p:cNvPr id="6" name="Text 4"/>
+          <p:cNvSpPr/>
+          <p:nvPr/>
+        </p:nvSpPr>
+        <p:spPr>
+          <a:xfrm>
+            <a:off x="777240" y="1143000"/>
+            <a:ext cx="4160520" cy="3291840"/>
+          </a:xfrm>
+          <a:prstGeom prst="rect">
+            <a:avLst/>
+          </a:prstGeom>
+          <a:noFill/>
+          <a:ln/>
+        </p:spPr>
+        <p:txBody>
+          <a:bodyPr wrap="square" rtlCol="0" anchor="ctr"/>
+          <a:lstStyle/>
+          <a:p>
+            <a:pPr indent="0" marL="0">
+              <a:buNone/>
+            </a:pPr>
+            <a:r>
+              <a:rPr lang="en-US" sz="1600" b="1" dirty="0">
+                <a:solidFill>
+                  <a:srgbClr val="0B1D3A"/>
+                </a:solidFill>
+              </a:rPr>
+              <a:t>Education</a:t>
+            </a:r>
+            <a:endParaRPr lang="en-US" sz="1600" dirty="0"/>
+          </a:p>
+          <a:p>
+            <a:pPr marL="342900" indent="-342900">
               <a:buSzPct val="100000"/>
               <a:buChar char="•"/>
             </a:pPr>
             <a:r>
-              <a:rPr lang="en-US" sz="1900" b="1" dirty="0">
-                <a:solidFill>
-                  <a:srgbClr val="1A1A2E"/>
-                </a:solidFill>
-              </a:rPr>
-              <a:t>Education</a:t>
-            </a:r>
-            <a:endParaRPr lang="en-US" sz="1800" dirty="0"/>
-          </a:p>
-          <a:p>
-            <a:pPr lvl="1" marL="508000" indent="-254000">
+              <a:rPr lang="en-US" sz="1300" dirty="0">
+                <a:solidFill>
+                  <a:srgbClr val="5A7184"/>
+                </a:solidFill>
+              </a:rPr>
+              <a:t>B.Eng. in Computer Engineering</a:t>
+            </a:r>
+            <a:endParaRPr lang="en-US" sz="1600" dirty="0"/>
+          </a:p>
+          <a:p>
+            <a:pPr marL="342900" indent="-342900">
               <a:buSzPct val="100000"/>
               <a:buChar char="•"/>
             </a:pPr>
             <a:r>
-              <a:rPr lang="en-US" sz="1600" dirty="0">
+              <a:rPr lang="en-US" sz="1300" dirty="0">
                 <a:solidFill>
                   <a:srgbClr val="5A7184"/>
                 </a:solidFill>
               </a:rPr>
-              <a:t>B.Eng. in Computer Engineering</a:t>
-            </a:r>
-            <a:endParaRPr lang="en-US" sz="1800" dirty="0"/>
-          </a:p>
-          <a:p>
-            <a:pPr lvl="1" marL="508000" indent="-254000">
+              <a:t>M.Sc. / Ph.D. — [Institution, Year]</a:t>
+            </a:r>
+            <a:endParaRPr lang="en-US" sz="1600" dirty="0"/>
+          </a:p>
+          <a:p>
+            <a:pPr indent="0" marL="0">
+              <a:buNone/>
+            </a:pPr>
+            <a:r>
+              <a:rPr lang="en-US" sz="800" dirty="0">
+                <a:solidFill>
+                  <a:srgbClr val="000000"/>
+                </a:solidFill>
+              </a:rPr>
+              <a:t> </a:t>
+            </a:r>
+            <a:endParaRPr lang="en-US" sz="1600" dirty="0"/>
+          </a:p>
+          <a:p>
+            <a:pPr indent="0" marL="0">
+              <a:buNone/>
+            </a:pPr>
+            <a:r>
+              <a:rPr lang="en-US" sz="1600" b="1" dirty="0">
+                <a:solidFill>
+                  <a:srgbClr val="0B1D3A"/>
+                </a:solidFill>
+              </a:rPr>
+              <a:t>Where I’m From</a:t>
+            </a:r>
+            <a:endParaRPr lang="en-US" sz="1600" dirty="0"/>
+          </a:p>
+          <a:p>
+            <a:pPr marL="342900" indent="-342900">
               <a:buSzPct val="100000"/>
               <a:buChar char="•"/>
             </a:pPr>
             <a:r>
-              <a:rPr lang="en-US" sz="1600" dirty="0">
+              <a:rPr lang="en-US" sz="1300" dirty="0">
                 <a:solidFill>
                   <a:srgbClr val="5A7184"/>
                 </a:solidFill>
               </a:rPr>
-              <a:t>M.Sc. / Ph.D. — [Institution, Year]</a:t>
-            </a:r>
-            <a:endParaRPr lang="en-US" sz="1800" dirty="0"/>
-          </a:p>
-          <a:p>
-            <a:pPr indent="0" marL="0">
-              <a:buNone/>
-            </a:pPr>
-            <a:endParaRPr lang="en-US" sz="1800" dirty="0"/>
-          </a:p>
-          <a:p>
-            <a:pPr marL="190500" indent="-190500">
+              <a:t>[City / Region] — shaped my curiosity about systems</a:t>
+            </a:r>
+            <a:endParaRPr lang="en-US" sz="1600" dirty="0"/>
+          </a:p>
+          <a:p>
+            <a:pPr indent="0" marL="0">
+              <a:buNone/>
+            </a:pPr>
+            <a:r>
+              <a:rPr lang="en-US" sz="800" dirty="0">
+                <a:solidFill>
+                  <a:srgbClr val="000000"/>
+                </a:solidFill>
+              </a:rPr>
+              <a:t> </a:t>
+            </a:r>
+            <a:endParaRPr lang="en-US" sz="1600" dirty="0"/>
+          </a:p>
+          <a:p>
+            <a:pPr indent="0" marL="0">
+              <a:buNone/>
+            </a:pPr>
+            <a:r>
+              <a:rPr lang="en-US" sz="1600" b="1" dirty="0">
+                <a:solidFill>
+                  <a:srgbClr val="0B1D3A"/>
+                </a:solidFill>
+              </a:rPr>
+              <a:t>Before This Role</a:t>
+            </a:r>
+            <a:endParaRPr lang="en-US" sz="1600" dirty="0"/>
+          </a:p>
+          <a:p>
+            <a:pPr marL="342900" indent="-342900">
               <a:buSzPct val="100000"/>
               <a:buChar char="•"/>
             </a:pPr>
             <a:r>
-              <a:rPr lang="en-US" sz="1900" b="1" dirty="0">
-                <a:solidFill>
-                  <a:srgbClr val="1A1A2E"/>
-                </a:solidFill>
-              </a:rPr>
-              <a:t>Where I'm From</a:t>
-            </a:r>
-            <a:endParaRPr lang="en-US" sz="1800" dirty="0"/>
-          </a:p>
-          <a:p>
-            <a:pPr lvl="1" marL="508000" indent="-254000">
+              <a:rPr lang="en-US" sz="1300" dirty="0">
+                <a:solidFill>
+                  <a:srgbClr val="5A7184"/>
+                </a:solidFill>
+              </a:rPr>
+              <a:t>Industry: [Company / project]</a:t>
+            </a:r>
+            <a:endParaRPr lang="en-US" sz="1600" dirty="0"/>
+          </a:p>
+          <a:p>
+            <a:pPr marL="342900" indent="-342900">
               <a:buSzPct val="100000"/>
               <a:buChar char="•"/>
             </a:pPr>
             <a:r>
-              <a:rPr lang="en-US" sz="1600" dirty="0">
+              <a:rPr lang="en-US" sz="1300" dirty="0">
                 <a:solidFill>
                   <a:srgbClr val="5A7184"/>
                 </a:solidFill>
               </a:rPr>
-              <a:t>[City / Region] — shaped my curiosity about systems</a:t>
-            </a:r>
-            <a:endParaRPr lang="en-US" sz="1800" dirty="0"/>
-          </a:p>
-          <a:p>
-            <a:pPr indent="0" marL="0">
-              <a:buNone/>
-            </a:pPr>
-            <a:endParaRPr lang="en-US" sz="1800" dirty="0"/>
-          </a:p>
-          <a:p>
-            <a:pPr marL="190500" indent="-190500">
-              <a:buSzPct val="100000"/>
-              <a:buChar char="•"/>
-            </a:pPr>
-            <a:r>
-              <a:rPr lang="en-US" sz="1900" b="1" dirty="0">
-                <a:solidFill>
-                  <a:srgbClr val="1A1A2E"/>
-                </a:solidFill>
-              </a:rPr>
-              <a:t>Before This Role</a:t>
-            </a:r>
-            <a:endParaRPr lang="en-US" sz="1800" dirty="0"/>
-          </a:p>
-          <a:p>
-            <a:pPr lvl="1" marL="508000" indent="-254000">
-              <a:buSzPct val="100000"/>
-              <a:buChar char="•"/>
-            </a:pPr>
-            <a:r>
-              <a:rPr lang="en-US" sz="1600" dirty="0">
+              <a:t>Research: [Lab name / topic]</a:t>
+            </a:r>
+            <a:endParaRPr lang="en-US" sz="1600" dirty="0"/>
+          </a:p>
+        </p:txBody>
+      </p:sp>
+      <p:sp>
+        <p:nvSpPr>
+          <p:cNvPr id="7" name="Shape 5"/>
+          <p:cNvSpPr/>
+          <p:nvPr/>
+        </p:nvSpPr>
+        <p:spPr>
+          <a:xfrm>
+            <a:off x="5486400" y="1005840"/>
+            <a:ext cx="3108960" cy="3566160"/>
+          </a:xfrm>
+          <a:prstGeom prst="rect">
+            <a:avLst/>
+          </a:prstGeom>
+          <a:solidFill>
+            <a:srgbClr val="EAF4F8"/>
+          </a:solidFill>
+          <a:ln/>
+          <a:effectLst>
+            <a:outerShdw sx="100000" sy="100000" kx="0" ky="0" algn="bl" rotWithShape="0" blurRad="101600" dist="38100" dir="8100000">
+              <a:srgbClr val="000000">
+                <a:alpha val="12000"/>
+              </a:srgbClr>
+            </a:outerShdw>
+          </a:effectLst>
+        </p:spPr>
+      </p:sp>
+      <p:sp>
+        <p:nvSpPr>
+          <p:cNvPr id="8" name="Shape 6"/>
+          <p:cNvSpPr/>
+          <p:nvPr/>
+        </p:nvSpPr>
+        <p:spPr>
+          <a:xfrm>
+            <a:off x="5486400" y="1005840"/>
+            <a:ext cx="3108960" cy="54864"/>
+          </a:xfrm>
+          <a:prstGeom prst="rect">
+            <a:avLst/>
+          </a:prstGeom>
+          <a:solidFill>
+            <a:srgbClr val="1C7293"/>
+          </a:solidFill>
+          <a:ln/>
+        </p:spPr>
+      </p:sp>
+      <p:sp>
+        <p:nvSpPr>
+          <p:cNvPr id="9" name="Text 7"/>
+          <p:cNvSpPr/>
+          <p:nvPr/>
+        </p:nvSpPr>
+        <p:spPr>
+          <a:xfrm>
+            <a:off x="5486400" y="1005840"/>
+            <a:ext cx="3108960" cy="3566160"/>
+          </a:xfrm>
+          <a:prstGeom prst="rect">
+            <a:avLst/>
+          </a:prstGeom>
+          <a:noFill/>
+          <a:ln/>
+        </p:spPr>
+        <p:txBody>
+          <a:bodyPr wrap="square" rtlCol="0" anchor="ctr"/>
+          <a:lstStyle/>
+          <a:p>
+            <a:pPr algn="ctr" indent="0" marL="0">
+              <a:buNone/>
+            </a:pPr>
+            <a:r>
+              <a:rPr lang="en-US" sz="1500" i="1" dirty="0">
                 <a:solidFill>
                   <a:srgbClr val="5A7184"/>
                 </a:solidFill>
               </a:rPr>
-              <a:t>Industry: [Company / project]</a:t>
-            </a:r>
-            <a:endParaRPr lang="en-US" sz="1800" dirty="0"/>
-          </a:p>
-          <a:p>
-            <a:pPr lvl="1" marL="508000" indent="-254000">
-              <a:buSzPct val="100000"/>
-              <a:buChar char="•"/>
-            </a:pPr>
-            <a:r>
-              <a:rPr lang="en-US" sz="1600" dirty="0">
+              <a:t>[ Photo 1 ]</a:t>
+            </a:r>
+            <a:endParaRPr lang="en-US" sz="1500" dirty="0"/>
+          </a:p>
+          <a:p>
+            <a:pPr algn="ctr" indent="0" marL="0">
+              <a:buNone/>
+            </a:pPr>
+            <a:r>
+              <a:rPr lang="en-US" sz="1500" i="1" dirty="0">
                 <a:solidFill>
                   <a:srgbClr val="5A7184"/>
                 </a:solidFill>
               </a:rPr>
-              <a:t>Research lab: [Lab name / topic]</a:t>
-            </a:r>
-            <a:endParaRPr lang="en-US" sz="1800" dirty="0"/>
-          </a:p>
-        </p:txBody>
-      </p:sp>
-      <p:sp>
-        <p:nvSpPr>
-          <p:cNvPr id="5" name="Shape 3"/>
-          <p:cNvSpPr/>
-          <p:nvPr/>
-        </p:nvSpPr>
-        <p:spPr>
-          <a:xfrm>
-            <a:off x="5577840" y="960120"/>
-            <a:ext cx="3017520" cy="3108960"/>
-          </a:xfrm>
-          <a:prstGeom prst="rect">
-            <a:avLst/>
-          </a:prstGeom>
-          <a:solidFill>
-            <a:srgbClr val="EAF4F8"/>
-          </a:solidFill>
-          <a:ln w="25400">
-            <a:solidFill>
-              <a:srgbClr val="1C7293"/>
-            </a:solidFill>
-            <a:prstDash val="solid"/>
-          </a:ln>
-        </p:spPr>
-      </p:sp>
-      <p:sp>
-        <p:nvSpPr>
-          <p:cNvPr id="6" name="Text 4"/>
-          <p:cNvSpPr/>
-          <p:nvPr/>
-        </p:nvSpPr>
-        <p:spPr>
-          <a:xfrm>
-            <a:off x="5577840" y="960120"/>
-            <a:ext cx="3017520" cy="3108960"/>
-          </a:xfrm>
-          <a:prstGeom prst="rect">
-            <a:avLst/>
-          </a:prstGeom>
-          <a:noFill/>
-          <a:ln/>
-        </p:spPr>
-        <p:txBody>
-          <a:bodyPr wrap="square" rtlCol="0" anchor="ctr"/>
-          <a:lstStyle/>
-          <a:p>
-            <a:pPr algn="ctr" indent="0" marL="0">
-              <a:buNone/>
-            </a:pPr>
-            <a:r>
-              <a:rPr lang="en-US" sz="1500" i="1" dirty="0">
-                <a:solidFill>
-                  <a:srgbClr val="5A7184"/>
-                </a:solidFill>
-              </a:rPr>
-              <a:t>[ Photo 1 ]</a:t>
+              <a:t>Personal / Lab Photo</a:t>
             </a:r>
             <a:endParaRPr lang="en-US" sz="1500" dirty="0"/>
-          </a:p>
-          <a:p>
-            <a:pPr algn="ctr" indent="0" marL="0">
-              <a:buNone/>
-            </a:pPr>
-            <a:r>
-              <a:rPr lang="en-US" sz="1500" i="1" dirty="0">
-                <a:solidFill>
-                  <a:srgbClr val="5A7184"/>
-                </a:solidFill>
-              </a:rPr>
-              <a:t>Personal / Lab Photo</a:t>
-            </a:r>
-            <a:endParaRPr lang="en-US" sz="1500" dirty="0"/>
-          </a:p>
-        </p:txBody>
-      </p:sp>
-      <p:sp>
-        <p:nvSpPr>
-          <p:cNvPr id="7" name="Text 5"/>
-          <p:cNvSpPr/>
-          <p:nvPr/>
-        </p:nvSpPr>
-        <p:spPr>
-          <a:xfrm>
-            <a:off x="8046720" y="4709160"/>
-            <a:ext cx="914400" cy="320040"/>
-          </a:xfrm>
-          <a:prstGeom prst="rect">
-            <a:avLst/>
-          </a:prstGeom>
-          <a:noFill/>
-          <a:ln/>
-        </p:spPr>
-        <p:txBody>
-          <a:bodyPr wrap="square" rtlCol="0" anchor="ctr"/>
-          <a:lstStyle/>
-          <a:p>
-            <a:pPr algn="r" indent="0" marL="0">
-              <a:buNone/>
-            </a:pPr>
-            <a:r>
-              <a:rPr lang="en-US" sz="1000" dirty="0">
-                <a:solidFill>
-                  <a:srgbClr val="5A7184"/>
-                </a:solidFill>
-              </a:rPr>
-              <a:t>2 / 12</a:t>
-            </a:r>
-            <a:endParaRPr lang="en-US" sz="1000" dirty="0"/>
-          </a:p>
-        </p:txBody>
-      </p:sp>
-      <p:sp>
-        <p:nvSpPr>
-          <p:cNvPr id="8" name="Text 6"/>
-          <p:cNvSpPr/>
-          <p:nvPr/>
-        </p:nvSpPr>
-        <p:spPr>
-          <a:xfrm>
-            <a:off x="457200" y="4709160"/>
-            <a:ext cx="3657600" cy="320040"/>
-          </a:xfrm>
-          <a:prstGeom prst="rect">
-            <a:avLst/>
-          </a:prstGeom>
-          <a:noFill/>
-          <a:ln/>
-        </p:spPr>
-        <p:txBody>
-          <a:bodyPr wrap="square" rtlCol="0" anchor="ctr"/>
-          <a:lstStyle/>
-          <a:p>
-            <a:pPr indent="0" marL="0">
-              <a:buNone/>
-            </a:pPr>
-            <a:r>
-              <a:rPr lang="en-US" sz="1000" i="1" dirty="0">
-                <a:solidFill>
-                  <a:srgbClr val="5A7184"/>
-                </a:solidFill>
-              </a:rPr>
-              <a:t>Jiarui Zhang — Faculty Introduction</a:t>
-            </a:r>
-            <a:endParaRPr lang="en-US" sz="1000" dirty="0"/>
           </a:p>
         </p:txBody>
       </p:sp>
@@ -3627,24 +4177,24 @@
         </p:nvSpPr>
         <p:spPr>
           <a:xfrm>
-            <a:off x="548640" y="256032"/>
-            <a:ext cx="8046720" cy="566928"/>
-          </a:xfrm>
-          <a:prstGeom prst="rect">
-            <a:avLst/>
-          </a:prstGeom>
-          <a:noFill/>
-          <a:ln/>
-        </p:spPr>
-        <p:txBody>
-          <a:bodyPr wrap="square" rtlCol="0" anchor="ctr"/>
-          <a:lstStyle/>
-          <a:p>
-            <a:pPr indent="0" marL="0">
-              <a:buNone/>
-            </a:pPr>
-            <a:r>
-              <a:rPr lang="en-US" sz="2800" b="1" dirty="0">
+            <a:off x="548640" y="274320"/>
+            <a:ext cx="8046720" cy="594360"/>
+          </a:xfrm>
+          <a:prstGeom prst="rect">
+            <a:avLst/>
+          </a:prstGeom>
+          <a:noFill/>
+          <a:ln/>
+        </p:spPr>
+        <p:txBody>
+          <a:bodyPr wrap="square" lIns="0" tIns="0" rIns="0" bIns="0" rtlCol="0" anchor="ctr"/>
+          <a:lstStyle/>
+          <a:p>
+            <a:pPr indent="0" marL="0">
+              <a:buNone/>
+            </a:pPr>
+            <a:r>
+              <a:rPr lang="en-US" sz="3000" b="1" dirty="0">
                 <a:solidFill>
                   <a:srgbClr val="0B1D3A"/>
                 </a:solidFill>
@@ -3654,217 +4204,13 @@
               </a:rPr>
               <a:t>Teaching Experience</a:t>
             </a:r>
-            <a:endParaRPr lang="en-US" sz="2800" dirty="0"/>
-          </a:p>
-        </p:txBody>
-      </p:sp>
-      <p:sp>
-        <p:nvSpPr>
-          <p:cNvPr id="3" name="Shape 1"/>
-          <p:cNvSpPr/>
-          <p:nvPr/>
-        </p:nvSpPr>
-        <p:spPr>
-          <a:xfrm>
-            <a:off x="548640" y="822960"/>
-            <a:ext cx="8046720" cy="27432"/>
-          </a:xfrm>
-          <a:prstGeom prst="rect">
-            <a:avLst/>
-          </a:prstGeom>
-          <a:solidFill>
-            <a:srgbClr val="1C7293"/>
-          </a:solidFill>
-          <a:ln/>
-        </p:spPr>
-      </p:sp>
-      <p:sp>
-        <p:nvSpPr>
-          <p:cNvPr id="4" name="Text 2"/>
-          <p:cNvSpPr/>
-          <p:nvPr/>
-        </p:nvSpPr>
-        <p:spPr>
-          <a:xfrm>
-            <a:off x="502920" y="960120"/>
-            <a:ext cx="8229600" cy="3749040"/>
-          </a:xfrm>
-          <a:prstGeom prst="rect">
-            <a:avLst/>
-          </a:prstGeom>
-          <a:noFill/>
-          <a:ln/>
-        </p:spPr>
-        <p:txBody>
-          <a:bodyPr wrap="square" rtlCol="0" anchor="ctr"/>
-          <a:lstStyle/>
-          <a:p>
-            <a:pPr marL="190500" indent="-190500">
-              <a:buSzPct val="100000"/>
-              <a:buChar char="•"/>
-            </a:pPr>
-            <a:r>
-              <a:rPr lang="en-US" sz="1900" b="1" dirty="0">
-                <a:solidFill>
-                  <a:srgbClr val="1A1A2E"/>
-                </a:solidFill>
-              </a:rPr>
-              <a:t>Courses Taught</a:t>
-            </a:r>
-            <a:endParaRPr lang="en-US" sz="1800" dirty="0"/>
-          </a:p>
-          <a:p>
-            <a:pPr lvl="1" marL="508000" indent="-254000">
-              <a:buSzPct val="100000"/>
-              <a:buChar char="•"/>
-            </a:pPr>
-            <a:r>
-              <a:rPr lang="en-US" sz="1600" dirty="0">
-                <a:solidFill>
-                  <a:srgbClr val="5A7184"/>
-                </a:solidFill>
-              </a:rPr>
-              <a:t>Data Structures &amp; Algorithms  —  [Institution, Year]</a:t>
-            </a:r>
-            <a:endParaRPr lang="en-US" sz="1800" dirty="0"/>
-          </a:p>
-          <a:p>
-            <a:pPr lvl="1" marL="508000" indent="-254000">
-              <a:buSzPct val="100000"/>
-              <a:buChar char="•"/>
-            </a:pPr>
-            <a:r>
-              <a:rPr lang="en-US" sz="1600" dirty="0">
-                <a:solidFill>
-                  <a:srgbClr val="5A7184"/>
-                </a:solidFill>
-              </a:rPr>
-              <a:t>Introduction to Computer Science  —  [Institution, Year]</a:t>
-            </a:r>
-            <a:endParaRPr lang="en-US" sz="1800" dirty="0"/>
-          </a:p>
-          <a:p>
-            <a:pPr lvl="1" marL="508000" indent="-254000">
-              <a:buSzPct val="100000"/>
-              <a:buChar char="•"/>
-            </a:pPr>
-            <a:r>
-              <a:rPr lang="en-US" sz="1600" dirty="0">
-                <a:solidFill>
-                  <a:srgbClr val="5A7184"/>
-                </a:solidFill>
-              </a:rPr>
-              <a:t>Computer Networks / OS  —  [Institution, Year]</a:t>
-            </a:r>
-            <a:endParaRPr lang="en-US" sz="1800" dirty="0"/>
-          </a:p>
-          <a:p>
-            <a:pPr indent="0" marL="0">
-              <a:buNone/>
-            </a:pPr>
-            <a:endParaRPr lang="en-US" sz="1800" dirty="0"/>
-          </a:p>
-          <a:p>
-            <a:pPr marL="190500" indent="-190500">
-              <a:buSzPct val="100000"/>
-              <a:buChar char="•"/>
-            </a:pPr>
-            <a:r>
-              <a:rPr lang="en-US" sz="1900" b="1" dirty="0">
-                <a:solidFill>
-                  <a:srgbClr val="1A1A2E"/>
-                </a:solidFill>
-              </a:rPr>
-              <a:t>Teaching Philosophy</a:t>
-            </a:r>
-            <a:endParaRPr lang="en-US" sz="1800" dirty="0"/>
-          </a:p>
-          <a:p>
-            <a:pPr lvl="1" marL="508000" indent="-254000">
-              <a:buSzPct val="100000"/>
-              <a:buChar char="•"/>
-            </a:pPr>
-            <a:r>
-              <a:rPr lang="en-US" sz="1600" dirty="0">
-                <a:solidFill>
-                  <a:srgbClr val="5A7184"/>
-                </a:solidFill>
-              </a:rPr>
-              <a:t>Active learning: think-pair-share, live coding</a:t>
-            </a:r>
-            <a:endParaRPr lang="en-US" sz="1800" dirty="0"/>
-          </a:p>
-          <a:p>
-            <a:pPr lvl="1" marL="508000" indent="-254000">
-              <a:buSzPct val="100000"/>
-              <a:buChar char="•"/>
-            </a:pPr>
-            <a:r>
-              <a:rPr lang="en-US" sz="1600" dirty="0">
-                <a:solidFill>
-                  <a:srgbClr val="5A7184"/>
-                </a:solidFill>
-              </a:rPr>
-              <a:t>Bridge theory ↔ real-world practice</a:t>
-            </a:r>
-            <a:endParaRPr lang="en-US" sz="1800" dirty="0"/>
-          </a:p>
-          <a:p>
-            <a:pPr lvl="1" marL="508000" indent="-254000">
-              <a:buSzPct val="100000"/>
-              <a:buChar char="•"/>
-            </a:pPr>
-            <a:r>
-              <a:rPr lang="en-US" sz="1600" dirty="0">
-                <a:solidFill>
-                  <a:srgbClr val="5A7184"/>
-                </a:solidFill>
-              </a:rPr>
-              <a:t>Inclusive classroom; meet students where they are</a:t>
-            </a:r>
-            <a:endParaRPr lang="en-US" sz="1800" dirty="0"/>
-          </a:p>
-          <a:p>
-            <a:pPr indent="0" marL="0">
-              <a:buNone/>
-            </a:pPr>
-            <a:endParaRPr lang="en-US" sz="1800" dirty="0"/>
-          </a:p>
-          <a:p>
-            <a:pPr marL="190500" indent="-190500">
-              <a:buSzPct val="100000"/>
-              <a:buChar char="•"/>
-            </a:pPr>
-            <a:r>
-              <a:rPr lang="en-US" sz="1900" b="1" dirty="0">
-                <a:solidFill>
-                  <a:srgbClr val="1A1A2E"/>
-                </a:solidFill>
-              </a:rPr>
-              <a:t>Recognition</a:t>
-            </a:r>
-            <a:endParaRPr lang="en-US" sz="1800" dirty="0"/>
-          </a:p>
-          <a:p>
-            <a:pPr lvl="1" marL="508000" indent="-254000">
-              <a:buSzPct val="100000"/>
-              <a:buChar char="•"/>
-            </a:pPr>
-            <a:r>
-              <a:rPr lang="en-US" sz="1600" dirty="0">
-                <a:solidFill>
-                  <a:srgbClr val="5A7184"/>
-                </a:solidFill>
-              </a:rPr>
-              <a:t>[Award / positive feedback / course evaluation highlights]</a:t>
-            </a:r>
-            <a:endParaRPr lang="en-US" sz="1800" dirty="0"/>
-          </a:p>
-        </p:txBody>
-      </p:sp>
-      <p:sp>
-        <p:nvSpPr>
-          <p:cNvPr id="5" name="Text 3"/>
+            <a:endParaRPr lang="en-US" sz="3000" dirty="0"/>
+          </a:p>
+        </p:txBody>
+      </p:sp>
+      <p:sp>
+        <p:nvSpPr>
+          <p:cNvPr id="3" name="Text 1"/>
           <p:cNvSpPr/>
           <p:nvPr/>
         </p:nvSpPr>
@@ -3900,14 +4246,14 @@
       </p:sp>
       <p:sp>
         <p:nvSpPr>
-          <p:cNvPr id="6" name="Text 4"/>
+          <p:cNvPr id="4" name="Text 2"/>
           <p:cNvSpPr/>
           <p:nvPr/>
         </p:nvSpPr>
         <p:spPr>
           <a:xfrm>
             <a:off x="457200" y="4709160"/>
-            <a:ext cx="3657600" cy="320040"/>
+            <a:ext cx="2743200" cy="320040"/>
           </a:xfrm>
           <a:prstGeom prst="rect">
             <a:avLst/>
@@ -3928,9 +4274,417 @@
                   <a:srgbClr val="5A7184"/>
                 </a:solidFill>
               </a:rPr>
-              <a:t>Jiarui Zhang — Faculty Introduction</a:t>
+              <a:t>Faculty Introduction</a:t>
             </a:r>
             <a:endParaRPr lang="en-US" sz="1000" dirty="0"/>
+          </a:p>
+        </p:txBody>
+      </p:sp>
+      <p:sp>
+        <p:nvSpPr>
+          <p:cNvPr id="5" name="Shape 3"/>
+          <p:cNvSpPr/>
+          <p:nvPr/>
+        </p:nvSpPr>
+        <p:spPr>
+          <a:xfrm>
+            <a:off x="548640" y="1051560"/>
+            <a:ext cx="8046720" cy="1051560"/>
+          </a:xfrm>
+          <a:prstGeom prst="rect">
+            <a:avLst/>
+          </a:prstGeom>
+          <a:solidFill>
+            <a:srgbClr val="FFFFFF"/>
+          </a:solidFill>
+          <a:ln/>
+          <a:effectLst>
+            <a:outerShdw sx="100000" sy="100000" kx="0" ky="0" algn="bl" rotWithShape="0" blurRad="101600" dist="38100" dir="8100000">
+              <a:srgbClr val="000000">
+                <a:alpha val="12000"/>
+              </a:srgbClr>
+            </a:outerShdw>
+          </a:effectLst>
+        </p:spPr>
+      </p:sp>
+      <p:sp>
+        <p:nvSpPr>
+          <p:cNvPr id="6" name="Shape 4"/>
+          <p:cNvSpPr/>
+          <p:nvPr/>
+        </p:nvSpPr>
+        <p:spPr>
+          <a:xfrm>
+            <a:off x="777240" y="1234440"/>
+            <a:ext cx="685800" cy="685800"/>
+          </a:xfrm>
+          <a:prstGeom prst="ellipse">
+            <a:avLst/>
+          </a:prstGeom>
+          <a:solidFill>
+            <a:srgbClr val="065A82"/>
+          </a:solidFill>
+          <a:ln/>
+        </p:spPr>
+      </p:sp>
+      <p:sp>
+        <p:nvSpPr>
+          <p:cNvPr id="7" name="Text 5"/>
+          <p:cNvSpPr/>
+          <p:nvPr/>
+        </p:nvSpPr>
+        <p:spPr>
+          <a:xfrm>
+            <a:off x="777240" y="1234440"/>
+            <a:ext cx="685800" cy="685800"/>
+          </a:xfrm>
+          <a:prstGeom prst="rect">
+            <a:avLst/>
+          </a:prstGeom>
+          <a:noFill/>
+          <a:ln/>
+        </p:spPr>
+        <p:txBody>
+          <a:bodyPr wrap="square" rtlCol="0" anchor="ctr"/>
+          <a:lstStyle/>
+          <a:p>
+            <a:pPr algn="ctr" indent="0" marL="0">
+              <a:buNone/>
+            </a:pPr>
+            <a:r>
+              <a:rPr lang="en-US" sz="2200" b="1" dirty="0">
+                <a:solidFill>
+                  <a:srgbClr val="FFFFFF"/>
+                </a:solidFill>
+                <a:latin typeface="Georgia" pitchFamily="34" charset="0"/>
+                <a:ea typeface="Georgia" pitchFamily="34" charset="-122"/>
+                <a:cs typeface="Georgia" pitchFamily="34" charset="-120"/>
+              </a:rPr>
+              <a:t>1</a:t>
+            </a:r>
+            <a:endParaRPr lang="en-US" sz="2200" dirty="0"/>
+          </a:p>
+        </p:txBody>
+      </p:sp>
+      <p:sp>
+        <p:nvSpPr>
+          <p:cNvPr id="8" name="Text 6"/>
+          <p:cNvSpPr/>
+          <p:nvPr/>
+        </p:nvSpPr>
+        <p:spPr>
+          <a:xfrm>
+            <a:off x="1691640" y="1143000"/>
+            <a:ext cx="6675120" cy="868680"/>
+          </a:xfrm>
+          <a:prstGeom prst="rect">
+            <a:avLst/>
+          </a:prstGeom>
+          <a:noFill/>
+          <a:ln/>
+        </p:spPr>
+        <p:txBody>
+          <a:bodyPr wrap="square" rtlCol="0" anchor="ctr"/>
+          <a:lstStyle/>
+          <a:p>
+            <a:pPr indent="0" marL="0">
+              <a:buNone/>
+            </a:pPr>
+            <a:r>
+              <a:rPr lang="en-US" sz="1800" b="1" dirty="0">
+                <a:solidFill>
+                  <a:srgbClr val="0B1D3A"/>
+                </a:solidFill>
+              </a:rPr>
+              <a:t>Courses Taught</a:t>
+            </a:r>
+            <a:endParaRPr lang="en-US" sz="1800" dirty="0"/>
+          </a:p>
+          <a:p>
+            <a:pPr indent="0" marL="0">
+              <a:buNone/>
+            </a:pPr>
+            <a:r>
+              <a:rPr lang="en-US" sz="1300" dirty="0">
+                <a:solidFill>
+                  <a:srgbClr val="5A7184"/>
+                </a:solidFill>
+              </a:rPr>
+              <a:t>Data Structures &amp; Algorithms · Intro to CS · Computer Networks / OS  —  [Institution, Year]</a:t>
+            </a:r>
+            <a:endParaRPr lang="en-US" sz="1800" dirty="0"/>
+          </a:p>
+        </p:txBody>
+      </p:sp>
+      <p:sp>
+        <p:nvSpPr>
+          <p:cNvPr id="9" name="Shape 7"/>
+          <p:cNvSpPr/>
+          <p:nvPr/>
+        </p:nvSpPr>
+        <p:spPr>
+          <a:xfrm>
+            <a:off x="548640" y="2286000"/>
+            <a:ext cx="8046720" cy="1051560"/>
+          </a:xfrm>
+          <a:prstGeom prst="rect">
+            <a:avLst/>
+          </a:prstGeom>
+          <a:solidFill>
+            <a:srgbClr val="FFFFFF"/>
+          </a:solidFill>
+          <a:ln/>
+          <a:effectLst>
+            <a:outerShdw sx="100000" sy="100000" kx="0" ky="0" algn="bl" rotWithShape="0" blurRad="101600" dist="38100" dir="8100000">
+              <a:srgbClr val="000000">
+                <a:alpha val="12000"/>
+              </a:srgbClr>
+            </a:outerShdw>
+          </a:effectLst>
+        </p:spPr>
+      </p:sp>
+      <p:sp>
+        <p:nvSpPr>
+          <p:cNvPr id="10" name="Shape 8"/>
+          <p:cNvSpPr/>
+          <p:nvPr/>
+        </p:nvSpPr>
+        <p:spPr>
+          <a:xfrm>
+            <a:off x="777240" y="2468880"/>
+            <a:ext cx="685800" cy="685800"/>
+          </a:xfrm>
+          <a:prstGeom prst="ellipse">
+            <a:avLst/>
+          </a:prstGeom>
+          <a:solidFill>
+            <a:srgbClr val="1C7293"/>
+          </a:solidFill>
+          <a:ln/>
+        </p:spPr>
+      </p:sp>
+      <p:sp>
+        <p:nvSpPr>
+          <p:cNvPr id="11" name="Text 9"/>
+          <p:cNvSpPr/>
+          <p:nvPr/>
+        </p:nvSpPr>
+        <p:spPr>
+          <a:xfrm>
+            <a:off x="777240" y="2468880"/>
+            <a:ext cx="685800" cy="685800"/>
+          </a:xfrm>
+          <a:prstGeom prst="rect">
+            <a:avLst/>
+          </a:prstGeom>
+          <a:noFill/>
+          <a:ln/>
+        </p:spPr>
+        <p:txBody>
+          <a:bodyPr wrap="square" rtlCol="0" anchor="ctr"/>
+          <a:lstStyle/>
+          <a:p>
+            <a:pPr algn="ctr" indent="0" marL="0">
+              <a:buNone/>
+            </a:pPr>
+            <a:r>
+              <a:rPr lang="en-US" sz="2200" b="1" dirty="0">
+                <a:solidFill>
+                  <a:srgbClr val="FFFFFF"/>
+                </a:solidFill>
+                <a:latin typeface="Georgia" pitchFamily="34" charset="0"/>
+                <a:ea typeface="Georgia" pitchFamily="34" charset="-122"/>
+                <a:cs typeface="Georgia" pitchFamily="34" charset="-120"/>
+              </a:rPr>
+              <a:t>2</a:t>
+            </a:r>
+            <a:endParaRPr lang="en-US" sz="2200" dirty="0"/>
+          </a:p>
+        </p:txBody>
+      </p:sp>
+      <p:sp>
+        <p:nvSpPr>
+          <p:cNvPr id="12" name="Text 10"/>
+          <p:cNvSpPr/>
+          <p:nvPr/>
+        </p:nvSpPr>
+        <p:spPr>
+          <a:xfrm>
+            <a:off x="1691640" y="2377440"/>
+            <a:ext cx="6675120" cy="868680"/>
+          </a:xfrm>
+          <a:prstGeom prst="rect">
+            <a:avLst/>
+          </a:prstGeom>
+          <a:noFill/>
+          <a:ln/>
+        </p:spPr>
+        <p:txBody>
+          <a:bodyPr wrap="square" rtlCol="0" anchor="ctr"/>
+          <a:lstStyle/>
+          <a:p>
+            <a:pPr indent="0" marL="0">
+              <a:buNone/>
+            </a:pPr>
+            <a:r>
+              <a:rPr lang="en-US" sz="1800" b="1" dirty="0">
+                <a:solidFill>
+                  <a:srgbClr val="0B1D3A"/>
+                </a:solidFill>
+              </a:rPr>
+              <a:t>Teaching Philosophy</a:t>
+            </a:r>
+            <a:endParaRPr lang="en-US" sz="1800" dirty="0"/>
+          </a:p>
+          <a:p>
+            <a:pPr indent="0" marL="0">
+              <a:buNone/>
+            </a:pPr>
+            <a:r>
+              <a:rPr lang="en-US" sz="1300" dirty="0">
+                <a:solidFill>
+                  <a:srgbClr val="5A7184"/>
+                </a:solidFill>
+              </a:rPr>
+              <a:t>Active learning: think-pair-share, live coding. Bridge theory ↔ real-world practice. Inclusive classroom — meet students where they are.</a:t>
+            </a:r>
+            <a:endParaRPr lang="en-US" sz="1800" dirty="0"/>
+          </a:p>
+        </p:txBody>
+      </p:sp>
+      <p:sp>
+        <p:nvSpPr>
+          <p:cNvPr id="13" name="Shape 11"/>
+          <p:cNvSpPr/>
+          <p:nvPr/>
+        </p:nvSpPr>
+        <p:spPr>
+          <a:xfrm>
+            <a:off x="548640" y="3520440"/>
+            <a:ext cx="8046720" cy="1051560"/>
+          </a:xfrm>
+          <a:prstGeom prst="rect">
+            <a:avLst/>
+          </a:prstGeom>
+          <a:solidFill>
+            <a:srgbClr val="FFFFFF"/>
+          </a:solidFill>
+          <a:ln/>
+          <a:effectLst>
+            <a:outerShdw sx="100000" sy="100000" kx="0" ky="0" algn="bl" rotWithShape="0" blurRad="101600" dist="38100" dir="8100000">
+              <a:srgbClr val="000000">
+                <a:alpha val="12000"/>
+              </a:srgbClr>
+            </a:outerShdw>
+          </a:effectLst>
+        </p:spPr>
+      </p:sp>
+      <p:sp>
+        <p:nvSpPr>
+          <p:cNvPr id="14" name="Shape 12"/>
+          <p:cNvSpPr/>
+          <p:nvPr/>
+        </p:nvSpPr>
+        <p:spPr>
+          <a:xfrm>
+            <a:off x="777240" y="3703320"/>
+            <a:ext cx="685800" cy="685800"/>
+          </a:xfrm>
+          <a:prstGeom prst="ellipse">
+            <a:avLst/>
+          </a:prstGeom>
+          <a:solidFill>
+            <a:srgbClr val="FF6B35"/>
+          </a:solidFill>
+          <a:ln/>
+        </p:spPr>
+      </p:sp>
+      <p:sp>
+        <p:nvSpPr>
+          <p:cNvPr id="15" name="Text 13"/>
+          <p:cNvSpPr/>
+          <p:nvPr/>
+        </p:nvSpPr>
+        <p:spPr>
+          <a:xfrm>
+            <a:off x="777240" y="3703320"/>
+            <a:ext cx="685800" cy="685800"/>
+          </a:xfrm>
+          <a:prstGeom prst="rect">
+            <a:avLst/>
+          </a:prstGeom>
+          <a:noFill/>
+          <a:ln/>
+        </p:spPr>
+        <p:txBody>
+          <a:bodyPr wrap="square" rtlCol="0" anchor="ctr"/>
+          <a:lstStyle/>
+          <a:p>
+            <a:pPr algn="ctr" indent="0" marL="0">
+              <a:buNone/>
+            </a:pPr>
+            <a:r>
+              <a:rPr lang="en-US" sz="2200" b="1" dirty="0">
+                <a:solidFill>
+                  <a:srgbClr val="FFFFFF"/>
+                </a:solidFill>
+                <a:latin typeface="Georgia" pitchFamily="34" charset="0"/>
+                <a:ea typeface="Georgia" pitchFamily="34" charset="-122"/>
+                <a:cs typeface="Georgia" pitchFamily="34" charset="-120"/>
+              </a:rPr>
+              <a:t>3</a:t>
+            </a:r>
+            <a:endParaRPr lang="en-US" sz="2200" dirty="0"/>
+          </a:p>
+        </p:txBody>
+      </p:sp>
+      <p:sp>
+        <p:nvSpPr>
+          <p:cNvPr id="16" name="Text 14"/>
+          <p:cNvSpPr/>
+          <p:nvPr/>
+        </p:nvSpPr>
+        <p:spPr>
+          <a:xfrm>
+            <a:off x="1691640" y="3611880"/>
+            <a:ext cx="6675120" cy="868680"/>
+          </a:xfrm>
+          <a:prstGeom prst="rect">
+            <a:avLst/>
+          </a:prstGeom>
+          <a:noFill/>
+          <a:ln/>
+        </p:spPr>
+        <p:txBody>
+          <a:bodyPr wrap="square" rtlCol="0" anchor="ctr"/>
+          <a:lstStyle/>
+          <a:p>
+            <a:pPr indent="0" marL="0">
+              <a:buNone/>
+            </a:pPr>
+            <a:r>
+              <a:rPr lang="en-US" sz="1800" b="1" dirty="0">
+                <a:solidFill>
+                  <a:srgbClr val="0B1D3A"/>
+                </a:solidFill>
+              </a:rPr>
+              <a:t>Recognition</a:t>
+            </a:r>
+            <a:endParaRPr lang="en-US" sz="1800" dirty="0"/>
+          </a:p>
+          <a:p>
+            <a:pPr indent="0" marL="0">
+              <a:buNone/>
+            </a:pPr>
+            <a:r>
+              <a:rPr lang="en-US" sz="1300" dirty="0">
+                <a:solidFill>
+                  <a:srgbClr val="5A7184"/>
+                </a:solidFill>
+              </a:rPr>
+              <a:t>[Teaching award / positive course-evaluation highlights / notable student feedback]</a:t>
+            </a:r>
+            <a:endParaRPr lang="en-US" sz="1800" dirty="0"/>
           </a:p>
         </p:txBody>
       </p:sp>
@@ -3974,24 +4728,24 @@
         </p:nvSpPr>
         <p:spPr>
           <a:xfrm>
-            <a:off x="548640" y="256032"/>
-            <a:ext cx="8046720" cy="566928"/>
-          </a:xfrm>
-          <a:prstGeom prst="rect">
-            <a:avLst/>
-          </a:prstGeom>
-          <a:noFill/>
-          <a:ln/>
-        </p:spPr>
-        <p:txBody>
-          <a:bodyPr wrap="square" rtlCol="0" anchor="ctr"/>
-          <a:lstStyle/>
-          <a:p>
-            <a:pPr indent="0" marL="0">
-              <a:buNone/>
-            </a:pPr>
-            <a:r>
-              <a:rPr lang="en-US" sz="2800" b="1" dirty="0">
+            <a:off x="548640" y="274320"/>
+            <a:ext cx="8046720" cy="594360"/>
+          </a:xfrm>
+          <a:prstGeom prst="rect">
+            <a:avLst/>
+          </a:prstGeom>
+          <a:noFill/>
+          <a:ln/>
+        </p:spPr>
+        <p:txBody>
+          <a:bodyPr wrap="square" lIns="0" tIns="0" rIns="0" bIns="0" rtlCol="0" anchor="ctr"/>
+          <a:lstStyle/>
+          <a:p>
+            <a:pPr indent="0" marL="0">
+              <a:buNone/>
+            </a:pPr>
+            <a:r>
+              <a:rPr lang="en-US" sz="3000" b="1" dirty="0">
                 <a:solidFill>
                   <a:srgbClr val="0B1D3A"/>
                 </a:solidFill>
@@ -4001,29 +4755,45 @@
               </a:rPr>
               <a:t>Research Interests</a:t>
             </a:r>
-            <a:endParaRPr lang="en-US" sz="2800" dirty="0"/>
-          </a:p>
-        </p:txBody>
-      </p:sp>
-      <p:sp>
-        <p:nvSpPr>
-          <p:cNvPr id="3" name="Shape 1"/>
-          <p:cNvSpPr/>
-          <p:nvPr/>
-        </p:nvSpPr>
-        <p:spPr>
-          <a:xfrm>
-            <a:off x="548640" y="822960"/>
-            <a:ext cx="8046720" cy="27432"/>
-          </a:xfrm>
-          <a:prstGeom prst="rect">
-            <a:avLst/>
-          </a:prstGeom>
-          <a:solidFill>
-            <a:srgbClr val="1C7293"/>
-          </a:solidFill>
-          <a:ln/>
-        </p:spPr>
+            <a:endParaRPr lang="en-US" sz="3000" dirty="0"/>
+          </a:p>
+        </p:txBody>
+      </p:sp>
+      <p:sp>
+        <p:nvSpPr>
+          <p:cNvPr id="3" name="Text 1"/>
+          <p:cNvSpPr/>
+          <p:nvPr/>
+        </p:nvSpPr>
+        <p:spPr>
+          <a:xfrm>
+            <a:off x="8046720" y="4709160"/>
+            <a:ext cx="914400" cy="320040"/>
+          </a:xfrm>
+          <a:prstGeom prst="rect">
+            <a:avLst/>
+          </a:prstGeom>
+          <a:noFill/>
+          <a:ln/>
+        </p:spPr>
+        <p:txBody>
+          <a:bodyPr wrap="square" rtlCol="0" anchor="ctr"/>
+          <a:lstStyle/>
+          <a:p>
+            <a:pPr algn="r" indent="0" marL="0">
+              <a:buNone/>
+            </a:pPr>
+            <a:r>
+              <a:rPr lang="en-US" sz="1000" dirty="0">
+                <a:solidFill>
+                  <a:srgbClr val="5A7184"/>
+                </a:solidFill>
+              </a:rPr>
+              <a:t>4 / 12</a:t>
+            </a:r>
+            <a:endParaRPr lang="en-US" sz="1000" dirty="0"/>
+          </a:p>
+        </p:txBody>
       </p:sp>
       <p:sp>
         <p:nvSpPr>
@@ -4033,8 +4803,8 @@
         </p:nvSpPr>
         <p:spPr>
           <a:xfrm>
-            <a:off x="502920" y="960120"/>
-            <a:ext cx="4754880" cy="3657600"/>
+            <a:off x="457200" y="4709160"/>
+            <a:ext cx="2743200" cy="320040"/>
           </a:xfrm>
           <a:prstGeom prst="rect">
             <a:avLst/>
@@ -4046,283 +4816,309 @@
           <a:bodyPr wrap="square" rtlCol="0" anchor="ctr"/>
           <a:lstStyle/>
           <a:p>
-            <a:pPr marL="190500" indent="-190500">
+            <a:pPr indent="0" marL="0">
+              <a:buNone/>
+            </a:pPr>
+            <a:r>
+              <a:rPr lang="en-US" sz="1000" i="1" dirty="0">
+                <a:solidFill>
+                  <a:srgbClr val="5A7184"/>
+                </a:solidFill>
+              </a:rPr>
+              <a:t>Faculty Introduction</a:t>
+            </a:r>
+            <a:endParaRPr lang="en-US" sz="1000" dirty="0"/>
+          </a:p>
+        </p:txBody>
+      </p:sp>
+      <p:sp>
+        <p:nvSpPr>
+          <p:cNvPr id="5" name="Shape 3"/>
+          <p:cNvSpPr/>
+          <p:nvPr/>
+        </p:nvSpPr>
+        <p:spPr>
+          <a:xfrm>
+            <a:off x="548640" y="1005840"/>
+            <a:ext cx="4572000" cy="3566160"/>
+          </a:xfrm>
+          <a:prstGeom prst="rect">
+            <a:avLst/>
+          </a:prstGeom>
+          <a:solidFill>
+            <a:srgbClr val="FFFFFF"/>
+          </a:solidFill>
+          <a:ln/>
+          <a:effectLst>
+            <a:outerShdw sx="100000" sy="100000" kx="0" ky="0" algn="bl" rotWithShape="0" blurRad="101600" dist="38100" dir="8100000">
+              <a:srgbClr val="000000">
+                <a:alpha val="12000"/>
+              </a:srgbClr>
+            </a:outerShdw>
+          </a:effectLst>
+        </p:spPr>
+      </p:sp>
+      <p:sp>
+        <p:nvSpPr>
+          <p:cNvPr id="6" name="Text 4"/>
+          <p:cNvSpPr/>
+          <p:nvPr/>
+        </p:nvSpPr>
+        <p:spPr>
+          <a:xfrm>
+            <a:off x="777240" y="1143000"/>
+            <a:ext cx="4160520" cy="3291840"/>
+          </a:xfrm>
+          <a:prstGeom prst="rect">
+            <a:avLst/>
+          </a:prstGeom>
+          <a:noFill/>
+          <a:ln/>
+        </p:spPr>
+        <p:txBody>
+          <a:bodyPr wrap="square" rtlCol="0" anchor="ctr"/>
+          <a:lstStyle/>
+          <a:p>
+            <a:pPr indent="0" marL="0">
+              <a:buNone/>
+            </a:pPr>
+            <a:r>
+              <a:rPr lang="en-US" sz="1600" b="1" dirty="0">
+                <a:solidFill>
+                  <a:srgbClr val="0B1D3A"/>
+                </a:solidFill>
+              </a:rPr>
+              <a:t>Primary Area</a:t>
+            </a:r>
+            <a:endParaRPr lang="en-US" sz="1600" dirty="0"/>
+          </a:p>
+          <a:p>
+            <a:pPr marL="342900" indent="-342900">
               <a:buSzPct val="100000"/>
               <a:buChar char="•"/>
             </a:pPr>
             <a:r>
-              <a:rPr lang="en-US" sz="1900" b="1" dirty="0">
-                <a:solidFill>
-                  <a:srgbClr val="1A1A2E"/>
-                </a:solidFill>
-              </a:rPr>
-              <a:t>Primary Area</a:t>
-            </a:r>
-            <a:endParaRPr lang="en-US" sz="1800" dirty="0"/>
-          </a:p>
-          <a:p>
-            <a:pPr lvl="1" marL="508000" indent="-254000">
+              <a:rPr lang="en-US" sz="1300" dirty="0">
+                <a:solidFill>
+                  <a:srgbClr val="5A7184"/>
+                </a:solidFill>
+              </a:rPr>
+              <a:t>[e.g., Distributed Systems / Security / Edge Computing]</a:t>
+            </a:r>
+            <a:endParaRPr lang="en-US" sz="1600" dirty="0"/>
+          </a:p>
+          <a:p>
+            <a:pPr indent="0" marL="0">
+              <a:buNone/>
+            </a:pPr>
+            <a:r>
+              <a:rPr lang="en-US" sz="800" dirty="0">
+                <a:solidFill>
+                  <a:srgbClr val="000000"/>
+                </a:solidFill>
+              </a:rPr>
+              <a:t> </a:t>
+            </a:r>
+            <a:endParaRPr lang="en-US" sz="1600" dirty="0"/>
+          </a:p>
+          <a:p>
+            <a:pPr indent="0" marL="0">
+              <a:buNone/>
+            </a:pPr>
+            <a:r>
+              <a:rPr lang="en-US" sz="1600" b="1" dirty="0">
+                <a:solidFill>
+                  <a:srgbClr val="0B1D3A"/>
+                </a:solidFill>
+              </a:rPr>
+              <a:t>Selected Projects</a:t>
+            </a:r>
+            <a:endParaRPr lang="en-US" sz="1600" dirty="0"/>
+          </a:p>
+          <a:p>
+            <a:pPr marL="342900" indent="-342900">
               <a:buSzPct val="100000"/>
               <a:buChar char="•"/>
             </a:pPr>
             <a:r>
-              <a:rPr lang="en-US" sz="1600" dirty="0">
+              <a:rPr lang="en-US" sz="1300" dirty="0">
                 <a:solidFill>
                   <a:srgbClr val="5A7184"/>
                 </a:solidFill>
               </a:rPr>
-              <a:t>[e.g., Distributed Systems / Security / Edge Computing]</a:t>
-            </a:r>
-            <a:endParaRPr lang="en-US" sz="1800" dirty="0"/>
-          </a:p>
-          <a:p>
-            <a:pPr indent="0" marL="0">
-              <a:buNone/>
-            </a:pPr>
-            <a:endParaRPr lang="en-US" sz="1800" dirty="0"/>
-          </a:p>
-          <a:p>
-            <a:pPr marL="190500" indent="-190500">
+              <a:t>Project A — [one-line description, outcome]</a:t>
+            </a:r>
+            <a:endParaRPr lang="en-US" sz="1600" dirty="0"/>
+          </a:p>
+          <a:p>
+            <a:pPr marL="342900" indent="-342900">
               <a:buSzPct val="100000"/>
               <a:buChar char="•"/>
             </a:pPr>
             <a:r>
-              <a:rPr lang="en-US" sz="1900" b="1" dirty="0">
-                <a:solidFill>
-                  <a:srgbClr val="1A1A2E"/>
-                </a:solidFill>
-              </a:rPr>
-              <a:t>Selected Projects</a:t>
-            </a:r>
-            <a:endParaRPr lang="en-US" sz="1800" dirty="0"/>
-          </a:p>
-          <a:p>
-            <a:pPr lvl="1" marL="508000" indent="-254000">
+              <a:rPr lang="en-US" sz="1300" dirty="0">
+                <a:solidFill>
+                  <a:srgbClr val="5A7184"/>
+                </a:solidFill>
+              </a:rPr>
+              <a:t>Project B — [one-line description, outcome]</a:t>
+            </a:r>
+            <a:endParaRPr lang="en-US" sz="1600" dirty="0"/>
+          </a:p>
+          <a:p>
+            <a:pPr indent="0" marL="0">
+              <a:buNone/>
+            </a:pPr>
+            <a:r>
+              <a:rPr lang="en-US" sz="800" dirty="0">
+                <a:solidFill>
+                  <a:srgbClr val="000000"/>
+                </a:solidFill>
+              </a:rPr>
+              <a:t> </a:t>
+            </a:r>
+            <a:endParaRPr lang="en-US" sz="1600" dirty="0"/>
+          </a:p>
+          <a:p>
+            <a:pPr indent="0" marL="0">
+              <a:buNone/>
+            </a:pPr>
+            <a:r>
+              <a:rPr lang="en-US" sz="1600" b="1" dirty="0">
+                <a:solidFill>
+                  <a:srgbClr val="0B1D3A"/>
+                </a:solidFill>
+              </a:rPr>
+              <a:t>Publications</a:t>
+            </a:r>
+            <a:endParaRPr lang="en-US" sz="1600" dirty="0"/>
+          </a:p>
+          <a:p>
+            <a:pPr marL="342900" indent="-342900">
               <a:buSzPct val="100000"/>
               <a:buChar char="•"/>
             </a:pPr>
             <a:r>
-              <a:rPr lang="en-US" sz="1600" dirty="0">
+              <a:rPr lang="en-US" sz="1300" dirty="0">
                 <a:solidFill>
                   <a:srgbClr val="5A7184"/>
                 </a:solidFill>
               </a:rPr>
-              <a:t>Project A — [one-line description, outcome]</a:t>
-            </a:r>
-            <a:endParaRPr lang="en-US" sz="1800" dirty="0"/>
-          </a:p>
-          <a:p>
-            <a:pPr lvl="1" marL="508000" indent="-254000">
+              <a:t>[Venue, Year] — paper title (brief)</a:t>
+            </a:r>
+            <a:endParaRPr lang="en-US" sz="1600" dirty="0"/>
+          </a:p>
+          <a:p>
+            <a:pPr marL="342900" indent="-342900">
               <a:buSzPct val="100000"/>
               <a:buChar char="•"/>
             </a:pPr>
             <a:r>
-              <a:rPr lang="en-US" sz="1600" dirty="0">
+              <a:rPr lang="en-US" sz="1300" dirty="0">
                 <a:solidFill>
                   <a:srgbClr val="5A7184"/>
                 </a:solidFill>
               </a:rPr>
-              <a:t>Project B — [one-line description, outcome]</a:t>
-            </a:r>
-            <a:endParaRPr lang="en-US" sz="1800" dirty="0"/>
-          </a:p>
-          <a:p>
-            <a:pPr indent="0" marL="0">
-              <a:buNone/>
-            </a:pPr>
-            <a:endParaRPr lang="en-US" sz="1800" dirty="0"/>
-          </a:p>
-          <a:p>
-            <a:pPr marL="190500" indent="-190500">
-              <a:buSzPct val="100000"/>
-              <a:buChar char="•"/>
-            </a:pPr>
-            <a:r>
-              <a:rPr lang="en-US" sz="1900" b="1" dirty="0">
-                <a:solidFill>
-                  <a:srgbClr val="1A1A2E"/>
-                </a:solidFill>
-              </a:rPr>
-              <a:t>Publications</a:t>
-            </a:r>
-            <a:endParaRPr lang="en-US" sz="1800" dirty="0"/>
-          </a:p>
-          <a:p>
-            <a:pPr lvl="1" marL="508000" indent="-254000">
-              <a:buSzPct val="100000"/>
-              <a:buChar char="•"/>
-            </a:pPr>
-            <a:r>
-              <a:rPr lang="en-US" sz="1600" dirty="0">
+              <a:t>[Venue, Year] — paper title (brief)</a:t>
+            </a:r>
+            <a:endParaRPr lang="en-US" sz="1600" dirty="0"/>
+          </a:p>
+        </p:txBody>
+      </p:sp>
+      <p:sp>
+        <p:nvSpPr>
+          <p:cNvPr id="7" name="Shape 5"/>
+          <p:cNvSpPr/>
+          <p:nvPr/>
+        </p:nvSpPr>
+        <p:spPr>
+          <a:xfrm>
+            <a:off x="5486400" y="1005840"/>
+            <a:ext cx="3108960" cy="3566160"/>
+          </a:xfrm>
+          <a:prstGeom prst="rect">
+            <a:avLst/>
+          </a:prstGeom>
+          <a:solidFill>
+            <a:srgbClr val="EAF4F8"/>
+          </a:solidFill>
+          <a:ln/>
+          <a:effectLst>
+            <a:outerShdw sx="100000" sy="100000" kx="0" ky="0" algn="bl" rotWithShape="0" blurRad="101600" dist="38100" dir="8100000">
+              <a:srgbClr val="000000">
+                <a:alpha val="12000"/>
+              </a:srgbClr>
+            </a:outerShdw>
+          </a:effectLst>
+        </p:spPr>
+      </p:sp>
+      <p:sp>
+        <p:nvSpPr>
+          <p:cNvPr id="8" name="Shape 6"/>
+          <p:cNvSpPr/>
+          <p:nvPr/>
+        </p:nvSpPr>
+        <p:spPr>
+          <a:xfrm>
+            <a:off x="5486400" y="1005840"/>
+            <a:ext cx="3108960" cy="54864"/>
+          </a:xfrm>
+          <a:prstGeom prst="rect">
+            <a:avLst/>
+          </a:prstGeom>
+          <a:solidFill>
+            <a:srgbClr val="1C7293"/>
+          </a:solidFill>
+          <a:ln/>
+        </p:spPr>
+      </p:sp>
+      <p:sp>
+        <p:nvSpPr>
+          <p:cNvPr id="9" name="Text 7"/>
+          <p:cNvSpPr/>
+          <p:nvPr/>
+        </p:nvSpPr>
+        <p:spPr>
+          <a:xfrm>
+            <a:off x="5486400" y="1005840"/>
+            <a:ext cx="3108960" cy="3566160"/>
+          </a:xfrm>
+          <a:prstGeom prst="rect">
+            <a:avLst/>
+          </a:prstGeom>
+          <a:noFill/>
+          <a:ln/>
+        </p:spPr>
+        <p:txBody>
+          <a:bodyPr wrap="square" rtlCol="0" anchor="ctr"/>
+          <a:lstStyle/>
+          <a:p>
+            <a:pPr algn="ctr" indent="0" marL="0">
+              <a:buNone/>
+            </a:pPr>
+            <a:r>
+              <a:rPr lang="en-US" sz="1500" i="1" dirty="0">
                 <a:solidFill>
                   <a:srgbClr val="5A7184"/>
                 </a:solidFill>
               </a:rPr>
-              <a:t>[Venue, Year] — paper title (brief)</a:t>
-            </a:r>
-            <a:endParaRPr lang="en-US" sz="1800" dirty="0"/>
-          </a:p>
-          <a:p>
-            <a:pPr lvl="1" marL="508000" indent="-254000">
-              <a:buSzPct val="100000"/>
-              <a:buChar char="•"/>
-            </a:pPr>
-            <a:r>
-              <a:rPr lang="en-US" sz="1600" dirty="0">
+              <a:t>[ Photo 2 ]</a:t>
+            </a:r>
+            <a:endParaRPr lang="en-US" sz="1500" dirty="0"/>
+          </a:p>
+          <a:p>
+            <a:pPr algn="ctr" indent="0" marL="0">
+              <a:buNone/>
+            </a:pPr>
+            <a:r>
+              <a:rPr lang="en-US" sz="1500" i="1" dirty="0">
                 <a:solidFill>
                   <a:srgbClr val="5A7184"/>
                 </a:solidFill>
               </a:rPr>
-              <a:t>[Venue, Year] — paper title (brief)</a:t>
-            </a:r>
-            <a:endParaRPr lang="en-US" sz="1800" dirty="0"/>
-          </a:p>
-        </p:txBody>
-      </p:sp>
-      <p:sp>
-        <p:nvSpPr>
-          <p:cNvPr id="5" name="Shape 3"/>
-          <p:cNvSpPr/>
-          <p:nvPr/>
-        </p:nvSpPr>
-        <p:spPr>
-          <a:xfrm>
-            <a:off x="5577840" y="960120"/>
-            <a:ext cx="3017520" cy="3108960"/>
-          </a:xfrm>
-          <a:prstGeom prst="rect">
-            <a:avLst/>
-          </a:prstGeom>
-          <a:solidFill>
-            <a:srgbClr val="EAF4F8"/>
-          </a:solidFill>
-          <a:ln w="25400">
-            <a:solidFill>
-              <a:srgbClr val="1C7293"/>
-            </a:solidFill>
-            <a:prstDash val="solid"/>
-          </a:ln>
-        </p:spPr>
-      </p:sp>
-      <p:sp>
-        <p:nvSpPr>
-          <p:cNvPr id="6" name="Text 4"/>
-          <p:cNvSpPr/>
-          <p:nvPr/>
-        </p:nvSpPr>
-        <p:spPr>
-          <a:xfrm>
-            <a:off x="5577840" y="960120"/>
-            <a:ext cx="3017520" cy="3108960"/>
-          </a:xfrm>
-          <a:prstGeom prst="rect">
-            <a:avLst/>
-          </a:prstGeom>
-          <a:noFill/>
-          <a:ln/>
-        </p:spPr>
-        <p:txBody>
-          <a:bodyPr wrap="square" rtlCol="0" anchor="ctr"/>
-          <a:lstStyle/>
-          <a:p>
-            <a:pPr algn="ctr" indent="0" marL="0">
-              <a:buNone/>
-            </a:pPr>
-            <a:r>
-              <a:rPr lang="en-US" sz="1500" i="1" dirty="0">
-                <a:solidFill>
-                  <a:srgbClr val="5A7184"/>
-                </a:solidFill>
-              </a:rPr>
-              <a:t>[ Photo 2 ]</a:t>
+              <a:t>Research / Demo Photo</a:t>
             </a:r>
             <a:endParaRPr lang="en-US" sz="1500" dirty="0"/>
-          </a:p>
-          <a:p>
-            <a:pPr algn="ctr" indent="0" marL="0">
-              <a:buNone/>
-            </a:pPr>
-            <a:r>
-              <a:rPr lang="en-US" sz="1500" i="1" dirty="0">
-                <a:solidFill>
-                  <a:srgbClr val="5A7184"/>
-                </a:solidFill>
-              </a:rPr>
-              <a:t>Research / Demo Photo</a:t>
-            </a:r>
-            <a:endParaRPr lang="en-US" sz="1500" dirty="0"/>
-          </a:p>
-        </p:txBody>
-      </p:sp>
-      <p:sp>
-        <p:nvSpPr>
-          <p:cNvPr id="7" name="Text 5"/>
-          <p:cNvSpPr/>
-          <p:nvPr/>
-        </p:nvSpPr>
-        <p:spPr>
-          <a:xfrm>
-            <a:off x="8046720" y="4709160"/>
-            <a:ext cx="914400" cy="320040"/>
-          </a:xfrm>
-          <a:prstGeom prst="rect">
-            <a:avLst/>
-          </a:prstGeom>
-          <a:noFill/>
-          <a:ln/>
-        </p:spPr>
-        <p:txBody>
-          <a:bodyPr wrap="square" rtlCol="0" anchor="ctr"/>
-          <a:lstStyle/>
-          <a:p>
-            <a:pPr algn="r" indent="0" marL="0">
-              <a:buNone/>
-            </a:pPr>
-            <a:r>
-              <a:rPr lang="en-US" sz="1000" dirty="0">
-                <a:solidFill>
-                  <a:srgbClr val="5A7184"/>
-                </a:solidFill>
-              </a:rPr>
-              <a:t>4 / 12</a:t>
-            </a:r>
-            <a:endParaRPr lang="en-US" sz="1000" dirty="0"/>
-          </a:p>
-        </p:txBody>
-      </p:sp>
-      <p:sp>
-        <p:nvSpPr>
-          <p:cNvPr id="8" name="Text 6"/>
-          <p:cNvSpPr/>
-          <p:nvPr/>
-        </p:nvSpPr>
-        <p:spPr>
-          <a:xfrm>
-            <a:off x="457200" y="4709160"/>
-            <a:ext cx="3657600" cy="320040"/>
-          </a:xfrm>
-          <a:prstGeom prst="rect">
-            <a:avLst/>
-          </a:prstGeom>
-          <a:noFill/>
-          <a:ln/>
-        </p:spPr>
-        <p:txBody>
-          <a:bodyPr wrap="square" rtlCol="0" anchor="ctr"/>
-          <a:lstStyle/>
-          <a:p>
-            <a:pPr indent="0" marL="0">
-              <a:buNone/>
-            </a:pPr>
-            <a:r>
-              <a:rPr lang="en-US" sz="1000" i="1" dirty="0">
-                <a:solidFill>
-                  <a:srgbClr val="5A7184"/>
-                </a:solidFill>
-              </a:rPr>
-              <a:t>Jiarui Zhang — Faculty Introduction</a:t>
-            </a:r>
-            <a:endParaRPr lang="en-US" sz="1000" dirty="0"/>
           </a:p>
         </p:txBody>
       </p:sp>
@@ -4366,8 +5162,8 @@
         </p:nvSpPr>
         <p:spPr>
           <a:xfrm>
-            <a:off x="-914400" y="-914400"/>
-            <a:ext cx="4572000" cy="4572000"/>
+            <a:off x="-1371600" y="3200400"/>
+            <a:ext cx="3657600" cy="3657600"/>
           </a:xfrm>
           <a:prstGeom prst="ellipse">
             <a:avLst/>
@@ -4388,15 +5184,15 @@
         </p:nvSpPr>
         <p:spPr>
           <a:xfrm>
-            <a:off x="6400800" y="2743200"/>
-            <a:ext cx="4572000" cy="4572000"/>
+            <a:off x="7772400" y="-914400"/>
+            <a:ext cx="2743200" cy="2743200"/>
           </a:xfrm>
           <a:prstGeom prst="ellipse">
             <a:avLst/>
           </a:prstGeom>
           <a:solidFill>
             <a:srgbClr val="1C7293">
-              <a:alpha val="45000"/>
+              <a:alpha val="50000"/>
             </a:srgbClr>
           </a:solidFill>
           <a:ln/>
@@ -4410,8 +5206,8 @@
         </p:nvSpPr>
         <p:spPr>
           <a:xfrm>
-            <a:off x="914400" y="1371600"/>
-            <a:ext cx="7315200" cy="731520"/>
+            <a:off x="548640" y="1188720"/>
+            <a:ext cx="8046720" cy="594360"/>
           </a:xfrm>
           <a:prstGeom prst="rect">
             <a:avLst/>
@@ -4427,7 +5223,7 @@
               <a:buNone/>
             </a:pPr>
             <a:r>
-              <a:rPr lang="en-US" sz="2200" dirty="0">
+              <a:rPr lang="en-US" sz="2400" dirty="0">
                 <a:solidFill>
                   <a:srgbClr val="21D19F"/>
                 </a:solidFill>
@@ -4437,7 +5233,7 @@
               </a:rPr>
               <a:t>Part 2</a:t>
             </a:r>
-            <a:endParaRPr lang="en-US" sz="2200" dirty="0"/>
+            <a:endParaRPr lang="en-US" sz="2400" dirty="0"/>
           </a:p>
         </p:txBody>
       </p:sp>
@@ -4449,8 +5245,8 @@
         </p:nvSpPr>
         <p:spPr>
           <a:xfrm>
-            <a:off x="914400" y="2011680"/>
-            <a:ext cx="7315200" cy="1463040"/>
+            <a:off x="548640" y="1783080"/>
+            <a:ext cx="8046720" cy="1463040"/>
           </a:xfrm>
           <a:prstGeom prst="rect">
             <a:avLst/>
@@ -4524,46 +5320,10 @@
             <a:r>
               <a:rPr lang="en-US" sz="1000" dirty="0">
                 <a:solidFill>
-                  <a:srgbClr val="5A7184"/>
+                  <a:srgbClr val="1C7293"/>
                 </a:solidFill>
               </a:rPr>
               <a:t>5 / 12</a:t>
-            </a:r>
-            <a:endParaRPr lang="en-US" sz="1000" dirty="0"/>
-          </a:p>
-        </p:txBody>
-      </p:sp>
-      <p:sp>
-        <p:nvSpPr>
-          <p:cNvPr id="7" name="Text 5"/>
-          <p:cNvSpPr/>
-          <p:nvPr/>
-        </p:nvSpPr>
-        <p:spPr>
-          <a:xfrm>
-            <a:off x="457200" y="4709160"/>
-            <a:ext cx="3657600" cy="320040"/>
-          </a:xfrm>
-          <a:prstGeom prst="rect">
-            <a:avLst/>
-          </a:prstGeom>
-          <a:noFill/>
-          <a:ln/>
-        </p:spPr>
-        <p:txBody>
-          <a:bodyPr wrap="square" rtlCol="0" anchor="ctr"/>
-          <a:lstStyle/>
-          <a:p>
-            <a:pPr indent="0" marL="0">
-              <a:buNone/>
-            </a:pPr>
-            <a:r>
-              <a:rPr lang="en-US" sz="1000" i="1" dirty="0">
-                <a:solidFill>
-                  <a:srgbClr val="5A7184"/>
-                </a:solidFill>
-              </a:rPr>
-              <a:t>Jiarui Zhang — Faculty Introduction</a:t>
             </a:r>
             <a:endParaRPr lang="en-US" sz="1000" dirty="0"/>
           </a:p>
@@ -4609,24 +5369,24 @@
         </p:nvSpPr>
         <p:spPr>
           <a:xfrm>
-            <a:off x="548640" y="256032"/>
-            <a:ext cx="8046720" cy="566928"/>
-          </a:xfrm>
-          <a:prstGeom prst="rect">
-            <a:avLst/>
-          </a:prstGeom>
-          <a:noFill/>
-          <a:ln/>
-        </p:spPr>
-        <p:txBody>
-          <a:bodyPr wrap="square" rtlCol="0" anchor="ctr"/>
-          <a:lstStyle/>
-          <a:p>
-            <a:pPr indent="0" marL="0">
-              <a:buNone/>
-            </a:pPr>
-            <a:r>
-              <a:rPr lang="en-US" sz="2800" b="1" dirty="0">
+            <a:off x="548640" y="274320"/>
+            <a:ext cx="8046720" cy="594360"/>
+          </a:xfrm>
+          <a:prstGeom prst="rect">
+            <a:avLst/>
+          </a:prstGeom>
+          <a:noFill/>
+          <a:ln/>
+        </p:spPr>
+        <p:txBody>
+          <a:bodyPr wrap="square" lIns="0" tIns="0" rIns="0" bIns="0" rtlCol="0" anchor="ctr"/>
+          <a:lstStyle/>
+          <a:p>
+            <a:pPr indent="0" marL="0">
+              <a:buNone/>
+            </a:pPr>
+            <a:r>
+              <a:rPr lang="en-US" sz="3000" b="1" dirty="0">
                 <a:solidFill>
                   <a:srgbClr val="0B1D3A"/>
                 </a:solidFill>
@@ -4636,202 +5396,13 @@
               </a:rPr>
               <a:t>Vision for Student Development</a:t>
             </a:r>
-            <a:endParaRPr lang="en-US" sz="2800" dirty="0"/>
-          </a:p>
-        </p:txBody>
-      </p:sp>
-      <p:sp>
-        <p:nvSpPr>
-          <p:cNvPr id="3" name="Shape 1"/>
-          <p:cNvSpPr/>
-          <p:nvPr/>
-        </p:nvSpPr>
-        <p:spPr>
-          <a:xfrm>
-            <a:off x="548640" y="822960"/>
-            <a:ext cx="8046720" cy="27432"/>
-          </a:xfrm>
-          <a:prstGeom prst="rect">
-            <a:avLst/>
-          </a:prstGeom>
-          <a:solidFill>
-            <a:srgbClr val="1C7293"/>
-          </a:solidFill>
-          <a:ln/>
-        </p:spPr>
-      </p:sp>
-      <p:sp>
-        <p:nvSpPr>
-          <p:cNvPr id="4" name="Text 2"/>
-          <p:cNvSpPr/>
-          <p:nvPr/>
-        </p:nvSpPr>
-        <p:spPr>
-          <a:xfrm>
-            <a:off x="502920" y="960120"/>
-            <a:ext cx="8229600" cy="3749040"/>
-          </a:xfrm>
-          <a:prstGeom prst="rect">
-            <a:avLst/>
-          </a:prstGeom>
-          <a:noFill/>
-          <a:ln/>
-        </p:spPr>
-        <p:txBody>
-          <a:bodyPr wrap="square" rtlCol="0" anchor="ctr"/>
-          <a:lstStyle/>
-          <a:p>
-            <a:pPr marL="190500" indent="-190500">
-              <a:buSzPct val="100000"/>
-              <a:buChar char="•"/>
-            </a:pPr>
-            <a:r>
-              <a:rPr lang="en-US" sz="1900" b="1" dirty="0">
-                <a:solidFill>
-                  <a:srgbClr val="1A1A2E"/>
-                </a:solidFill>
-              </a:rPr>
-              <a:t>Core Goal</a:t>
-            </a:r>
-            <a:endParaRPr lang="en-US" sz="1800" dirty="0"/>
-          </a:p>
-          <a:p>
-            <a:pPr lvl="1" marL="508000" indent="-254000">
-              <a:buSzPct val="100000"/>
-              <a:buChar char="•"/>
-            </a:pPr>
-            <a:r>
-              <a:rPr lang="en-US" sz="1600" dirty="0">
-                <a:solidFill>
-                  <a:srgbClr val="5A7184"/>
-                </a:solidFill>
-              </a:rPr>
-              <a:t>Produce graduates who can think, not just code</a:t>
-            </a:r>
-            <a:endParaRPr lang="en-US" sz="1800" dirty="0"/>
-          </a:p>
-          <a:p>
-            <a:pPr indent="0" marL="0">
-              <a:buNone/>
-            </a:pPr>
-            <a:endParaRPr lang="en-US" sz="1800" dirty="0"/>
-          </a:p>
-          <a:p>
-            <a:pPr marL="190500" indent="-190500">
-              <a:buSzPct val="100000"/>
-              <a:buChar char="•"/>
-            </a:pPr>
-            <a:r>
-              <a:rPr lang="en-US" sz="1900" b="1" dirty="0">
-                <a:solidFill>
-                  <a:srgbClr val="1A1A2E"/>
-                </a:solidFill>
-              </a:rPr>
-              <a:t>Three Pillars</a:t>
-            </a:r>
-            <a:endParaRPr lang="en-US" sz="1800" dirty="0"/>
-          </a:p>
-          <a:p>
-            <a:pPr lvl="1" marL="508000" indent="-254000">
-              <a:buSzPct val="100000"/>
-              <a:buChar char="•"/>
-            </a:pPr>
-            <a:r>
-              <a:rPr lang="en-US" sz="1600" dirty="0">
-                <a:solidFill>
-                  <a:srgbClr val="5A7184"/>
-                </a:solidFill>
-              </a:rPr>
-              <a:t>Foundations first — algorithms, math, systems thinking</a:t>
-            </a:r>
-            <a:endParaRPr lang="en-US" sz="1800" dirty="0"/>
-          </a:p>
-          <a:p>
-            <a:pPr lvl="1" marL="508000" indent="-254000">
-              <a:buSzPct val="100000"/>
-              <a:buChar char="•"/>
-            </a:pPr>
-            <a:r>
-              <a:rPr lang="en-US" sz="1600" dirty="0">
-                <a:solidFill>
-                  <a:srgbClr val="5A7184"/>
-                </a:solidFill>
-              </a:rPr>
-              <a:t>Practical craft — clean code, debugging, tooling</a:t>
-            </a:r>
-            <a:endParaRPr lang="en-US" sz="1800" dirty="0"/>
-          </a:p>
-          <a:p>
-            <a:pPr lvl="1" marL="508000" indent="-254000">
-              <a:buSzPct val="100000"/>
-              <a:buChar char="•"/>
-            </a:pPr>
-            <a:r>
-              <a:rPr lang="en-US" sz="1600" dirty="0">
-                <a:solidFill>
-                  <a:srgbClr val="5A7184"/>
-                </a:solidFill>
-              </a:rPr>
-              <a:t>Professional growth — communication, teamwork, ethics</a:t>
-            </a:r>
-            <a:endParaRPr lang="en-US" sz="1800" dirty="0"/>
-          </a:p>
-          <a:p>
-            <a:pPr indent="0" marL="0">
-              <a:buNone/>
-            </a:pPr>
-            <a:endParaRPr lang="en-US" sz="1800" dirty="0"/>
-          </a:p>
-          <a:p>
-            <a:pPr marL="190500" indent="-190500">
-              <a:buSzPct val="100000"/>
-              <a:buChar char="•"/>
-            </a:pPr>
-            <a:r>
-              <a:rPr lang="en-US" sz="1900" b="1" dirty="0">
-                <a:solidFill>
-                  <a:srgbClr val="1A1A2E"/>
-                </a:solidFill>
-              </a:rPr>
-              <a:t>How I Measure Success</a:t>
-            </a:r>
-            <a:endParaRPr lang="en-US" sz="1800" dirty="0"/>
-          </a:p>
-          <a:p>
-            <a:pPr lvl="1" marL="508000" indent="-254000">
-              <a:buSzPct val="100000"/>
-              <a:buChar char="•"/>
-            </a:pPr>
-            <a:r>
-              <a:rPr lang="en-US" sz="1600" dirty="0">
-                <a:solidFill>
-                  <a:srgbClr val="5A7184"/>
-                </a:solidFill>
-              </a:rPr>
-              <a:t>Students tackle problems they've never seen before</a:t>
-            </a:r>
-            <a:endParaRPr lang="en-US" sz="1800" dirty="0"/>
-          </a:p>
-          <a:p>
-            <a:pPr lvl="1" marL="508000" indent="-254000">
-              <a:buSzPct val="100000"/>
-              <a:buChar char="•"/>
-            </a:pPr>
-            <a:r>
-              <a:rPr lang="en-US" sz="1600" dirty="0">
-                <a:solidFill>
-                  <a:srgbClr val="5A7184"/>
-                </a:solidFill>
-              </a:rPr>
-              <a:t>Alumni credit the course 3 years after graduating</a:t>
-            </a:r>
-            <a:endParaRPr lang="en-US" sz="1800" dirty="0"/>
-          </a:p>
-        </p:txBody>
-      </p:sp>
-      <p:sp>
-        <p:nvSpPr>
-          <p:cNvPr id="5" name="Text 3"/>
+            <a:endParaRPr lang="en-US" sz="3000" dirty="0"/>
+          </a:p>
+        </p:txBody>
+      </p:sp>
+      <p:sp>
+        <p:nvSpPr>
+          <p:cNvPr id="3" name="Text 1"/>
           <p:cNvSpPr/>
           <p:nvPr/>
         </p:nvSpPr>
@@ -4867,14 +5438,14 @@
       </p:sp>
       <p:sp>
         <p:nvSpPr>
-          <p:cNvPr id="6" name="Text 4"/>
+          <p:cNvPr id="4" name="Text 2"/>
           <p:cNvSpPr/>
           <p:nvPr/>
         </p:nvSpPr>
         <p:spPr>
           <a:xfrm>
             <a:off x="457200" y="4709160"/>
-            <a:ext cx="3657600" cy="320040"/>
+            <a:ext cx="2743200" cy="320040"/>
           </a:xfrm>
           <a:prstGeom prst="rect">
             <a:avLst/>
@@ -4895,9 +5466,473 @@
                   <a:srgbClr val="5A7184"/>
                 </a:solidFill>
               </a:rPr>
-              <a:t>Jiarui Zhang — Faculty Introduction</a:t>
+              <a:t>Faculty Introduction</a:t>
             </a:r>
             <a:endParaRPr lang="en-US" sz="1000" dirty="0"/>
+          </a:p>
+        </p:txBody>
+      </p:sp>
+      <p:sp>
+        <p:nvSpPr>
+          <p:cNvPr id="5" name="Shape 3"/>
+          <p:cNvSpPr/>
+          <p:nvPr/>
+        </p:nvSpPr>
+        <p:spPr>
+          <a:xfrm>
+            <a:off x="548640" y="1051560"/>
+            <a:ext cx="8046720" cy="914400"/>
+          </a:xfrm>
+          <a:prstGeom prst="rect">
+            <a:avLst/>
+          </a:prstGeom>
+          <a:solidFill>
+            <a:srgbClr val="FFFFFF"/>
+          </a:solidFill>
+          <a:ln/>
+          <a:effectLst>
+            <a:outerShdw sx="100000" sy="100000" kx="0" ky="0" algn="bl" rotWithShape="0" blurRad="101600" dist="38100" dir="8100000">
+              <a:srgbClr val="000000">
+                <a:alpha val="12000"/>
+              </a:srgbClr>
+            </a:outerShdw>
+          </a:effectLst>
+        </p:spPr>
+      </p:sp>
+      <p:sp>
+        <p:nvSpPr>
+          <p:cNvPr id="6" name="Shape 4"/>
+          <p:cNvSpPr/>
+          <p:nvPr/>
+        </p:nvSpPr>
+        <p:spPr>
+          <a:xfrm>
+            <a:off x="777240" y="1170432"/>
+            <a:ext cx="685800" cy="685800"/>
+          </a:xfrm>
+          <a:prstGeom prst="ellipse">
+            <a:avLst/>
+          </a:prstGeom>
+          <a:solidFill>
+            <a:srgbClr val="065A82"/>
+          </a:solidFill>
+          <a:ln/>
+        </p:spPr>
+      </p:sp>
+      <p:sp>
+        <p:nvSpPr>
+          <p:cNvPr id="7" name="Text 5"/>
+          <p:cNvSpPr/>
+          <p:nvPr/>
+        </p:nvSpPr>
+        <p:spPr>
+          <a:xfrm>
+            <a:off x="777240" y="1170432"/>
+            <a:ext cx="685800" cy="685800"/>
+          </a:xfrm>
+          <a:prstGeom prst="rect">
+            <a:avLst/>
+          </a:prstGeom>
+          <a:noFill/>
+          <a:ln/>
+        </p:spPr>
+        <p:txBody>
+          <a:bodyPr wrap="square" rtlCol="0" anchor="ctr"/>
+          <a:lstStyle/>
+          <a:p>
+            <a:pPr algn="ctr" indent="0" marL="0">
+              <a:buNone/>
+            </a:pPr>
+            <a:r>
+              <a:rPr lang="en-US" sz="2200" b="1" dirty="0">
+                <a:solidFill>
+                  <a:srgbClr val="FFFFFF"/>
+                </a:solidFill>
+                <a:latin typeface="Georgia" pitchFamily="34" charset="0"/>
+                <a:ea typeface="Georgia" pitchFamily="34" charset="-122"/>
+                <a:cs typeface="Georgia" pitchFamily="34" charset="-120"/>
+              </a:rPr>
+              <a:t>1</a:t>
+            </a:r>
+            <a:endParaRPr lang="en-US" sz="2200" dirty="0"/>
+          </a:p>
+        </p:txBody>
+      </p:sp>
+      <p:sp>
+        <p:nvSpPr>
+          <p:cNvPr id="8" name="Text 6"/>
+          <p:cNvSpPr/>
+          <p:nvPr/>
+        </p:nvSpPr>
+        <p:spPr>
+          <a:xfrm>
+            <a:off x="1691640" y="1106424"/>
+            <a:ext cx="6675120" cy="804672"/>
+          </a:xfrm>
+          <a:prstGeom prst="rect">
+            <a:avLst/>
+          </a:prstGeom>
+          <a:noFill/>
+          <a:ln/>
+        </p:spPr>
+        <p:txBody>
+          <a:bodyPr wrap="square" rtlCol="0" anchor="ctr"/>
+          <a:lstStyle/>
+          <a:p>
+            <a:pPr indent="0" marL="0">
+              <a:buNone/>
+            </a:pPr>
+            <a:r>
+              <a:rPr lang="en-US" sz="1700" b="1" dirty="0">
+                <a:solidFill>
+                  <a:srgbClr val="0B1D3A"/>
+                </a:solidFill>
+              </a:rPr>
+              <a:t>Foundations First</a:t>
+            </a:r>
+            <a:endParaRPr lang="en-US" sz="1700" dirty="0"/>
+          </a:p>
+          <a:p>
+            <a:pPr indent="0" marL="0">
+              <a:buNone/>
+            </a:pPr>
+            <a:r>
+              <a:rPr lang="en-US" sz="1300" dirty="0">
+                <a:solidFill>
+                  <a:srgbClr val="5A7184"/>
+                </a:solidFill>
+              </a:rPr>
+              <a:t>Algorithms, math, and systems thinking. Students who understand WHY adapt to any language or framework.</a:t>
+            </a:r>
+            <a:endParaRPr lang="en-US" sz="1700" dirty="0"/>
+          </a:p>
+        </p:txBody>
+      </p:sp>
+      <p:sp>
+        <p:nvSpPr>
+          <p:cNvPr id="9" name="Shape 7"/>
+          <p:cNvSpPr/>
+          <p:nvPr/>
+        </p:nvSpPr>
+        <p:spPr>
+          <a:xfrm>
+            <a:off x="548640" y="2148840"/>
+            <a:ext cx="8046720" cy="914400"/>
+          </a:xfrm>
+          <a:prstGeom prst="rect">
+            <a:avLst/>
+          </a:prstGeom>
+          <a:solidFill>
+            <a:srgbClr val="FFFFFF"/>
+          </a:solidFill>
+          <a:ln/>
+          <a:effectLst>
+            <a:outerShdw sx="100000" sy="100000" kx="0" ky="0" algn="bl" rotWithShape="0" blurRad="101600" dist="38100" dir="8100000">
+              <a:srgbClr val="000000">
+                <a:alpha val="12000"/>
+              </a:srgbClr>
+            </a:outerShdw>
+          </a:effectLst>
+        </p:spPr>
+      </p:sp>
+      <p:sp>
+        <p:nvSpPr>
+          <p:cNvPr id="10" name="Shape 8"/>
+          <p:cNvSpPr/>
+          <p:nvPr/>
+        </p:nvSpPr>
+        <p:spPr>
+          <a:xfrm>
+            <a:off x="777240" y="2267712"/>
+            <a:ext cx="685800" cy="685800"/>
+          </a:xfrm>
+          <a:prstGeom prst="ellipse">
+            <a:avLst/>
+          </a:prstGeom>
+          <a:solidFill>
+            <a:srgbClr val="1C7293"/>
+          </a:solidFill>
+          <a:ln/>
+        </p:spPr>
+      </p:sp>
+      <p:sp>
+        <p:nvSpPr>
+          <p:cNvPr id="11" name="Text 9"/>
+          <p:cNvSpPr/>
+          <p:nvPr/>
+        </p:nvSpPr>
+        <p:spPr>
+          <a:xfrm>
+            <a:off x="777240" y="2267712"/>
+            <a:ext cx="685800" cy="685800"/>
+          </a:xfrm>
+          <a:prstGeom prst="rect">
+            <a:avLst/>
+          </a:prstGeom>
+          <a:noFill/>
+          <a:ln/>
+        </p:spPr>
+        <p:txBody>
+          <a:bodyPr wrap="square" rtlCol="0" anchor="ctr"/>
+          <a:lstStyle/>
+          <a:p>
+            <a:pPr algn="ctr" indent="0" marL="0">
+              <a:buNone/>
+            </a:pPr>
+            <a:r>
+              <a:rPr lang="en-US" sz="2200" b="1" dirty="0">
+                <a:solidFill>
+                  <a:srgbClr val="FFFFFF"/>
+                </a:solidFill>
+                <a:latin typeface="Georgia" pitchFamily="34" charset="0"/>
+                <a:ea typeface="Georgia" pitchFamily="34" charset="-122"/>
+                <a:cs typeface="Georgia" pitchFamily="34" charset="-120"/>
+              </a:rPr>
+              <a:t>2</a:t>
+            </a:r>
+            <a:endParaRPr lang="en-US" sz="2200" dirty="0"/>
+          </a:p>
+        </p:txBody>
+      </p:sp>
+      <p:sp>
+        <p:nvSpPr>
+          <p:cNvPr id="12" name="Text 10"/>
+          <p:cNvSpPr/>
+          <p:nvPr/>
+        </p:nvSpPr>
+        <p:spPr>
+          <a:xfrm>
+            <a:off x="1691640" y="2203704"/>
+            <a:ext cx="6675120" cy="804672"/>
+          </a:xfrm>
+          <a:prstGeom prst="rect">
+            <a:avLst/>
+          </a:prstGeom>
+          <a:noFill/>
+          <a:ln/>
+        </p:spPr>
+        <p:txBody>
+          <a:bodyPr wrap="square" rtlCol="0" anchor="ctr"/>
+          <a:lstStyle/>
+          <a:p>
+            <a:pPr indent="0" marL="0">
+              <a:buNone/>
+            </a:pPr>
+            <a:r>
+              <a:rPr lang="en-US" sz="1700" b="1" dirty="0">
+                <a:solidFill>
+                  <a:srgbClr val="0B1D3A"/>
+                </a:solidFill>
+              </a:rPr>
+              <a:t>Practical Craft</a:t>
+            </a:r>
+            <a:endParaRPr lang="en-US" sz="1700" dirty="0"/>
+          </a:p>
+          <a:p>
+            <a:pPr indent="0" marL="0">
+              <a:buNone/>
+            </a:pPr>
+            <a:r>
+              <a:rPr lang="en-US" sz="1300" dirty="0">
+                <a:solidFill>
+                  <a:srgbClr val="5A7184"/>
+                </a:solidFill>
+              </a:rPr>
+              <a:t>Clean code, debugging discipline, tooling fluency. Real skills built through project-based learning.</a:t>
+            </a:r>
+            <a:endParaRPr lang="en-US" sz="1700" dirty="0"/>
+          </a:p>
+        </p:txBody>
+      </p:sp>
+      <p:sp>
+        <p:nvSpPr>
+          <p:cNvPr id="13" name="Shape 11"/>
+          <p:cNvSpPr/>
+          <p:nvPr/>
+        </p:nvSpPr>
+        <p:spPr>
+          <a:xfrm>
+            <a:off x="548640" y="3246120"/>
+            <a:ext cx="8046720" cy="914400"/>
+          </a:xfrm>
+          <a:prstGeom prst="rect">
+            <a:avLst/>
+          </a:prstGeom>
+          <a:solidFill>
+            <a:srgbClr val="FFFFFF"/>
+          </a:solidFill>
+          <a:ln/>
+          <a:effectLst>
+            <a:outerShdw sx="100000" sy="100000" kx="0" ky="0" algn="bl" rotWithShape="0" blurRad="101600" dist="38100" dir="8100000">
+              <a:srgbClr val="000000">
+                <a:alpha val="12000"/>
+              </a:srgbClr>
+            </a:outerShdw>
+          </a:effectLst>
+        </p:spPr>
+      </p:sp>
+      <p:sp>
+        <p:nvSpPr>
+          <p:cNvPr id="14" name="Shape 12"/>
+          <p:cNvSpPr/>
+          <p:nvPr/>
+        </p:nvSpPr>
+        <p:spPr>
+          <a:xfrm>
+            <a:off x="777240" y="3364992"/>
+            <a:ext cx="685800" cy="685800"/>
+          </a:xfrm>
+          <a:prstGeom prst="ellipse">
+            <a:avLst/>
+          </a:prstGeom>
+          <a:solidFill>
+            <a:srgbClr val="FF6B35"/>
+          </a:solidFill>
+          <a:ln/>
+        </p:spPr>
+      </p:sp>
+      <p:sp>
+        <p:nvSpPr>
+          <p:cNvPr id="15" name="Text 13"/>
+          <p:cNvSpPr/>
+          <p:nvPr/>
+        </p:nvSpPr>
+        <p:spPr>
+          <a:xfrm>
+            <a:off x="777240" y="3364992"/>
+            <a:ext cx="685800" cy="685800"/>
+          </a:xfrm>
+          <a:prstGeom prst="rect">
+            <a:avLst/>
+          </a:prstGeom>
+          <a:noFill/>
+          <a:ln/>
+        </p:spPr>
+        <p:txBody>
+          <a:bodyPr wrap="square" rtlCol="0" anchor="ctr"/>
+          <a:lstStyle/>
+          <a:p>
+            <a:pPr algn="ctr" indent="0" marL="0">
+              <a:buNone/>
+            </a:pPr>
+            <a:r>
+              <a:rPr lang="en-US" sz="2200" b="1" dirty="0">
+                <a:solidFill>
+                  <a:srgbClr val="FFFFFF"/>
+                </a:solidFill>
+                <a:latin typeface="Georgia" pitchFamily="34" charset="0"/>
+                <a:ea typeface="Georgia" pitchFamily="34" charset="-122"/>
+                <a:cs typeface="Georgia" pitchFamily="34" charset="-120"/>
+              </a:rPr>
+              <a:t>3</a:t>
+            </a:r>
+            <a:endParaRPr lang="en-US" sz="2200" dirty="0"/>
+          </a:p>
+        </p:txBody>
+      </p:sp>
+      <p:sp>
+        <p:nvSpPr>
+          <p:cNvPr id="16" name="Text 14"/>
+          <p:cNvSpPr/>
+          <p:nvPr/>
+        </p:nvSpPr>
+        <p:spPr>
+          <a:xfrm>
+            <a:off x="1691640" y="3300984"/>
+            <a:ext cx="6675120" cy="804672"/>
+          </a:xfrm>
+          <a:prstGeom prst="rect">
+            <a:avLst/>
+          </a:prstGeom>
+          <a:noFill/>
+          <a:ln/>
+        </p:spPr>
+        <p:txBody>
+          <a:bodyPr wrap="square" rtlCol="0" anchor="ctr"/>
+          <a:lstStyle/>
+          <a:p>
+            <a:pPr indent="0" marL="0">
+              <a:buNone/>
+            </a:pPr>
+            <a:r>
+              <a:rPr lang="en-US" sz="1700" b="1" dirty="0">
+                <a:solidFill>
+                  <a:srgbClr val="0B1D3A"/>
+                </a:solidFill>
+              </a:rPr>
+              <a:t>Professional Growth</a:t>
+            </a:r>
+            <a:endParaRPr lang="en-US" sz="1700" dirty="0"/>
+          </a:p>
+          <a:p>
+            <a:pPr indent="0" marL="0">
+              <a:buNone/>
+            </a:pPr>
+            <a:r>
+              <a:rPr lang="en-US" sz="1300" dirty="0">
+                <a:solidFill>
+                  <a:srgbClr val="5A7184"/>
+                </a:solidFill>
+              </a:rPr>
+              <a:t>Communication, teamwork, and ethics. Graduates who can collaborate and lead, not just code.</a:t>
+            </a:r>
+            <a:endParaRPr lang="en-US" sz="1700" dirty="0"/>
+          </a:p>
+        </p:txBody>
+      </p:sp>
+      <p:sp>
+        <p:nvSpPr>
+          <p:cNvPr id="17" name="Shape 15"/>
+          <p:cNvSpPr/>
+          <p:nvPr/>
+        </p:nvSpPr>
+        <p:spPr>
+          <a:xfrm>
+            <a:off x="548640" y="4251960"/>
+            <a:ext cx="8046720" cy="457200"/>
+          </a:xfrm>
+          <a:prstGeom prst="rect">
+            <a:avLst/>
+          </a:prstGeom>
+          <a:solidFill>
+            <a:srgbClr val="0B1D3A"/>
+          </a:solidFill>
+          <a:ln/>
+        </p:spPr>
+      </p:sp>
+      <p:sp>
+        <p:nvSpPr>
+          <p:cNvPr id="18" name="Text 16"/>
+          <p:cNvSpPr/>
+          <p:nvPr/>
+        </p:nvSpPr>
+        <p:spPr>
+          <a:xfrm>
+            <a:off x="731520" y="4251960"/>
+            <a:ext cx="7680960" cy="457200"/>
+          </a:xfrm>
+          <a:prstGeom prst="rect">
+            <a:avLst/>
+          </a:prstGeom>
+          <a:noFill/>
+          <a:ln/>
+        </p:spPr>
+        <p:txBody>
+          <a:bodyPr wrap="square" rtlCol="0" anchor="ctr"/>
+          <a:lstStyle/>
+          <a:p>
+            <a:pPr indent="0" marL="0">
+              <a:buNone/>
+            </a:pPr>
+            <a:r>
+              <a:rPr lang="en-US" sz="1400" b="1" dirty="0">
+                <a:solidFill>
+                  <a:srgbClr val="21D19F"/>
+                </a:solidFill>
+              </a:rPr>
+              <a:t>My measure of success: students tackle problems they’ve never seen — and enjoy it.</a:t>
+            </a:r>
+            <a:endParaRPr lang="en-US" sz="1400" dirty="0"/>
           </a:p>
         </p:txBody>
       </p:sp>
@@ -4941,24 +5976,24 @@
         </p:nvSpPr>
         <p:spPr>
           <a:xfrm>
-            <a:off x="548640" y="256032"/>
-            <a:ext cx="8046720" cy="566928"/>
-          </a:xfrm>
-          <a:prstGeom prst="rect">
-            <a:avLst/>
-          </a:prstGeom>
-          <a:noFill/>
-          <a:ln/>
-        </p:spPr>
-        <p:txBody>
-          <a:bodyPr wrap="square" rtlCol="0" anchor="ctr"/>
-          <a:lstStyle/>
-          <a:p>
-            <a:pPr indent="0" marL="0">
-              <a:buNone/>
-            </a:pPr>
-            <a:r>
-              <a:rPr lang="en-US" sz="2800" b="1" dirty="0">
+            <a:off x="548640" y="274320"/>
+            <a:ext cx="8046720" cy="594360"/>
+          </a:xfrm>
+          <a:prstGeom prst="rect">
+            <a:avLst/>
+          </a:prstGeom>
+          <a:noFill/>
+          <a:ln/>
+        </p:spPr>
+        <p:txBody>
+          <a:bodyPr wrap="square" lIns="0" tIns="0" rIns="0" bIns="0" rtlCol="0" anchor="ctr"/>
+          <a:lstStyle/>
+          <a:p>
+            <a:pPr indent="0" marL="0">
+              <a:buNone/>
+            </a:pPr>
+            <a:r>
+              <a:rPr lang="en-US" sz="3000" b="1" dirty="0">
                 <a:solidFill>
                   <a:srgbClr val="0B1D3A"/>
                 </a:solidFill>
@@ -4968,612 +6003,13 @@
               </a:rPr>
               <a:t>Plan for This Course</a:t>
             </a:r>
-            <a:endParaRPr lang="en-US" sz="2800" dirty="0"/>
-          </a:p>
-        </p:txBody>
-      </p:sp>
-      <p:sp>
-        <p:nvSpPr>
-          <p:cNvPr id="3" name="Shape 1"/>
-          <p:cNvSpPr/>
-          <p:nvPr/>
-        </p:nvSpPr>
-        <p:spPr>
-          <a:xfrm>
-            <a:off x="548640" y="822960"/>
-            <a:ext cx="8046720" cy="27432"/>
-          </a:xfrm>
-          <a:prstGeom prst="rect">
-            <a:avLst/>
-          </a:prstGeom>
-          <a:solidFill>
-            <a:srgbClr val="1C7293"/>
-          </a:solidFill>
-          <a:ln/>
-        </p:spPr>
-      </p:sp>
-      <p:sp>
-        <p:nvSpPr>
-          <p:cNvPr id="4" name="Shape 2"/>
-          <p:cNvSpPr/>
-          <p:nvPr/>
-        </p:nvSpPr>
-        <p:spPr>
-          <a:xfrm>
-            <a:off x="365760" y="960120"/>
-            <a:ext cx="2651760" cy="3566160"/>
-          </a:xfrm>
-          <a:prstGeom prst="roundRect">
-            <a:avLst>
-              <a:gd name="adj" fmla="val 4138"/>
-            </a:avLst>
-          </a:prstGeom>
-          <a:solidFill>
-            <a:srgbClr val="065A82"/>
-          </a:solidFill>
-          <a:ln w="12700">
-            <a:solidFill>
-              <a:srgbClr val="065A82"/>
-            </a:solidFill>
-            <a:prstDash val="solid"/>
-          </a:ln>
-        </p:spPr>
-      </p:sp>
-      <p:sp>
-        <p:nvSpPr>
-          <p:cNvPr id="5" name="Text 3"/>
-          <p:cNvSpPr/>
-          <p:nvPr/>
-        </p:nvSpPr>
-        <p:spPr>
-          <a:xfrm>
-            <a:off x="457200" y="1051560"/>
-            <a:ext cx="2468880" cy="457200"/>
-          </a:xfrm>
-          <a:prstGeom prst="rect">
-            <a:avLst/>
-          </a:prstGeom>
-          <a:noFill/>
-          <a:ln/>
-        </p:spPr>
-        <p:txBody>
-          <a:bodyPr wrap="square" rtlCol="0" anchor="ctr"/>
-          <a:lstStyle/>
-          <a:p>
-            <a:pPr algn="ctr" indent="0" marL="0">
-              <a:buNone/>
-            </a:pPr>
-            <a:r>
-              <a:rPr lang="en-US" sz="1600" b="1" dirty="0">
-                <a:solidFill>
-                  <a:srgbClr val="FFFFFF"/>
-                </a:solidFill>
-              </a:rPr>
-              <a:t>Weeks 1–4</a:t>
-            </a:r>
-            <a:endParaRPr lang="en-US" sz="1600" dirty="0"/>
-          </a:p>
-        </p:txBody>
-      </p:sp>
-      <p:sp>
-        <p:nvSpPr>
-          <p:cNvPr id="6" name="Shape 4"/>
-          <p:cNvSpPr/>
-          <p:nvPr/>
-        </p:nvSpPr>
-        <p:spPr>
-          <a:xfrm>
-            <a:off x="457200" y="1508760"/>
-            <a:ext cx="2468880" cy="18288"/>
-          </a:xfrm>
-          <a:prstGeom prst="rect">
-            <a:avLst/>
-          </a:prstGeom>
-          <a:solidFill>
-            <a:srgbClr val="FFFFFF">
-              <a:alpha val="40000"/>
-            </a:srgbClr>
-          </a:solidFill>
-          <a:ln/>
-        </p:spPr>
-      </p:sp>
-      <p:sp>
-        <p:nvSpPr>
-          <p:cNvPr id="7" name="Text 5"/>
-          <p:cNvSpPr/>
-          <p:nvPr/>
-        </p:nvSpPr>
-        <p:spPr>
-          <a:xfrm>
-            <a:off x="548640" y="1691640"/>
-            <a:ext cx="2286000" cy="640080"/>
-          </a:xfrm>
-          <a:prstGeom prst="rect">
-            <a:avLst/>
-          </a:prstGeom>
-          <a:noFill/>
-          <a:ln/>
-        </p:spPr>
-        <p:txBody>
-          <a:bodyPr wrap="square" rtlCol="0" anchor="ctr"/>
-          <a:lstStyle/>
-          <a:p>
-            <a:pPr indent="0" marL="0">
-              <a:buNone/>
-            </a:pPr>
-            <a:r>
-              <a:rPr lang="en-US" sz="1400" dirty="0">
-                <a:solidFill>
-                  <a:srgbClr val="FFFFFF"/>
-                </a:solidFill>
-              </a:rPr>
-              <a:t>• Foundations &amp; tooling</a:t>
-            </a:r>
-            <a:endParaRPr lang="en-US" sz="1400" dirty="0"/>
-          </a:p>
-        </p:txBody>
-      </p:sp>
-      <p:sp>
-        <p:nvSpPr>
-          <p:cNvPr id="8" name="Text 6"/>
-          <p:cNvSpPr/>
-          <p:nvPr/>
-        </p:nvSpPr>
-        <p:spPr>
-          <a:xfrm>
-            <a:off x="548640" y="2423160"/>
-            <a:ext cx="2286000" cy="640080"/>
-          </a:xfrm>
-          <a:prstGeom prst="rect">
-            <a:avLst/>
-          </a:prstGeom>
-          <a:noFill/>
-          <a:ln/>
-        </p:spPr>
-        <p:txBody>
-          <a:bodyPr wrap="square" rtlCol="0" anchor="ctr"/>
-          <a:lstStyle/>
-          <a:p>
-            <a:pPr indent="0" marL="0">
-              <a:buNone/>
-            </a:pPr>
-            <a:r>
-              <a:rPr lang="en-US" sz="1400" dirty="0">
-                <a:solidFill>
-                  <a:srgbClr val="FFFFFF"/>
-                </a:solidFill>
-              </a:rPr>
-              <a:t>• Algorithm analysis</a:t>
-            </a:r>
-            <a:endParaRPr lang="en-US" sz="1400" dirty="0"/>
-          </a:p>
-        </p:txBody>
-      </p:sp>
-      <p:sp>
-        <p:nvSpPr>
-          <p:cNvPr id="9" name="Text 7"/>
-          <p:cNvSpPr/>
-          <p:nvPr/>
-        </p:nvSpPr>
-        <p:spPr>
-          <a:xfrm>
-            <a:off x="548640" y="3154680"/>
-            <a:ext cx="2286000" cy="640080"/>
-          </a:xfrm>
-          <a:prstGeom prst="rect">
-            <a:avLst/>
-          </a:prstGeom>
-          <a:noFill/>
-          <a:ln/>
-        </p:spPr>
-        <p:txBody>
-          <a:bodyPr wrap="square" rtlCol="0" anchor="ctr"/>
-          <a:lstStyle/>
-          <a:p>
-            <a:pPr indent="0" marL="0">
-              <a:buNone/>
-            </a:pPr>
-            <a:r>
-              <a:rPr lang="en-US" sz="1400" dirty="0">
-                <a:solidFill>
-                  <a:srgbClr val="FFFFFF"/>
-                </a:solidFill>
-              </a:rPr>
-              <a:t>• First mini-project</a:t>
-            </a:r>
-            <a:endParaRPr lang="en-US" sz="1400" dirty="0"/>
-          </a:p>
-        </p:txBody>
-      </p:sp>
-      <p:sp>
-        <p:nvSpPr>
-          <p:cNvPr id="10" name="Shape 8"/>
-          <p:cNvSpPr/>
-          <p:nvPr/>
-        </p:nvSpPr>
-        <p:spPr>
-          <a:xfrm>
-            <a:off x="3246120" y="960120"/>
-            <a:ext cx="2651760" cy="3566160"/>
-          </a:xfrm>
-          <a:prstGeom prst="roundRect">
-            <a:avLst>
-              <a:gd name="adj" fmla="val 4138"/>
-            </a:avLst>
-          </a:prstGeom>
-          <a:solidFill>
-            <a:srgbClr val="1C7293"/>
-          </a:solidFill>
-          <a:ln w="12700">
-            <a:solidFill>
-              <a:srgbClr val="1C7293"/>
-            </a:solidFill>
-            <a:prstDash val="solid"/>
-          </a:ln>
-        </p:spPr>
-      </p:sp>
-      <p:sp>
-        <p:nvSpPr>
-          <p:cNvPr id="11" name="Text 9"/>
-          <p:cNvSpPr/>
-          <p:nvPr/>
-        </p:nvSpPr>
-        <p:spPr>
-          <a:xfrm>
-            <a:off x="3337560" y="1051560"/>
-            <a:ext cx="2468880" cy="457200"/>
-          </a:xfrm>
-          <a:prstGeom prst="rect">
-            <a:avLst/>
-          </a:prstGeom>
-          <a:noFill/>
-          <a:ln/>
-        </p:spPr>
-        <p:txBody>
-          <a:bodyPr wrap="square" rtlCol="0" anchor="ctr"/>
-          <a:lstStyle/>
-          <a:p>
-            <a:pPr algn="ctr" indent="0" marL="0">
-              <a:buNone/>
-            </a:pPr>
-            <a:r>
-              <a:rPr lang="en-US" sz="1600" b="1" dirty="0">
-                <a:solidFill>
-                  <a:srgbClr val="FFFFFF"/>
-                </a:solidFill>
-              </a:rPr>
-              <a:t>Weeks 5–9</a:t>
-            </a:r>
-            <a:endParaRPr lang="en-US" sz="1600" dirty="0"/>
-          </a:p>
-        </p:txBody>
-      </p:sp>
-      <p:sp>
-        <p:nvSpPr>
-          <p:cNvPr id="12" name="Shape 10"/>
-          <p:cNvSpPr/>
-          <p:nvPr/>
-        </p:nvSpPr>
-        <p:spPr>
-          <a:xfrm>
-            <a:off x="3337560" y="1508760"/>
-            <a:ext cx="2468880" cy="18288"/>
-          </a:xfrm>
-          <a:prstGeom prst="rect">
-            <a:avLst/>
-          </a:prstGeom>
-          <a:solidFill>
-            <a:srgbClr val="FFFFFF">
-              <a:alpha val="40000"/>
-            </a:srgbClr>
-          </a:solidFill>
-          <a:ln/>
-        </p:spPr>
-      </p:sp>
-      <p:sp>
-        <p:nvSpPr>
-          <p:cNvPr id="13" name="Text 11"/>
-          <p:cNvSpPr/>
-          <p:nvPr/>
-        </p:nvSpPr>
-        <p:spPr>
-          <a:xfrm>
-            <a:off x="3429000" y="1691640"/>
-            <a:ext cx="2286000" cy="640080"/>
-          </a:xfrm>
-          <a:prstGeom prst="rect">
-            <a:avLst/>
-          </a:prstGeom>
-          <a:noFill/>
-          <a:ln/>
-        </p:spPr>
-        <p:txBody>
-          <a:bodyPr wrap="square" rtlCol="0" anchor="ctr"/>
-          <a:lstStyle/>
-          <a:p>
-            <a:pPr indent="0" marL="0">
-              <a:buNone/>
-            </a:pPr>
-            <a:r>
-              <a:rPr lang="en-US" sz="1400" dirty="0">
-                <a:solidFill>
-                  <a:srgbClr val="FFFFFF"/>
-                </a:solidFill>
-              </a:rPr>
-              <a:t>• Core data structures</a:t>
-            </a:r>
-            <a:endParaRPr lang="en-US" sz="1400" dirty="0"/>
-          </a:p>
-        </p:txBody>
-      </p:sp>
-      <p:sp>
-        <p:nvSpPr>
-          <p:cNvPr id="14" name="Text 12"/>
-          <p:cNvSpPr/>
-          <p:nvPr/>
-        </p:nvSpPr>
-        <p:spPr>
-          <a:xfrm>
-            <a:off x="3429000" y="2423160"/>
-            <a:ext cx="2286000" cy="640080"/>
-          </a:xfrm>
-          <a:prstGeom prst="rect">
-            <a:avLst/>
-          </a:prstGeom>
-          <a:noFill/>
-          <a:ln/>
-        </p:spPr>
-        <p:txBody>
-          <a:bodyPr wrap="square" rtlCol="0" anchor="ctr"/>
-          <a:lstStyle/>
-          <a:p>
-            <a:pPr indent="0" marL="0">
-              <a:buNone/>
-            </a:pPr>
-            <a:r>
-              <a:rPr lang="en-US" sz="1400" dirty="0">
-                <a:solidFill>
-                  <a:srgbClr val="FFFFFF"/>
-                </a:solidFill>
-              </a:rPr>
-              <a:t>• Algorithm design</a:t>
-            </a:r>
-            <a:endParaRPr lang="en-US" sz="1400" dirty="0"/>
-          </a:p>
-        </p:txBody>
-      </p:sp>
-      <p:sp>
-        <p:nvSpPr>
-          <p:cNvPr id="15" name="Text 13"/>
-          <p:cNvSpPr/>
-          <p:nvPr/>
-        </p:nvSpPr>
-        <p:spPr>
-          <a:xfrm>
-            <a:off x="3429000" y="3154680"/>
-            <a:ext cx="2286000" cy="640080"/>
-          </a:xfrm>
-          <a:prstGeom prst="rect">
-            <a:avLst/>
-          </a:prstGeom>
-          <a:noFill/>
-          <a:ln/>
-        </p:spPr>
-        <p:txBody>
-          <a:bodyPr wrap="square" rtlCol="0" anchor="ctr"/>
-          <a:lstStyle/>
-          <a:p>
-            <a:pPr indent="0" marL="0">
-              <a:buNone/>
-            </a:pPr>
-            <a:r>
-              <a:rPr lang="en-US" sz="1400" dirty="0">
-                <a:solidFill>
-                  <a:srgbClr val="FFFFFF"/>
-                </a:solidFill>
-              </a:rPr>
-              <a:t>• Team project kick-off</a:t>
-            </a:r>
-            <a:endParaRPr lang="en-US" sz="1400" dirty="0"/>
-          </a:p>
-        </p:txBody>
-      </p:sp>
-      <p:sp>
-        <p:nvSpPr>
-          <p:cNvPr id="16" name="Shape 14"/>
-          <p:cNvSpPr/>
-          <p:nvPr/>
-        </p:nvSpPr>
-        <p:spPr>
-          <a:xfrm>
-            <a:off x="6126480" y="960120"/>
-            <a:ext cx="2651760" cy="3566160"/>
-          </a:xfrm>
-          <a:prstGeom prst="roundRect">
-            <a:avLst>
-              <a:gd name="adj" fmla="val 4138"/>
-            </a:avLst>
-          </a:prstGeom>
-          <a:solidFill>
-            <a:srgbClr val="FF6B35"/>
-          </a:solidFill>
-          <a:ln w="12700">
-            <a:solidFill>
-              <a:srgbClr val="FF6B35"/>
-            </a:solidFill>
-            <a:prstDash val="solid"/>
-          </a:ln>
-        </p:spPr>
-      </p:sp>
-      <p:sp>
-        <p:nvSpPr>
-          <p:cNvPr id="17" name="Text 15"/>
-          <p:cNvSpPr/>
-          <p:nvPr/>
-        </p:nvSpPr>
-        <p:spPr>
-          <a:xfrm>
-            <a:off x="6217920" y="1051560"/>
-            <a:ext cx="2468880" cy="457200"/>
-          </a:xfrm>
-          <a:prstGeom prst="rect">
-            <a:avLst/>
-          </a:prstGeom>
-          <a:noFill/>
-          <a:ln/>
-        </p:spPr>
-        <p:txBody>
-          <a:bodyPr wrap="square" rtlCol="0" anchor="ctr"/>
-          <a:lstStyle/>
-          <a:p>
-            <a:pPr algn="ctr" indent="0" marL="0">
-              <a:buNone/>
-            </a:pPr>
-            <a:r>
-              <a:rPr lang="en-US" sz="1600" b="1" dirty="0">
-                <a:solidFill>
-                  <a:srgbClr val="FFFFFF"/>
-                </a:solidFill>
-              </a:rPr>
-              <a:t>Weeks 10–15</a:t>
-            </a:r>
-            <a:endParaRPr lang="en-US" sz="1600" dirty="0"/>
-          </a:p>
-        </p:txBody>
-      </p:sp>
-      <p:sp>
-        <p:nvSpPr>
-          <p:cNvPr id="18" name="Shape 16"/>
-          <p:cNvSpPr/>
-          <p:nvPr/>
-        </p:nvSpPr>
-        <p:spPr>
-          <a:xfrm>
-            <a:off x="6217920" y="1508760"/>
-            <a:ext cx="2468880" cy="18288"/>
-          </a:xfrm>
-          <a:prstGeom prst="rect">
-            <a:avLst/>
-          </a:prstGeom>
-          <a:solidFill>
-            <a:srgbClr val="FFFFFF">
-              <a:alpha val="40000"/>
-            </a:srgbClr>
-          </a:solidFill>
-          <a:ln/>
-        </p:spPr>
-      </p:sp>
-      <p:sp>
-        <p:nvSpPr>
-          <p:cNvPr id="19" name="Text 17"/>
-          <p:cNvSpPr/>
-          <p:nvPr/>
-        </p:nvSpPr>
-        <p:spPr>
-          <a:xfrm>
-            <a:off x="6309360" y="1691640"/>
-            <a:ext cx="2286000" cy="640080"/>
-          </a:xfrm>
-          <a:prstGeom prst="rect">
-            <a:avLst/>
-          </a:prstGeom>
-          <a:noFill/>
-          <a:ln/>
-        </p:spPr>
-        <p:txBody>
-          <a:bodyPr wrap="square" rtlCol="0" anchor="ctr"/>
-          <a:lstStyle/>
-          <a:p>
-            <a:pPr indent="0" marL="0">
-              <a:buNone/>
-            </a:pPr>
-            <a:r>
-              <a:rPr lang="en-US" sz="1400" dirty="0">
-                <a:solidFill>
-                  <a:srgbClr val="FFFFFF"/>
-                </a:solidFill>
-              </a:rPr>
-              <a:t>• Advanced topics</a:t>
-            </a:r>
-            <a:endParaRPr lang="en-US" sz="1400" dirty="0"/>
-          </a:p>
-        </p:txBody>
-      </p:sp>
-      <p:sp>
-        <p:nvSpPr>
-          <p:cNvPr id="20" name="Text 18"/>
-          <p:cNvSpPr/>
-          <p:nvPr/>
-        </p:nvSpPr>
-        <p:spPr>
-          <a:xfrm>
-            <a:off x="6309360" y="2423160"/>
-            <a:ext cx="2286000" cy="640080"/>
-          </a:xfrm>
-          <a:prstGeom prst="rect">
-            <a:avLst/>
-          </a:prstGeom>
-          <a:noFill/>
-          <a:ln/>
-        </p:spPr>
-        <p:txBody>
-          <a:bodyPr wrap="square" rtlCol="0" anchor="ctr"/>
-          <a:lstStyle/>
-          <a:p>
-            <a:pPr indent="0" marL="0">
-              <a:buNone/>
-            </a:pPr>
-            <a:r>
-              <a:rPr lang="en-US" sz="1400" dirty="0">
-                <a:solidFill>
-                  <a:srgbClr val="FFFFFF"/>
-                </a:solidFill>
-              </a:rPr>
-              <a:t>• Real-world case studies</a:t>
-            </a:r>
-            <a:endParaRPr lang="en-US" sz="1400" dirty="0"/>
-          </a:p>
-        </p:txBody>
-      </p:sp>
-      <p:sp>
-        <p:nvSpPr>
-          <p:cNvPr id="21" name="Text 19"/>
-          <p:cNvSpPr/>
-          <p:nvPr/>
-        </p:nvSpPr>
-        <p:spPr>
-          <a:xfrm>
-            <a:off x="6309360" y="3154680"/>
-            <a:ext cx="2286000" cy="640080"/>
-          </a:xfrm>
-          <a:prstGeom prst="rect">
-            <a:avLst/>
-          </a:prstGeom>
-          <a:noFill/>
-          <a:ln/>
-        </p:spPr>
-        <p:txBody>
-          <a:bodyPr wrap="square" rtlCol="0" anchor="ctr"/>
-          <a:lstStyle/>
-          <a:p>
-            <a:pPr indent="0" marL="0">
-              <a:buNone/>
-            </a:pPr>
-            <a:r>
-              <a:rPr lang="en-US" sz="1400" dirty="0">
-                <a:solidFill>
-                  <a:srgbClr val="FFFFFF"/>
-                </a:solidFill>
-              </a:rPr>
-              <a:t>• Final project &amp; demo</a:t>
-            </a:r>
-            <a:endParaRPr lang="en-US" sz="1400" dirty="0"/>
-          </a:p>
-        </p:txBody>
-      </p:sp>
-      <p:sp>
-        <p:nvSpPr>
-          <p:cNvPr id="22" name="Text 20"/>
+            <a:endParaRPr lang="en-US" sz="3000" dirty="0"/>
+          </a:p>
+        </p:txBody>
+      </p:sp>
+      <p:sp>
+        <p:nvSpPr>
+          <p:cNvPr id="3" name="Text 1"/>
           <p:cNvSpPr/>
           <p:nvPr/>
         </p:nvSpPr>
@@ -5609,14 +6045,14 @@
       </p:sp>
       <p:sp>
         <p:nvSpPr>
-          <p:cNvPr id="23" name="Text 21"/>
+          <p:cNvPr id="4" name="Text 2"/>
           <p:cNvSpPr/>
           <p:nvPr/>
         </p:nvSpPr>
         <p:spPr>
           <a:xfrm>
             <a:off x="457200" y="4709160"/>
-            <a:ext cx="3657600" cy="320040"/>
+            <a:ext cx="2743200" cy="320040"/>
           </a:xfrm>
           <a:prstGeom prst="rect">
             <a:avLst/>
@@ -5637,9 +6073,582 @@
                   <a:srgbClr val="5A7184"/>
                 </a:solidFill>
               </a:rPr>
-              <a:t>Jiarui Zhang — Faculty Introduction</a:t>
+              <a:t>Faculty Introduction</a:t>
             </a:r>
             <a:endParaRPr lang="en-US" sz="1000" dirty="0"/>
+          </a:p>
+        </p:txBody>
+      </p:sp>
+      <p:sp>
+        <p:nvSpPr>
+          <p:cNvPr id="5" name="Shape 3"/>
+          <p:cNvSpPr/>
+          <p:nvPr/>
+        </p:nvSpPr>
+        <p:spPr>
+          <a:xfrm>
+            <a:off x="548640" y="1051560"/>
+            <a:ext cx="2606040" cy="3520440"/>
+          </a:xfrm>
+          <a:prstGeom prst="rect">
+            <a:avLst/>
+          </a:prstGeom>
+          <a:solidFill>
+            <a:srgbClr val="FFFFFF"/>
+          </a:solidFill>
+          <a:ln/>
+          <a:effectLst>
+            <a:outerShdw sx="100000" sy="100000" kx="0" ky="0" algn="bl" rotWithShape="0" blurRad="101600" dist="38100" dir="8100000">
+              <a:srgbClr val="000000">
+                <a:alpha val="12000"/>
+              </a:srgbClr>
+            </a:outerShdw>
+          </a:effectLst>
+        </p:spPr>
+      </p:sp>
+      <p:sp>
+        <p:nvSpPr>
+          <p:cNvPr id="6" name="Shape 4"/>
+          <p:cNvSpPr/>
+          <p:nvPr/>
+        </p:nvSpPr>
+        <p:spPr>
+          <a:xfrm>
+            <a:off x="548640" y="1051560"/>
+            <a:ext cx="2606040" cy="457200"/>
+          </a:xfrm>
+          <a:prstGeom prst="rect">
+            <a:avLst/>
+          </a:prstGeom>
+          <a:solidFill>
+            <a:srgbClr val="065A82"/>
+          </a:solidFill>
+          <a:ln/>
+        </p:spPr>
+      </p:sp>
+      <p:sp>
+        <p:nvSpPr>
+          <p:cNvPr id="7" name="Text 5"/>
+          <p:cNvSpPr/>
+          <p:nvPr/>
+        </p:nvSpPr>
+        <p:spPr>
+          <a:xfrm>
+            <a:off x="548640" y="1051560"/>
+            <a:ext cx="2606040" cy="457200"/>
+          </a:xfrm>
+          <a:prstGeom prst="rect">
+            <a:avLst/>
+          </a:prstGeom>
+          <a:noFill/>
+          <a:ln/>
+        </p:spPr>
+        <p:txBody>
+          <a:bodyPr wrap="square" rtlCol="0" anchor="ctr"/>
+          <a:lstStyle/>
+          <a:p>
+            <a:pPr algn="ctr" indent="0" marL="0">
+              <a:buNone/>
+            </a:pPr>
+            <a:r>
+              <a:rPr lang="en-US" sz="1500" b="1" dirty="0">
+                <a:solidFill>
+                  <a:srgbClr val="FFFFFF"/>
+                </a:solidFill>
+              </a:rPr>
+              <a:t>Weeks 1–4</a:t>
+            </a:r>
+            <a:endParaRPr lang="en-US" sz="1500" dirty="0"/>
+          </a:p>
+        </p:txBody>
+      </p:sp>
+      <p:sp>
+        <p:nvSpPr>
+          <p:cNvPr id="8" name="Text 6"/>
+          <p:cNvSpPr/>
+          <p:nvPr/>
+        </p:nvSpPr>
+        <p:spPr>
+          <a:xfrm>
+            <a:off x="731520" y="1691640"/>
+            <a:ext cx="2240280" cy="640080"/>
+          </a:xfrm>
+          <a:prstGeom prst="rect">
+            <a:avLst/>
+          </a:prstGeom>
+          <a:noFill/>
+          <a:ln/>
+        </p:spPr>
+        <p:txBody>
+          <a:bodyPr wrap="square" rtlCol="0" anchor="ctr"/>
+          <a:lstStyle/>
+          <a:p>
+            <a:pPr indent="0" marL="0">
+              <a:buNone/>
+            </a:pPr>
+            <a:r>
+              <a:rPr lang="en-US" sz="1400" dirty="0">
+                <a:solidFill>
+                  <a:srgbClr val="1A1A2E"/>
+                </a:solidFill>
+              </a:rPr>
+              <a:t>• Foundations &amp; tooling</a:t>
+            </a:r>
+            <a:endParaRPr lang="en-US" sz="1400" dirty="0"/>
+          </a:p>
+        </p:txBody>
+      </p:sp>
+      <p:sp>
+        <p:nvSpPr>
+          <p:cNvPr id="9" name="Text 7"/>
+          <p:cNvSpPr/>
+          <p:nvPr/>
+        </p:nvSpPr>
+        <p:spPr>
+          <a:xfrm>
+            <a:off x="731520" y="2423160"/>
+            <a:ext cx="2240280" cy="640080"/>
+          </a:xfrm>
+          <a:prstGeom prst="rect">
+            <a:avLst/>
+          </a:prstGeom>
+          <a:noFill/>
+          <a:ln/>
+        </p:spPr>
+        <p:txBody>
+          <a:bodyPr wrap="square" rtlCol="0" anchor="ctr"/>
+          <a:lstStyle/>
+          <a:p>
+            <a:pPr indent="0" marL="0">
+              <a:buNone/>
+            </a:pPr>
+            <a:r>
+              <a:rPr lang="en-US" sz="1400" dirty="0">
+                <a:solidFill>
+                  <a:srgbClr val="1A1A2E"/>
+                </a:solidFill>
+              </a:rPr>
+              <a:t>• Algorithm analysis</a:t>
+            </a:r>
+            <a:endParaRPr lang="en-US" sz="1400" dirty="0"/>
+          </a:p>
+        </p:txBody>
+      </p:sp>
+      <p:sp>
+        <p:nvSpPr>
+          <p:cNvPr id="10" name="Text 8"/>
+          <p:cNvSpPr/>
+          <p:nvPr/>
+        </p:nvSpPr>
+        <p:spPr>
+          <a:xfrm>
+            <a:off x="731520" y="3154680"/>
+            <a:ext cx="2240280" cy="640080"/>
+          </a:xfrm>
+          <a:prstGeom prst="rect">
+            <a:avLst/>
+          </a:prstGeom>
+          <a:noFill/>
+          <a:ln/>
+        </p:spPr>
+        <p:txBody>
+          <a:bodyPr wrap="square" rtlCol="0" anchor="ctr"/>
+          <a:lstStyle/>
+          <a:p>
+            <a:pPr indent="0" marL="0">
+              <a:buNone/>
+            </a:pPr>
+            <a:r>
+              <a:rPr lang="en-US" sz="1400" dirty="0">
+                <a:solidFill>
+                  <a:srgbClr val="1A1A2E"/>
+                </a:solidFill>
+              </a:rPr>
+              <a:t>• First mini-project</a:t>
+            </a:r>
+            <a:endParaRPr lang="en-US" sz="1400" dirty="0"/>
+          </a:p>
+        </p:txBody>
+      </p:sp>
+      <p:sp>
+        <p:nvSpPr>
+          <p:cNvPr id="11" name="Shape 9"/>
+          <p:cNvSpPr/>
+          <p:nvPr/>
+        </p:nvSpPr>
+        <p:spPr>
+          <a:xfrm>
+            <a:off x="3429000" y="1051560"/>
+            <a:ext cx="2606040" cy="3520440"/>
+          </a:xfrm>
+          <a:prstGeom prst="rect">
+            <a:avLst/>
+          </a:prstGeom>
+          <a:solidFill>
+            <a:srgbClr val="FFFFFF"/>
+          </a:solidFill>
+          <a:ln/>
+          <a:effectLst>
+            <a:outerShdw sx="100000" sy="100000" kx="0" ky="0" algn="bl" rotWithShape="0" blurRad="101600" dist="38100" dir="8100000">
+              <a:srgbClr val="000000">
+                <a:alpha val="12000"/>
+              </a:srgbClr>
+            </a:outerShdw>
+          </a:effectLst>
+        </p:spPr>
+      </p:sp>
+      <p:sp>
+        <p:nvSpPr>
+          <p:cNvPr id="12" name="Shape 10"/>
+          <p:cNvSpPr/>
+          <p:nvPr/>
+        </p:nvSpPr>
+        <p:spPr>
+          <a:xfrm>
+            <a:off x="3429000" y="1051560"/>
+            <a:ext cx="2606040" cy="457200"/>
+          </a:xfrm>
+          <a:prstGeom prst="rect">
+            <a:avLst/>
+          </a:prstGeom>
+          <a:solidFill>
+            <a:srgbClr val="1C7293"/>
+          </a:solidFill>
+          <a:ln/>
+        </p:spPr>
+      </p:sp>
+      <p:sp>
+        <p:nvSpPr>
+          <p:cNvPr id="13" name="Text 11"/>
+          <p:cNvSpPr/>
+          <p:nvPr/>
+        </p:nvSpPr>
+        <p:spPr>
+          <a:xfrm>
+            <a:off x="3429000" y="1051560"/>
+            <a:ext cx="2606040" cy="457200"/>
+          </a:xfrm>
+          <a:prstGeom prst="rect">
+            <a:avLst/>
+          </a:prstGeom>
+          <a:noFill/>
+          <a:ln/>
+        </p:spPr>
+        <p:txBody>
+          <a:bodyPr wrap="square" rtlCol="0" anchor="ctr"/>
+          <a:lstStyle/>
+          <a:p>
+            <a:pPr algn="ctr" indent="0" marL="0">
+              <a:buNone/>
+            </a:pPr>
+            <a:r>
+              <a:rPr lang="en-US" sz="1500" b="1" dirty="0">
+                <a:solidFill>
+                  <a:srgbClr val="FFFFFF"/>
+                </a:solidFill>
+              </a:rPr>
+              <a:t>Weeks 5–9</a:t>
+            </a:r>
+            <a:endParaRPr lang="en-US" sz="1500" dirty="0"/>
+          </a:p>
+        </p:txBody>
+      </p:sp>
+      <p:sp>
+        <p:nvSpPr>
+          <p:cNvPr id="14" name="Text 12"/>
+          <p:cNvSpPr/>
+          <p:nvPr/>
+        </p:nvSpPr>
+        <p:spPr>
+          <a:xfrm>
+            <a:off x="3611880" y="1691640"/>
+            <a:ext cx="2240280" cy="640080"/>
+          </a:xfrm>
+          <a:prstGeom prst="rect">
+            <a:avLst/>
+          </a:prstGeom>
+          <a:noFill/>
+          <a:ln/>
+        </p:spPr>
+        <p:txBody>
+          <a:bodyPr wrap="square" rtlCol="0" anchor="ctr"/>
+          <a:lstStyle/>
+          <a:p>
+            <a:pPr indent="0" marL="0">
+              <a:buNone/>
+            </a:pPr>
+            <a:r>
+              <a:rPr lang="en-US" sz="1400" dirty="0">
+                <a:solidFill>
+                  <a:srgbClr val="1A1A2E"/>
+                </a:solidFill>
+              </a:rPr>
+              <a:t>• Core data structures</a:t>
+            </a:r>
+            <a:endParaRPr lang="en-US" sz="1400" dirty="0"/>
+          </a:p>
+        </p:txBody>
+      </p:sp>
+      <p:sp>
+        <p:nvSpPr>
+          <p:cNvPr id="15" name="Text 13"/>
+          <p:cNvSpPr/>
+          <p:nvPr/>
+        </p:nvSpPr>
+        <p:spPr>
+          <a:xfrm>
+            <a:off x="3611880" y="2423160"/>
+            <a:ext cx="2240280" cy="640080"/>
+          </a:xfrm>
+          <a:prstGeom prst="rect">
+            <a:avLst/>
+          </a:prstGeom>
+          <a:noFill/>
+          <a:ln/>
+        </p:spPr>
+        <p:txBody>
+          <a:bodyPr wrap="square" rtlCol="0" anchor="ctr"/>
+          <a:lstStyle/>
+          <a:p>
+            <a:pPr indent="0" marL="0">
+              <a:buNone/>
+            </a:pPr>
+            <a:r>
+              <a:rPr lang="en-US" sz="1400" dirty="0">
+                <a:solidFill>
+                  <a:srgbClr val="1A1A2E"/>
+                </a:solidFill>
+              </a:rPr>
+              <a:t>• Algorithm design</a:t>
+            </a:r>
+            <a:endParaRPr lang="en-US" sz="1400" dirty="0"/>
+          </a:p>
+        </p:txBody>
+      </p:sp>
+      <p:sp>
+        <p:nvSpPr>
+          <p:cNvPr id="16" name="Text 14"/>
+          <p:cNvSpPr/>
+          <p:nvPr/>
+        </p:nvSpPr>
+        <p:spPr>
+          <a:xfrm>
+            <a:off x="3611880" y="3154680"/>
+            <a:ext cx="2240280" cy="640080"/>
+          </a:xfrm>
+          <a:prstGeom prst="rect">
+            <a:avLst/>
+          </a:prstGeom>
+          <a:noFill/>
+          <a:ln/>
+        </p:spPr>
+        <p:txBody>
+          <a:bodyPr wrap="square" rtlCol="0" anchor="ctr"/>
+          <a:lstStyle/>
+          <a:p>
+            <a:pPr indent="0" marL="0">
+              <a:buNone/>
+            </a:pPr>
+            <a:r>
+              <a:rPr lang="en-US" sz="1400" dirty="0">
+                <a:solidFill>
+                  <a:srgbClr val="1A1A2E"/>
+                </a:solidFill>
+              </a:rPr>
+              <a:t>• Team project kick-off</a:t>
+            </a:r>
+            <a:endParaRPr lang="en-US" sz="1400" dirty="0"/>
+          </a:p>
+        </p:txBody>
+      </p:sp>
+      <p:sp>
+        <p:nvSpPr>
+          <p:cNvPr id="17" name="Shape 15"/>
+          <p:cNvSpPr/>
+          <p:nvPr/>
+        </p:nvSpPr>
+        <p:spPr>
+          <a:xfrm>
+            <a:off x="6309360" y="1051560"/>
+            <a:ext cx="2606040" cy="3520440"/>
+          </a:xfrm>
+          <a:prstGeom prst="rect">
+            <a:avLst/>
+          </a:prstGeom>
+          <a:solidFill>
+            <a:srgbClr val="FFFFFF"/>
+          </a:solidFill>
+          <a:ln/>
+          <a:effectLst>
+            <a:outerShdw sx="100000" sy="100000" kx="0" ky="0" algn="bl" rotWithShape="0" blurRad="101600" dist="38100" dir="8100000">
+              <a:srgbClr val="000000">
+                <a:alpha val="12000"/>
+              </a:srgbClr>
+            </a:outerShdw>
+          </a:effectLst>
+        </p:spPr>
+      </p:sp>
+      <p:sp>
+        <p:nvSpPr>
+          <p:cNvPr id="18" name="Shape 16"/>
+          <p:cNvSpPr/>
+          <p:nvPr/>
+        </p:nvSpPr>
+        <p:spPr>
+          <a:xfrm>
+            <a:off x="6309360" y="1051560"/>
+            <a:ext cx="2606040" cy="457200"/>
+          </a:xfrm>
+          <a:prstGeom prst="rect">
+            <a:avLst/>
+          </a:prstGeom>
+          <a:solidFill>
+            <a:srgbClr val="FF6B35"/>
+          </a:solidFill>
+          <a:ln/>
+        </p:spPr>
+      </p:sp>
+      <p:sp>
+        <p:nvSpPr>
+          <p:cNvPr id="19" name="Text 17"/>
+          <p:cNvSpPr/>
+          <p:nvPr/>
+        </p:nvSpPr>
+        <p:spPr>
+          <a:xfrm>
+            <a:off x="6309360" y="1051560"/>
+            <a:ext cx="2606040" cy="457200"/>
+          </a:xfrm>
+          <a:prstGeom prst="rect">
+            <a:avLst/>
+          </a:prstGeom>
+          <a:noFill/>
+          <a:ln/>
+        </p:spPr>
+        <p:txBody>
+          <a:bodyPr wrap="square" rtlCol="0" anchor="ctr"/>
+          <a:lstStyle/>
+          <a:p>
+            <a:pPr algn="ctr" indent="0" marL="0">
+              <a:buNone/>
+            </a:pPr>
+            <a:r>
+              <a:rPr lang="en-US" sz="1500" b="1" dirty="0">
+                <a:solidFill>
+                  <a:srgbClr val="FFFFFF"/>
+                </a:solidFill>
+              </a:rPr>
+              <a:t>Weeks 10–15</a:t>
+            </a:r>
+            <a:endParaRPr lang="en-US" sz="1500" dirty="0"/>
+          </a:p>
+        </p:txBody>
+      </p:sp>
+      <p:sp>
+        <p:nvSpPr>
+          <p:cNvPr id="20" name="Text 18"/>
+          <p:cNvSpPr/>
+          <p:nvPr/>
+        </p:nvSpPr>
+        <p:spPr>
+          <a:xfrm>
+            <a:off x="6492240" y="1691640"/>
+            <a:ext cx="2240280" cy="640080"/>
+          </a:xfrm>
+          <a:prstGeom prst="rect">
+            <a:avLst/>
+          </a:prstGeom>
+          <a:noFill/>
+          <a:ln/>
+        </p:spPr>
+        <p:txBody>
+          <a:bodyPr wrap="square" rtlCol="0" anchor="ctr"/>
+          <a:lstStyle/>
+          <a:p>
+            <a:pPr indent="0" marL="0">
+              <a:buNone/>
+            </a:pPr>
+            <a:r>
+              <a:rPr lang="en-US" sz="1400" dirty="0">
+                <a:solidFill>
+                  <a:srgbClr val="1A1A2E"/>
+                </a:solidFill>
+              </a:rPr>
+              <a:t>• Advanced topics</a:t>
+            </a:r>
+            <a:endParaRPr lang="en-US" sz="1400" dirty="0"/>
+          </a:p>
+        </p:txBody>
+      </p:sp>
+      <p:sp>
+        <p:nvSpPr>
+          <p:cNvPr id="21" name="Text 19"/>
+          <p:cNvSpPr/>
+          <p:nvPr/>
+        </p:nvSpPr>
+        <p:spPr>
+          <a:xfrm>
+            <a:off x="6492240" y="2423160"/>
+            <a:ext cx="2240280" cy="640080"/>
+          </a:xfrm>
+          <a:prstGeom prst="rect">
+            <a:avLst/>
+          </a:prstGeom>
+          <a:noFill/>
+          <a:ln/>
+        </p:spPr>
+        <p:txBody>
+          <a:bodyPr wrap="square" rtlCol="0" anchor="ctr"/>
+          <a:lstStyle/>
+          <a:p>
+            <a:pPr indent="0" marL="0">
+              <a:buNone/>
+            </a:pPr>
+            <a:r>
+              <a:rPr lang="en-US" sz="1400" dirty="0">
+                <a:solidFill>
+                  <a:srgbClr val="1A1A2E"/>
+                </a:solidFill>
+              </a:rPr>
+              <a:t>• Real-world case studies</a:t>
+            </a:r>
+            <a:endParaRPr lang="en-US" sz="1400" dirty="0"/>
+          </a:p>
+        </p:txBody>
+      </p:sp>
+      <p:sp>
+        <p:nvSpPr>
+          <p:cNvPr id="22" name="Text 20"/>
+          <p:cNvSpPr/>
+          <p:nvPr/>
+        </p:nvSpPr>
+        <p:spPr>
+          <a:xfrm>
+            <a:off x="6492240" y="3154680"/>
+            <a:ext cx="2240280" cy="640080"/>
+          </a:xfrm>
+          <a:prstGeom prst="rect">
+            <a:avLst/>
+          </a:prstGeom>
+          <a:noFill/>
+          <a:ln/>
+        </p:spPr>
+        <p:txBody>
+          <a:bodyPr wrap="square" rtlCol="0" anchor="ctr"/>
+          <a:lstStyle/>
+          <a:p>
+            <a:pPr indent="0" marL="0">
+              <a:buNone/>
+            </a:pPr>
+            <a:r>
+              <a:rPr lang="en-US" sz="1400" dirty="0">
+                <a:solidFill>
+                  <a:srgbClr val="1A1A2E"/>
+                </a:solidFill>
+              </a:rPr>
+              <a:t>• Final project &amp; demo</a:t>
+            </a:r>
+            <a:endParaRPr lang="en-US" sz="1400" dirty="0"/>
           </a:p>
         </p:txBody>
       </p:sp>
@@ -5683,24 +6692,24 @@
         </p:nvSpPr>
         <p:spPr>
           <a:xfrm>
-            <a:off x="548640" y="256032"/>
-            <a:ext cx="8046720" cy="566928"/>
-          </a:xfrm>
-          <a:prstGeom prst="rect">
-            <a:avLst/>
-          </a:prstGeom>
-          <a:noFill/>
-          <a:ln/>
-        </p:spPr>
-        <p:txBody>
-          <a:bodyPr wrap="square" rtlCol="0" anchor="ctr"/>
-          <a:lstStyle/>
-          <a:p>
-            <a:pPr indent="0" marL="0">
-              <a:buNone/>
-            </a:pPr>
-            <a:r>
-              <a:rPr lang="en-US" sz="2800" b="1" dirty="0">
+            <a:off x="548640" y="274320"/>
+            <a:ext cx="8046720" cy="594360"/>
+          </a:xfrm>
+          <a:prstGeom prst="rect">
+            <a:avLst/>
+          </a:prstGeom>
+          <a:noFill/>
+          <a:ln/>
+        </p:spPr>
+        <p:txBody>
+          <a:bodyPr wrap="square" lIns="0" tIns="0" rIns="0" bIns="0" rtlCol="0" anchor="ctr"/>
+          <a:lstStyle/>
+          <a:p>
+            <a:pPr indent="0" marL="0">
+              <a:buNone/>
+            </a:pPr>
+            <a:r>
+              <a:rPr lang="en-US" sz="3000" b="1" dirty="0">
                 <a:solidFill>
                   <a:srgbClr val="0B1D3A"/>
                 </a:solidFill>
@@ -5710,29 +6719,45 @@
               </a:rPr>
               <a:t>Understanding Where Students Are</a:t>
             </a:r>
-            <a:endParaRPr lang="en-US" sz="2800" dirty="0"/>
-          </a:p>
-        </p:txBody>
-      </p:sp>
-      <p:sp>
-        <p:nvSpPr>
-          <p:cNvPr id="3" name="Shape 1"/>
-          <p:cNvSpPr/>
-          <p:nvPr/>
-        </p:nvSpPr>
-        <p:spPr>
-          <a:xfrm>
-            <a:off x="548640" y="822960"/>
-            <a:ext cx="8046720" cy="27432"/>
-          </a:xfrm>
-          <a:prstGeom prst="rect">
-            <a:avLst/>
-          </a:prstGeom>
-          <a:solidFill>
-            <a:srgbClr val="1C7293"/>
-          </a:solidFill>
-          <a:ln/>
-        </p:spPr>
+            <a:endParaRPr lang="en-US" sz="3000" dirty="0"/>
+          </a:p>
+        </p:txBody>
+      </p:sp>
+      <p:sp>
+        <p:nvSpPr>
+          <p:cNvPr id="3" name="Text 1"/>
+          <p:cNvSpPr/>
+          <p:nvPr/>
+        </p:nvSpPr>
+        <p:spPr>
+          <a:xfrm>
+            <a:off x="8046720" y="4709160"/>
+            <a:ext cx="914400" cy="320040"/>
+          </a:xfrm>
+          <a:prstGeom prst="rect">
+            <a:avLst/>
+          </a:prstGeom>
+          <a:noFill/>
+          <a:ln/>
+        </p:spPr>
+        <p:txBody>
+          <a:bodyPr wrap="square" rtlCol="0" anchor="ctr"/>
+          <a:lstStyle/>
+          <a:p>
+            <a:pPr algn="r" indent="0" marL="0">
+              <a:buNone/>
+            </a:pPr>
+            <a:r>
+              <a:rPr lang="en-US" sz="1000" dirty="0">
+                <a:solidFill>
+                  <a:srgbClr val="5A7184"/>
+                </a:solidFill>
+              </a:rPr>
+              <a:t>8 / 12</a:t>
+            </a:r>
+            <a:endParaRPr lang="en-US" sz="1000" dirty="0"/>
+          </a:p>
+        </p:txBody>
       </p:sp>
       <p:sp>
         <p:nvSpPr>
@@ -5742,8 +6767,8 @@
         </p:nvSpPr>
         <p:spPr>
           <a:xfrm>
-            <a:off x="502920" y="960120"/>
-            <a:ext cx="8229600" cy="3749040"/>
+            <a:off x="457200" y="4709160"/>
+            <a:ext cx="2743200" cy="320040"/>
           </a:xfrm>
           <a:prstGeom prst="rect">
             <a:avLst/>
@@ -5755,179 +6780,428 @@
           <a:bodyPr wrap="square" rtlCol="0" anchor="ctr"/>
           <a:lstStyle/>
           <a:p>
-            <a:pPr marL="190500" indent="-190500">
+            <a:pPr indent="0" marL="0">
+              <a:buNone/>
+            </a:pPr>
+            <a:r>
+              <a:rPr lang="en-US" sz="1000" i="1" dirty="0">
+                <a:solidFill>
+                  <a:srgbClr val="5A7184"/>
+                </a:solidFill>
+              </a:rPr>
+              <a:t>Faculty Introduction</a:t>
+            </a:r>
+            <a:endParaRPr lang="en-US" sz="1000" dirty="0"/>
+          </a:p>
+        </p:txBody>
+      </p:sp>
+      <p:sp>
+        <p:nvSpPr>
+          <p:cNvPr id="5" name="Text 3"/>
+          <p:cNvSpPr/>
+          <p:nvPr/>
+        </p:nvSpPr>
+        <p:spPr>
+          <a:xfrm>
+            <a:off x="548640" y="1005840"/>
+            <a:ext cx="8046720" cy="365760"/>
+          </a:xfrm>
+          <a:prstGeom prst="rect">
+            <a:avLst/>
+          </a:prstGeom>
+          <a:noFill/>
+          <a:ln/>
+        </p:spPr>
+        <p:txBody>
+          <a:bodyPr wrap="square" rtlCol="0" anchor="ctr"/>
+          <a:lstStyle/>
+          <a:p>
+            <a:pPr indent="0" marL="0">
+              <a:buNone/>
+            </a:pPr>
+            <a:r>
+              <a:rPr lang="en-US" sz="1400" i="1" dirty="0">
+                <a:solidFill>
+                  <a:srgbClr val="5A7184"/>
+                </a:solidFill>
+              </a:rPr>
+              <a:t>My approach to learning who is in the room…</a:t>
+            </a:r>
+            <a:endParaRPr lang="en-US" sz="1400" dirty="0"/>
+          </a:p>
+        </p:txBody>
+      </p:sp>
+      <p:sp>
+        <p:nvSpPr>
+          <p:cNvPr id="6" name="Shape 4"/>
+          <p:cNvSpPr/>
+          <p:nvPr/>
+        </p:nvSpPr>
+        <p:spPr>
+          <a:xfrm>
+            <a:off x="548640" y="1508760"/>
+            <a:ext cx="3794760" cy="2651760"/>
+          </a:xfrm>
+          <a:prstGeom prst="rect">
+            <a:avLst/>
+          </a:prstGeom>
+          <a:solidFill>
+            <a:srgbClr val="FFFFFF"/>
+          </a:solidFill>
+          <a:ln/>
+          <a:effectLst>
+            <a:outerShdw sx="100000" sy="100000" kx="0" ky="0" algn="bl" rotWithShape="0" blurRad="101600" dist="38100" dir="8100000">
+              <a:srgbClr val="000000">
+                <a:alpha val="12000"/>
+              </a:srgbClr>
+            </a:outerShdw>
+          </a:effectLst>
+        </p:spPr>
+      </p:sp>
+      <p:sp>
+        <p:nvSpPr>
+          <p:cNvPr id="7" name="Shape 5"/>
+          <p:cNvSpPr/>
+          <p:nvPr/>
+        </p:nvSpPr>
+        <p:spPr>
+          <a:xfrm>
+            <a:off x="548640" y="1508760"/>
+            <a:ext cx="3794760" cy="457200"/>
+          </a:xfrm>
+          <a:prstGeom prst="rect">
+            <a:avLst/>
+          </a:prstGeom>
+          <a:solidFill>
+            <a:srgbClr val="065A82"/>
+          </a:solidFill>
+          <a:ln/>
+        </p:spPr>
+      </p:sp>
+      <p:sp>
+        <p:nvSpPr>
+          <p:cNvPr id="8" name="Text 6"/>
+          <p:cNvSpPr/>
+          <p:nvPr/>
+        </p:nvSpPr>
+        <p:spPr>
+          <a:xfrm>
+            <a:off x="548640" y="1508760"/>
+            <a:ext cx="3794760" cy="457200"/>
+          </a:xfrm>
+          <a:prstGeom prst="rect">
+            <a:avLst/>
+          </a:prstGeom>
+          <a:noFill/>
+          <a:ln/>
+        </p:spPr>
+        <p:txBody>
+          <a:bodyPr wrap="square" rtlCol="0" anchor="ctr"/>
+          <a:lstStyle/>
+          <a:p>
+            <a:pPr algn="ctr" indent="0" marL="0">
+              <a:buNone/>
+            </a:pPr>
+            <a:r>
+              <a:rPr lang="en-US" sz="1400" b="1" dirty="0">
+                <a:solidFill>
+                  <a:srgbClr val="FFFFFF"/>
+                </a:solidFill>
+              </a:rPr>
+              <a:t>DAY ONE</a:t>
+            </a:r>
+            <a:endParaRPr lang="en-US" sz="1400" dirty="0"/>
+          </a:p>
+        </p:txBody>
+      </p:sp>
+      <p:sp>
+        <p:nvSpPr>
+          <p:cNvPr id="9" name="Text 7"/>
+          <p:cNvSpPr/>
+          <p:nvPr/>
+        </p:nvSpPr>
+        <p:spPr>
+          <a:xfrm>
+            <a:off x="777240" y="2103120"/>
+            <a:ext cx="3337560" cy="1920240"/>
+          </a:xfrm>
+          <a:prstGeom prst="rect">
+            <a:avLst/>
+          </a:prstGeom>
+          <a:noFill/>
+          <a:ln/>
+        </p:spPr>
+        <p:txBody>
+          <a:bodyPr wrap="square" rtlCol="0" anchor="ctr"/>
+          <a:lstStyle/>
+          <a:p>
+            <a:pPr marL="342900" indent="-342900">
               <a:buSzPct val="100000"/>
               <a:buChar char="•"/>
             </a:pPr>
             <a:r>
-              <a:rPr lang="en-US" sz="1900" b="1" dirty="0">
+              <a:rPr lang="en-US" sz="1400" dirty="0">
                 <a:solidFill>
                   <a:srgbClr val="1A1A2E"/>
                 </a:solidFill>
               </a:rPr>
-              <a:t>My First Step</a:t>
-            </a:r>
-            <a:endParaRPr lang="en-US" sz="1800" dirty="0"/>
-          </a:p>
-          <a:p>
-            <a:pPr lvl="1" marL="508000" indent="-254000">
+              <a:t>Short diagnostic quiz + survey</a:t>
+            </a:r>
+            <a:endParaRPr lang="en-US" sz="1400" dirty="0"/>
+          </a:p>
+          <a:p>
+            <a:pPr marL="342900" indent="-342900">
               <a:buSzPct val="100000"/>
               <a:buChar char="•"/>
             </a:pPr>
             <a:r>
-              <a:rPr lang="en-US" sz="1600" dirty="0">
+              <a:rPr lang="en-US" sz="1400" dirty="0">
+                <a:solidFill>
+                  <a:srgbClr val="1A1A2E"/>
+                </a:solidFill>
+              </a:rPr>
+              <a:t>“What brought you to CS?”</a:t>
+            </a:r>
+            <a:endParaRPr lang="en-US" sz="1400" dirty="0"/>
+          </a:p>
+          <a:p>
+            <a:pPr indent="0" marL="0">
+              <a:buNone/>
+            </a:pPr>
+            <a:r>
+              <a:rPr lang="en-US" sz="800" dirty="0">
+                <a:solidFill>
+                  <a:srgbClr val="000000"/>
+                </a:solidFill>
+              </a:rPr>
+              <a:t> </a:t>
+            </a:r>
+            <a:endParaRPr lang="en-US" sz="1400" dirty="0"/>
+          </a:p>
+          <a:p>
+            <a:pPr indent="0" marL="0">
+              <a:buNone/>
+            </a:pPr>
+            <a:r>
+              <a:rPr lang="en-US" sz="1200" i="1" dirty="0">
                 <a:solidFill>
                   <a:srgbClr val="5A7184"/>
                 </a:solidFill>
               </a:rPr>
-              <a:t>Short diagnostic quiz + survey in Week 1</a:t>
-            </a:r>
-            <a:endParaRPr lang="en-US" sz="1800" dirty="0"/>
-          </a:p>
-          <a:p>
-            <a:pPr lvl="1" marL="508000" indent="-254000">
+              <a:t>Learn motivations, gaps, and goals before teaching begins</a:t>
+            </a:r>
+            <a:endParaRPr lang="en-US" sz="1400" dirty="0"/>
+          </a:p>
+        </p:txBody>
+      </p:sp>
+      <p:sp>
+        <p:nvSpPr>
+          <p:cNvPr id="10" name="Shape 8"/>
+          <p:cNvSpPr/>
+          <p:nvPr/>
+        </p:nvSpPr>
+        <p:spPr>
+          <a:xfrm>
+            <a:off x="4800600" y="1508760"/>
+            <a:ext cx="3794760" cy="2651760"/>
+          </a:xfrm>
+          <a:prstGeom prst="rect">
+            <a:avLst/>
+          </a:prstGeom>
+          <a:solidFill>
+            <a:srgbClr val="FFFFFF"/>
+          </a:solidFill>
+          <a:ln/>
+          <a:effectLst>
+            <a:outerShdw sx="100000" sy="100000" kx="0" ky="0" algn="bl" rotWithShape="0" blurRad="101600" dist="38100" dir="8100000">
+              <a:srgbClr val="000000">
+                <a:alpha val="12000"/>
+              </a:srgbClr>
+            </a:outerShdw>
+          </a:effectLst>
+        </p:spPr>
+      </p:sp>
+      <p:sp>
+        <p:nvSpPr>
+          <p:cNvPr id="11" name="Shape 9"/>
+          <p:cNvSpPr/>
+          <p:nvPr/>
+        </p:nvSpPr>
+        <p:spPr>
+          <a:xfrm>
+            <a:off x="4800600" y="1508760"/>
+            <a:ext cx="3794760" cy="457200"/>
+          </a:xfrm>
+          <a:prstGeom prst="rect">
+            <a:avLst/>
+          </a:prstGeom>
+          <a:solidFill>
+            <a:srgbClr val="1C7293"/>
+          </a:solidFill>
+          <a:ln/>
+        </p:spPr>
+      </p:sp>
+      <p:sp>
+        <p:nvSpPr>
+          <p:cNvPr id="12" name="Text 10"/>
+          <p:cNvSpPr/>
+          <p:nvPr/>
+        </p:nvSpPr>
+        <p:spPr>
+          <a:xfrm>
+            <a:off x="4800600" y="1508760"/>
+            <a:ext cx="3794760" cy="457200"/>
+          </a:xfrm>
+          <a:prstGeom prst="rect">
+            <a:avLst/>
+          </a:prstGeom>
+          <a:noFill/>
+          <a:ln/>
+        </p:spPr>
+        <p:txBody>
+          <a:bodyPr wrap="square" rtlCol="0" anchor="ctr"/>
+          <a:lstStyle/>
+          <a:p>
+            <a:pPr algn="ctr" indent="0" marL="0">
+              <a:buNone/>
+            </a:pPr>
+            <a:r>
+              <a:rPr lang="en-US" sz="1400" b="1" dirty="0">
+                <a:solidFill>
+                  <a:srgbClr val="FFFFFF"/>
+                </a:solidFill>
+              </a:rPr>
+              <a:t>ONGOING</a:t>
+            </a:r>
+            <a:endParaRPr lang="en-US" sz="1400" dirty="0"/>
+          </a:p>
+        </p:txBody>
+      </p:sp>
+      <p:sp>
+        <p:nvSpPr>
+          <p:cNvPr id="13" name="Text 11"/>
+          <p:cNvSpPr/>
+          <p:nvPr/>
+        </p:nvSpPr>
+        <p:spPr>
+          <a:xfrm>
+            <a:off x="5029200" y="2103120"/>
+            <a:ext cx="3337560" cy="1920240"/>
+          </a:xfrm>
+          <a:prstGeom prst="rect">
+            <a:avLst/>
+          </a:prstGeom>
+          <a:noFill/>
+          <a:ln/>
+        </p:spPr>
+        <p:txBody>
+          <a:bodyPr wrap="square" rtlCol="0" anchor="ctr"/>
+          <a:lstStyle/>
+          <a:p>
+            <a:pPr marL="342900" indent="-342900">
               <a:buSzPct val="100000"/>
               <a:buChar char="•"/>
             </a:pPr>
             <a:r>
-              <a:rPr lang="en-US" sz="1600" dirty="0">
-                <a:solidFill>
-                  <a:srgbClr val="5A7184"/>
-                </a:solidFill>
-              </a:rPr>
-              <a:t>"What brought you to CS?" — learn motivations</a:t>
-            </a:r>
-            <a:endParaRPr lang="en-US" sz="1800" dirty="0"/>
-          </a:p>
-          <a:p>
-            <a:pPr indent="0" marL="0">
-              <a:buNone/>
-            </a:pPr>
-            <a:endParaRPr lang="en-US" sz="1800" dirty="0"/>
-          </a:p>
-          <a:p>
-            <a:pPr marL="190500" indent="-190500">
+              <a:rPr lang="en-US" sz="1400" dirty="0">
+                <a:solidFill>
+                  <a:srgbClr val="1A1A2E"/>
+                </a:solidFill>
+              </a:rPr>
+              <a:t>Weekly exit tickets (2 Qs, anonymous)</a:t>
+            </a:r>
+            <a:endParaRPr lang="en-US" sz="1400" dirty="0"/>
+          </a:p>
+          <a:p>
+            <a:pPr marL="342900" indent="-342900">
               <a:buSzPct val="100000"/>
               <a:buChar char="•"/>
             </a:pPr>
             <a:r>
-              <a:rPr lang="en-US" sz="1900" b="1" dirty="0">
+              <a:rPr lang="en-US" sz="1400" dirty="0">
                 <a:solidFill>
                   <a:srgbClr val="1A1A2E"/>
                 </a:solidFill>
               </a:rPr>
-              <a:t>Ongoing Feedback Loops</a:t>
-            </a:r>
-            <a:endParaRPr lang="en-US" sz="1800" dirty="0"/>
-          </a:p>
-          <a:p>
-            <a:pPr lvl="1" marL="508000" indent="-254000">
+              <a:t>Mid-semester small-group lunches</a:t>
+            </a:r>
+            <a:endParaRPr lang="en-US" sz="1400" dirty="0"/>
+          </a:p>
+          <a:p>
+            <a:pPr marL="342900" indent="-342900">
               <a:buSzPct val="100000"/>
               <a:buChar char="•"/>
             </a:pPr>
             <a:r>
-              <a:rPr lang="en-US" sz="1600" dirty="0">
-                <a:solidFill>
-                  <a:srgbClr val="5A7184"/>
-                </a:solidFill>
-              </a:rPr>
-              <a:t>Weekly exit tickets (2 questions, anonymous)</a:t>
-            </a:r>
-            <a:endParaRPr lang="en-US" sz="1800" dirty="0"/>
-          </a:p>
-          <a:p>
-            <a:pPr lvl="1" marL="508000" indent="-254000">
-              <a:buSzPct val="100000"/>
-              <a:buChar char="•"/>
-            </a:pPr>
-            <a:r>
-              <a:rPr lang="en-US" sz="1600" dirty="0">
-                <a:solidFill>
-                  <a:srgbClr val="5A7184"/>
-                </a:solidFill>
-              </a:rPr>
-              <a:t>Mid-semester small-group lunches</a:t>
-            </a:r>
-            <a:endParaRPr lang="en-US" sz="1800" dirty="0"/>
-          </a:p>
-          <a:p>
-            <a:pPr lvl="1" marL="508000" indent="-254000">
-              <a:buSzPct val="100000"/>
-              <a:buChar char="•"/>
-            </a:pPr>
-            <a:r>
-              <a:rPr lang="en-US" sz="1600" dirty="0">
-                <a:solidFill>
-                  <a:srgbClr val="5A7184"/>
-                </a:solidFill>
-              </a:rPr>
-              <a:t>Open office hours with no agenda required</a:t>
-            </a:r>
-            <a:endParaRPr lang="en-US" sz="1800" dirty="0"/>
-          </a:p>
-          <a:p>
-            <a:pPr indent="0" marL="0">
-              <a:buNone/>
-            </a:pPr>
-            <a:endParaRPr lang="en-US" sz="1800" dirty="0"/>
-          </a:p>
-          <a:p>
-            <a:pPr marL="190500" indent="-190500">
-              <a:buSzPct val="100000"/>
-              <a:buChar char="•"/>
-            </a:pPr>
-            <a:r>
-              <a:rPr lang="en-US" sz="1900" b="1" dirty="0">
+              <a:rPr lang="en-US" sz="1400" dirty="0">
                 <a:solidFill>
                   <a:srgbClr val="1A1A2E"/>
                 </a:solidFill>
               </a:rPr>
-              <a:t>Adapting in Real Time</a:t>
-            </a:r>
-            <a:endParaRPr lang="en-US" sz="1800" dirty="0"/>
-          </a:p>
-          <a:p>
-            <a:pPr lvl="1" marL="508000" indent="-254000">
-              <a:buSzPct val="100000"/>
-              <a:buChar char="•"/>
-            </a:pPr>
-            <a:r>
-              <a:rPr lang="en-US" sz="1600" dirty="0">
-                <a:solidFill>
-                  <a:srgbClr val="5A7184"/>
-                </a:solidFill>
-              </a:rPr>
-              <a:t>Adjust pacing if &gt; 30 % struggle on a concept</a:t>
-            </a:r>
-            <a:endParaRPr lang="en-US" sz="1800" dirty="0"/>
-          </a:p>
-          <a:p>
-            <a:pPr lvl="1" marL="508000" indent="-254000">
-              <a:buSzPct val="100000"/>
-              <a:buChar char="•"/>
-            </a:pPr>
-            <a:r>
-              <a:rPr lang="en-US" sz="1600" dirty="0">
-                <a:solidFill>
-                  <a:srgbClr val="5A7184"/>
-                </a:solidFill>
-              </a:rPr>
-              <a:t>Offer optional deep-dive sessions for advanced students</a:t>
-            </a:r>
-            <a:endParaRPr lang="en-US" sz="1800" dirty="0"/>
-          </a:p>
-        </p:txBody>
-      </p:sp>
-      <p:sp>
-        <p:nvSpPr>
-          <p:cNvPr id="5" name="Text 3"/>
-          <p:cNvSpPr/>
-          <p:nvPr/>
-        </p:nvSpPr>
-        <p:spPr>
-          <a:xfrm>
-            <a:off x="8046720" y="4709160"/>
-            <a:ext cx="914400" cy="320040"/>
+              <a:t>Open office hours — no agenda required</a:t>
+            </a:r>
+            <a:endParaRPr lang="en-US" sz="1400" dirty="0"/>
+          </a:p>
+          <a:p>
+            <a:pPr indent="0" marL="0">
+              <a:buNone/>
+            </a:pPr>
+            <a:r>
+              <a:rPr lang="en-US" sz="800" dirty="0">
+                <a:solidFill>
+                  <a:srgbClr val="000000"/>
+                </a:solidFill>
+              </a:rPr>
+              <a:t> </a:t>
+            </a:r>
+            <a:endParaRPr lang="en-US" sz="1400" dirty="0"/>
+          </a:p>
+          <a:p>
+            <a:pPr indent="0" marL="0">
+              <a:buNone/>
+            </a:pPr>
+            <a:r>
+              <a:rPr lang="en-US" sz="1200" i="1" dirty="0">
+                <a:solidFill>
+                  <a:srgbClr val="FF6B35"/>
+                </a:solidFill>
+              </a:rPr>
+              <a:t>Adjust pacing if &gt; 30% struggle on a concept</a:t>
+            </a:r>
+            <a:endParaRPr lang="en-US" sz="1400" dirty="0"/>
+          </a:p>
+        </p:txBody>
+      </p:sp>
+      <p:sp>
+        <p:nvSpPr>
+          <p:cNvPr id="14" name="Shape 12"/>
+          <p:cNvSpPr/>
+          <p:nvPr/>
+        </p:nvSpPr>
+        <p:spPr>
+          <a:xfrm>
+            <a:off x="548640" y="4297680"/>
+            <a:ext cx="8046720" cy="365760"/>
+          </a:xfrm>
+          <a:prstGeom prst="rect">
+            <a:avLst/>
+          </a:prstGeom>
+          <a:solidFill>
+            <a:srgbClr val="0B1D3A"/>
+          </a:solidFill>
+          <a:ln/>
+        </p:spPr>
+      </p:sp>
+      <p:sp>
+        <p:nvSpPr>
+          <p:cNvPr id="15" name="Text 13"/>
+          <p:cNvSpPr/>
+          <p:nvPr/>
+        </p:nvSpPr>
+        <p:spPr>
+          <a:xfrm>
+            <a:off x="731520" y="4297680"/>
+            <a:ext cx="7680960" cy="365760"/>
           </a:xfrm>
           <a:prstGeom prst="rect">
             <a:avLst/>
@@ -5939,54 +7213,18 @@
           <a:bodyPr wrap="square" rtlCol="0" anchor="ctr"/>
           <a:lstStyle/>
           <a:p>
-            <a:pPr algn="r" indent="0" marL="0">
-              <a:buNone/>
-            </a:pPr>
-            <a:r>
-              <a:rPr lang="en-US" sz="1000" dirty="0">
-                <a:solidFill>
-                  <a:srgbClr val="5A7184"/>
-                </a:solidFill>
-              </a:rPr>
-              <a:t>8 / 12</a:t>
-            </a:r>
-            <a:endParaRPr lang="en-US" sz="1000" dirty="0"/>
-          </a:p>
-        </p:txBody>
-      </p:sp>
-      <p:sp>
-        <p:nvSpPr>
-          <p:cNvPr id="6" name="Text 4"/>
-          <p:cNvSpPr/>
-          <p:nvPr/>
-        </p:nvSpPr>
-        <p:spPr>
-          <a:xfrm>
-            <a:off x="457200" y="4709160"/>
-            <a:ext cx="3657600" cy="320040"/>
-          </a:xfrm>
-          <a:prstGeom prst="rect">
-            <a:avLst/>
-          </a:prstGeom>
-          <a:noFill/>
-          <a:ln/>
-        </p:spPr>
-        <p:txBody>
-          <a:bodyPr wrap="square" rtlCol="0" anchor="ctr"/>
-          <a:lstStyle/>
-          <a:p>
-            <a:pPr indent="0" marL="0">
-              <a:buNone/>
-            </a:pPr>
-            <a:r>
-              <a:rPr lang="en-US" sz="1000" i="1" dirty="0">
-                <a:solidFill>
-                  <a:srgbClr val="5A7184"/>
-                </a:solidFill>
-              </a:rPr>
-              <a:t>Jiarui Zhang — Faculty Introduction</a:t>
-            </a:r>
-            <a:endParaRPr lang="en-US" sz="1000" dirty="0"/>
+            <a:pPr indent="0" marL="0">
+              <a:buNone/>
+            </a:pPr>
+            <a:r>
+              <a:rPr lang="en-US" sz="1400" b="1" dirty="0">
+                <a:solidFill>
+                  <a:srgbClr val="21D19F"/>
+                </a:solidFill>
+              </a:rPr>
+              <a:t>Students notice when teachers actually adapt.</a:t>
+            </a:r>
+            <a:endParaRPr lang="en-US" sz="1400" dirty="0"/>
           </a:p>
         </p:txBody>
       </p:sp>
@@ -6030,24 +7268,24 @@
         </p:nvSpPr>
         <p:spPr>
           <a:xfrm>
-            <a:off x="548640" y="256032"/>
-            <a:ext cx="8046720" cy="566928"/>
-          </a:xfrm>
-          <a:prstGeom prst="rect">
-            <a:avLst/>
-          </a:prstGeom>
-          <a:noFill/>
-          <a:ln/>
-        </p:spPr>
-        <p:txBody>
-          <a:bodyPr wrap="square" rtlCol="0" anchor="ctr"/>
-          <a:lstStyle/>
-          <a:p>
-            <a:pPr indent="0" marL="0">
-              <a:buNone/>
-            </a:pPr>
-            <a:r>
-              <a:rPr lang="en-US" sz="2800" b="1" dirty="0">
+            <a:off x="548640" y="274320"/>
+            <a:ext cx="8046720" cy="594360"/>
+          </a:xfrm>
+          <a:prstGeom prst="rect">
+            <a:avLst/>
+          </a:prstGeom>
+          <a:noFill/>
+          <a:ln/>
+        </p:spPr>
+        <p:txBody>
+          <a:bodyPr wrap="square" lIns="0" tIns="0" rIns="0" bIns="0" rtlCol="0" anchor="ctr"/>
+          <a:lstStyle/>
+          <a:p>
+            <a:pPr indent="0" marL="0">
+              <a:buNone/>
+            </a:pPr>
+            <a:r>
+              <a:rPr lang="en-US" sz="3000" b="1" dirty="0">
                 <a:solidFill>
                   <a:srgbClr val="0B1D3A"/>
                 </a:solidFill>
@@ -6055,543 +7293,15 @@
                 <a:ea typeface="Georgia" pitchFamily="34" charset="-122"/>
                 <a:cs typeface="Georgia" pitchFamily="34" charset="-120"/>
               </a:rPr>
-              <a:t>How I Work — Framework &amp; Collaboration</a:t>
-            </a:r>
-            <a:endParaRPr lang="en-US" sz="2800" dirty="0"/>
-          </a:p>
-        </p:txBody>
-      </p:sp>
-      <p:sp>
-        <p:nvSpPr>
-          <p:cNvPr id="3" name="Shape 1"/>
-          <p:cNvSpPr/>
-          <p:nvPr/>
-        </p:nvSpPr>
-        <p:spPr>
-          <a:xfrm>
-            <a:off x="548640" y="822960"/>
-            <a:ext cx="8046720" cy="27432"/>
-          </a:xfrm>
-          <a:prstGeom prst="rect">
-            <a:avLst/>
-          </a:prstGeom>
-          <a:solidFill>
-            <a:srgbClr val="1C7293"/>
-          </a:solidFill>
-          <a:ln/>
-        </p:spPr>
-      </p:sp>
-      <p:sp>
-        <p:nvSpPr>
-          <p:cNvPr id="4" name="Shape 2"/>
-          <p:cNvSpPr/>
-          <p:nvPr/>
-        </p:nvSpPr>
-        <p:spPr>
-          <a:xfrm>
-            <a:off x="365760" y="1005840"/>
-            <a:ext cx="3931920" cy="1737360"/>
-          </a:xfrm>
-          <a:prstGeom prst="roundRect">
-            <a:avLst>
-              <a:gd name="adj" fmla="val 5263"/>
-            </a:avLst>
-          </a:prstGeom>
-          <a:solidFill>
-            <a:srgbClr val="065A82"/>
-          </a:solidFill>
-          <a:ln w="12700">
-            <a:solidFill>
-              <a:srgbClr val="065A82"/>
-            </a:solidFill>
-            <a:prstDash val="solid"/>
-          </a:ln>
-        </p:spPr>
-      </p:sp>
-      <p:sp>
-        <p:nvSpPr>
-          <p:cNvPr id="5" name="Text 3"/>
-          <p:cNvSpPr/>
-          <p:nvPr/>
-        </p:nvSpPr>
-        <p:spPr>
-          <a:xfrm>
-            <a:off x="502920" y="1097280"/>
-            <a:ext cx="3657600" cy="411480"/>
-          </a:xfrm>
-          <a:prstGeom prst="rect">
-            <a:avLst/>
-          </a:prstGeom>
-          <a:noFill/>
-          <a:ln/>
-        </p:spPr>
-        <p:txBody>
-          <a:bodyPr wrap="square" rtlCol="0" anchor="ctr"/>
-          <a:lstStyle/>
-          <a:p>
-            <a:pPr indent="0" marL="0">
-              <a:buNone/>
-            </a:pPr>
-            <a:r>
-              <a:rPr lang="en-US" sz="1600" b="1" dirty="0">
-                <a:solidFill>
-                  <a:srgbClr val="FFFFFF"/>
-                </a:solidFill>
-              </a:rPr>
-              <a:t>Preparation</a:t>
-            </a:r>
-            <a:endParaRPr lang="en-US" sz="1600" dirty="0"/>
-          </a:p>
-        </p:txBody>
-      </p:sp>
-      <p:sp>
-        <p:nvSpPr>
-          <p:cNvPr id="6" name="Text 4"/>
-          <p:cNvSpPr/>
-          <p:nvPr/>
-        </p:nvSpPr>
-        <p:spPr>
-          <a:xfrm>
-            <a:off x="502920" y="1508760"/>
-            <a:ext cx="3657600" cy="1143000"/>
-          </a:xfrm>
-          <a:prstGeom prst="rect">
-            <a:avLst/>
-          </a:prstGeom>
-          <a:noFill/>
-          <a:ln/>
-        </p:spPr>
-        <p:txBody>
-          <a:bodyPr wrap="square" rtlCol="0" anchor="ctr"/>
-          <a:lstStyle/>
-          <a:p>
-            <a:pPr indent="0" marL="0">
-              <a:buNone/>
-            </a:pPr>
-            <a:r>
-              <a:rPr lang="en-US" sz="1300" dirty="0">
-                <a:solidFill>
-                  <a:srgbClr val="EAF4F8"/>
-                </a:solidFill>
-              </a:rPr>
-              <a:t>Lecture notes, code demos</a:t>
-            </a:r>
-            <a:endParaRPr lang="en-US" sz="1300" dirty="0"/>
-          </a:p>
-          <a:p>
-            <a:pPr indent="0" marL="0">
-              <a:buNone/>
-            </a:pPr>
-            <a:r>
-              <a:rPr lang="en-US" sz="1300" dirty="0">
-                <a:solidFill>
-                  <a:srgbClr val="EAF4F8"/>
-                </a:solidFill>
-              </a:rPr>
-              <a:t>and problem sets ready</a:t>
-            </a:r>
-            <a:endParaRPr lang="en-US" sz="1300" dirty="0"/>
-          </a:p>
-          <a:p>
-            <a:pPr indent="0" marL="0">
-              <a:buNone/>
-            </a:pPr>
-            <a:r>
-              <a:rPr lang="en-US" sz="1300" dirty="0">
-                <a:solidFill>
-                  <a:srgbClr val="EAF4F8"/>
-                </a:solidFill>
-              </a:rPr>
-              <a:t>2 weeks in advance</a:t>
-            </a:r>
-            <a:endParaRPr lang="en-US" sz="1300" dirty="0"/>
-          </a:p>
-        </p:txBody>
-      </p:sp>
-      <p:sp>
-        <p:nvSpPr>
-          <p:cNvPr id="7" name="Shape 5"/>
-          <p:cNvSpPr/>
-          <p:nvPr/>
-        </p:nvSpPr>
-        <p:spPr>
-          <a:xfrm>
-            <a:off x="4572000" y="1005840"/>
-            <a:ext cx="3931920" cy="1737360"/>
-          </a:xfrm>
-          <a:prstGeom prst="roundRect">
-            <a:avLst>
-              <a:gd name="adj" fmla="val 5263"/>
-            </a:avLst>
-          </a:prstGeom>
-          <a:solidFill>
-            <a:srgbClr val="1C7293"/>
-          </a:solidFill>
-          <a:ln w="12700">
-            <a:solidFill>
-              <a:srgbClr val="1C7293"/>
-            </a:solidFill>
-            <a:prstDash val="solid"/>
-          </a:ln>
-        </p:spPr>
-      </p:sp>
-      <p:sp>
-        <p:nvSpPr>
-          <p:cNvPr id="8" name="Text 6"/>
-          <p:cNvSpPr/>
-          <p:nvPr/>
-        </p:nvSpPr>
-        <p:spPr>
-          <a:xfrm>
-            <a:off x="4709160" y="1097280"/>
-            <a:ext cx="3657600" cy="411480"/>
-          </a:xfrm>
-          <a:prstGeom prst="rect">
-            <a:avLst/>
-          </a:prstGeom>
-          <a:noFill/>
-          <a:ln/>
-        </p:spPr>
-        <p:txBody>
-          <a:bodyPr wrap="square" rtlCol="0" anchor="ctr"/>
-          <a:lstStyle/>
-          <a:p>
-            <a:pPr indent="0" marL="0">
-              <a:buNone/>
-            </a:pPr>
-            <a:r>
-              <a:rPr lang="en-US" sz="1600" b="1" dirty="0">
-                <a:solidFill>
-                  <a:srgbClr val="FFFFFF"/>
-                </a:solidFill>
-              </a:rPr>
-              <a:t>Engagement</a:t>
-            </a:r>
-            <a:endParaRPr lang="en-US" sz="1600" dirty="0"/>
-          </a:p>
-        </p:txBody>
-      </p:sp>
-      <p:sp>
-        <p:nvSpPr>
-          <p:cNvPr id="9" name="Text 7"/>
-          <p:cNvSpPr/>
-          <p:nvPr/>
-        </p:nvSpPr>
-        <p:spPr>
-          <a:xfrm>
-            <a:off x="4709160" y="1508760"/>
-            <a:ext cx="3657600" cy="1143000"/>
-          </a:xfrm>
-          <a:prstGeom prst="rect">
-            <a:avLst/>
-          </a:prstGeom>
-          <a:noFill/>
-          <a:ln/>
-        </p:spPr>
-        <p:txBody>
-          <a:bodyPr wrap="square" rtlCol="0" anchor="ctr"/>
-          <a:lstStyle/>
-          <a:p>
-            <a:pPr indent="0" marL="0">
-              <a:buNone/>
-            </a:pPr>
-            <a:r>
-              <a:rPr lang="en-US" sz="1300" dirty="0">
-                <a:solidFill>
-                  <a:srgbClr val="EAF4F8"/>
-                </a:solidFill>
-              </a:rPr>
-              <a:t>Active recall, pair</a:t>
-            </a:r>
-            <a:endParaRPr lang="en-US" sz="1300" dirty="0"/>
-          </a:p>
-          <a:p>
-            <a:pPr indent="0" marL="0">
-              <a:buNone/>
-            </a:pPr>
-            <a:r>
-              <a:rPr lang="en-US" sz="1300" dirty="0">
-                <a:solidFill>
-                  <a:srgbClr val="EAF4F8"/>
-                </a:solidFill>
-              </a:rPr>
-              <a:t>programming in class,</a:t>
-            </a:r>
-            <a:endParaRPr lang="en-US" sz="1300" dirty="0"/>
-          </a:p>
-          <a:p>
-            <a:pPr indent="0" marL="0">
-              <a:buNone/>
-            </a:pPr>
-            <a:r>
-              <a:rPr lang="en-US" sz="1300" dirty="0">
-                <a:solidFill>
-                  <a:srgbClr val="EAF4F8"/>
-                </a:solidFill>
-              </a:rPr>
-              <a:t>no passive slides-only lectures</a:t>
-            </a:r>
-            <a:endParaRPr lang="en-US" sz="1300" dirty="0"/>
-          </a:p>
-        </p:txBody>
-      </p:sp>
-      <p:sp>
-        <p:nvSpPr>
-          <p:cNvPr id="10" name="Shape 8"/>
-          <p:cNvSpPr/>
-          <p:nvPr/>
-        </p:nvSpPr>
-        <p:spPr>
-          <a:xfrm>
-            <a:off x="365760" y="2880360"/>
-            <a:ext cx="3931920" cy="1737360"/>
-          </a:xfrm>
-          <a:prstGeom prst="roundRect">
-            <a:avLst>
-              <a:gd name="adj" fmla="val 5263"/>
-            </a:avLst>
-          </a:prstGeom>
-          <a:solidFill>
-            <a:srgbClr val="FF6B35"/>
-          </a:solidFill>
-          <a:ln w="12700">
-            <a:solidFill>
-              <a:srgbClr val="FF6B35"/>
-            </a:solidFill>
-            <a:prstDash val="solid"/>
-          </a:ln>
-        </p:spPr>
-      </p:sp>
-      <p:sp>
-        <p:nvSpPr>
-          <p:cNvPr id="11" name="Text 9"/>
-          <p:cNvSpPr/>
-          <p:nvPr/>
-        </p:nvSpPr>
-        <p:spPr>
-          <a:xfrm>
-            <a:off x="502920" y="2971800"/>
-            <a:ext cx="3657600" cy="411480"/>
-          </a:xfrm>
-          <a:prstGeom prst="rect">
-            <a:avLst/>
-          </a:prstGeom>
-          <a:noFill/>
-          <a:ln/>
-        </p:spPr>
-        <p:txBody>
-          <a:bodyPr wrap="square" rtlCol="0" anchor="ctr"/>
-          <a:lstStyle/>
-          <a:p>
-            <a:pPr indent="0" marL="0">
-              <a:buNone/>
-            </a:pPr>
-            <a:r>
-              <a:rPr lang="en-US" sz="1600" b="1" dirty="0">
-                <a:solidFill>
-                  <a:srgbClr val="FFFFFF"/>
-                </a:solidFill>
-              </a:rPr>
-              <a:t>Mentorship</a:t>
-            </a:r>
-            <a:endParaRPr lang="en-US" sz="1600" dirty="0"/>
-          </a:p>
-        </p:txBody>
-      </p:sp>
-      <p:sp>
-        <p:nvSpPr>
-          <p:cNvPr id="12" name="Text 10"/>
-          <p:cNvSpPr/>
-          <p:nvPr/>
-        </p:nvSpPr>
-        <p:spPr>
-          <a:xfrm>
-            <a:off x="502920" y="3383280"/>
-            <a:ext cx="3657600" cy="1143000"/>
-          </a:xfrm>
-          <a:prstGeom prst="rect">
-            <a:avLst/>
-          </a:prstGeom>
-          <a:noFill/>
-          <a:ln/>
-        </p:spPr>
-        <p:txBody>
-          <a:bodyPr wrap="square" rtlCol="0" anchor="ctr"/>
-          <a:lstStyle/>
-          <a:p>
-            <a:pPr indent="0" marL="0">
-              <a:buNone/>
-            </a:pPr>
-            <a:r>
-              <a:rPr lang="en-US" sz="1300" dirty="0">
-                <a:solidFill>
-                  <a:srgbClr val="EAF4F8"/>
-                </a:solidFill>
-              </a:rPr>
-              <a:t>1-on-1 check-ins;</a:t>
-            </a:r>
-            <a:endParaRPr lang="en-US" sz="1300" dirty="0"/>
-          </a:p>
-          <a:p>
-            <a:pPr indent="0" marL="0">
-              <a:buNone/>
-            </a:pPr>
-            <a:r>
-              <a:rPr lang="en-US" sz="1300" dirty="0">
-                <a:solidFill>
-                  <a:srgbClr val="EAF4F8"/>
-                </a:solidFill>
-              </a:rPr>
-              <a:t>clear research pathways</a:t>
-            </a:r>
-            <a:endParaRPr lang="en-US" sz="1300" dirty="0"/>
-          </a:p>
-          <a:p>
-            <a:pPr indent="0" marL="0">
-              <a:buNone/>
-            </a:pPr>
-            <a:r>
-              <a:rPr lang="en-US" sz="1300" dirty="0">
-                <a:solidFill>
-                  <a:srgbClr val="EAF4F8"/>
-                </a:solidFill>
-              </a:rPr>
-              <a:t>for interested students</a:t>
-            </a:r>
-            <a:endParaRPr lang="en-US" sz="1300" dirty="0"/>
-          </a:p>
-        </p:txBody>
-      </p:sp>
-      <p:sp>
-        <p:nvSpPr>
-          <p:cNvPr id="13" name="Shape 11"/>
-          <p:cNvSpPr/>
-          <p:nvPr/>
-        </p:nvSpPr>
-        <p:spPr>
-          <a:xfrm>
-            <a:off x="4572000" y="2880360"/>
-            <a:ext cx="3931920" cy="1737360"/>
-          </a:xfrm>
-          <a:prstGeom prst="roundRect">
-            <a:avLst>
-              <a:gd name="adj" fmla="val 5263"/>
-            </a:avLst>
-          </a:prstGeom>
-          <a:solidFill>
-            <a:srgbClr val="0B1D3A"/>
-          </a:solidFill>
-          <a:ln w="12700">
-            <a:solidFill>
-              <a:srgbClr val="0B1D3A"/>
-            </a:solidFill>
-            <a:prstDash val="solid"/>
-          </a:ln>
-        </p:spPr>
-      </p:sp>
-      <p:sp>
-        <p:nvSpPr>
-          <p:cNvPr id="14" name="Text 12"/>
-          <p:cNvSpPr/>
-          <p:nvPr/>
-        </p:nvSpPr>
-        <p:spPr>
-          <a:xfrm>
-            <a:off x="4709160" y="2971800"/>
-            <a:ext cx="3657600" cy="411480"/>
-          </a:xfrm>
-          <a:prstGeom prst="rect">
-            <a:avLst/>
-          </a:prstGeom>
-          <a:noFill/>
-          <a:ln/>
-        </p:spPr>
-        <p:txBody>
-          <a:bodyPr wrap="square" rtlCol="0" anchor="ctr"/>
-          <a:lstStyle/>
-          <a:p>
-            <a:pPr indent="0" marL="0">
-              <a:buNone/>
-            </a:pPr>
-            <a:r>
-              <a:rPr lang="en-US" sz="1600" b="1" dirty="0">
-                <a:solidFill>
-                  <a:srgbClr val="FFFFFF"/>
-                </a:solidFill>
-              </a:rPr>
-              <a:t>Collaboration</a:t>
-            </a:r>
-            <a:endParaRPr lang="en-US" sz="1600" dirty="0"/>
-          </a:p>
-        </p:txBody>
-      </p:sp>
-      <p:sp>
-        <p:nvSpPr>
-          <p:cNvPr id="15" name="Text 13"/>
-          <p:cNvSpPr/>
-          <p:nvPr/>
-        </p:nvSpPr>
-        <p:spPr>
-          <a:xfrm>
-            <a:off x="4709160" y="3383280"/>
-            <a:ext cx="3657600" cy="1143000"/>
-          </a:xfrm>
-          <a:prstGeom prst="rect">
-            <a:avLst/>
-          </a:prstGeom>
-          <a:noFill/>
-          <a:ln/>
-        </p:spPr>
-        <p:txBody>
-          <a:bodyPr wrap="square" rtlCol="0" anchor="ctr"/>
-          <a:lstStyle/>
-          <a:p>
-            <a:pPr indent="0" marL="0">
-              <a:buNone/>
-            </a:pPr>
-            <a:r>
-              <a:rPr lang="en-US" sz="1300" dirty="0">
-                <a:solidFill>
-                  <a:srgbClr val="EAF4F8"/>
-                </a:solidFill>
-              </a:rPr>
-              <a:t>Cross-disciplinary projects;</a:t>
-            </a:r>
-            <a:endParaRPr lang="en-US" sz="1300" dirty="0"/>
-          </a:p>
-          <a:p>
-            <a:pPr indent="0" marL="0">
-              <a:buNone/>
-            </a:pPr>
-            <a:r>
-              <a:rPr lang="en-US" sz="1300" dirty="0">
-                <a:solidFill>
-                  <a:srgbClr val="EAF4F8"/>
-                </a:solidFill>
-              </a:rPr>
-              <a:t>connect students with</a:t>
-            </a:r>
-            <a:endParaRPr lang="en-US" sz="1300" dirty="0"/>
-          </a:p>
-          <a:p>
-            <a:pPr indent="0" marL="0">
-              <a:buNone/>
-            </a:pPr>
-            <a:r>
-              <a:rPr lang="en-US" sz="1300" dirty="0">
-                <a:solidFill>
-                  <a:srgbClr val="EAF4F8"/>
-                </a:solidFill>
-              </a:rPr>
-              <a:t>industry partners</a:t>
-            </a:r>
-            <a:endParaRPr lang="en-US" sz="1300" dirty="0"/>
-          </a:p>
-        </p:txBody>
-      </p:sp>
-      <p:sp>
-        <p:nvSpPr>
-          <p:cNvPr id="16" name="Text 14"/>
+              <a:t>How I Work — My Framework</a:t>
+            </a:r>
+            <a:endParaRPr lang="en-US" sz="3000" dirty="0"/>
+          </a:p>
+        </p:txBody>
+      </p:sp>
+      <p:sp>
+        <p:nvSpPr>
+          <p:cNvPr id="3" name="Text 1"/>
           <p:cNvSpPr/>
           <p:nvPr/>
         </p:nvSpPr>
@@ -6627,14 +7337,14 @@
       </p:sp>
       <p:sp>
         <p:nvSpPr>
-          <p:cNvPr id="17" name="Text 15"/>
+          <p:cNvPr id="4" name="Text 2"/>
           <p:cNvSpPr/>
           <p:nvPr/>
         </p:nvSpPr>
         <p:spPr>
           <a:xfrm>
             <a:off x="457200" y="4709160"/>
-            <a:ext cx="3657600" cy="320040"/>
+            <a:ext cx="2743200" cy="320040"/>
           </a:xfrm>
           <a:prstGeom prst="rect">
             <a:avLst/>
@@ -6655,9 +7365,553 @@
                   <a:srgbClr val="5A7184"/>
                 </a:solidFill>
               </a:rPr>
-              <a:t>Jiarui Zhang — Faculty Introduction</a:t>
+              <a:t>Faculty Introduction</a:t>
             </a:r>
             <a:endParaRPr lang="en-US" sz="1000" dirty="0"/>
+          </a:p>
+        </p:txBody>
+      </p:sp>
+      <p:sp>
+        <p:nvSpPr>
+          <p:cNvPr id="5" name="Shape 3"/>
+          <p:cNvSpPr/>
+          <p:nvPr/>
+        </p:nvSpPr>
+        <p:spPr>
+          <a:xfrm>
+            <a:off x="548640" y="1005840"/>
+            <a:ext cx="8046720" cy="777240"/>
+          </a:xfrm>
+          <a:prstGeom prst="rect">
+            <a:avLst/>
+          </a:prstGeom>
+          <a:solidFill>
+            <a:srgbClr val="FFFFFF"/>
+          </a:solidFill>
+          <a:ln/>
+          <a:effectLst>
+            <a:outerShdw sx="100000" sy="100000" kx="0" ky="0" algn="bl" rotWithShape="0" blurRad="101600" dist="38100" dir="8100000">
+              <a:srgbClr val="000000">
+                <a:alpha val="12000"/>
+              </a:srgbClr>
+            </a:outerShdw>
+          </a:effectLst>
+        </p:spPr>
+      </p:sp>
+      <p:sp>
+        <p:nvSpPr>
+          <p:cNvPr id="6" name="Shape 4"/>
+          <p:cNvSpPr/>
+          <p:nvPr/>
+        </p:nvSpPr>
+        <p:spPr>
+          <a:xfrm>
+            <a:off x="777240" y="1051560"/>
+            <a:ext cx="658368" cy="658368"/>
+          </a:xfrm>
+          <a:prstGeom prst="ellipse">
+            <a:avLst/>
+          </a:prstGeom>
+          <a:solidFill>
+            <a:srgbClr val="065A82"/>
+          </a:solidFill>
+          <a:ln/>
+        </p:spPr>
+      </p:sp>
+      <p:sp>
+        <p:nvSpPr>
+          <p:cNvPr id="7" name="Text 5"/>
+          <p:cNvSpPr/>
+          <p:nvPr/>
+        </p:nvSpPr>
+        <p:spPr>
+          <a:xfrm>
+            <a:off x="777240" y="1051560"/>
+            <a:ext cx="658368" cy="658368"/>
+          </a:xfrm>
+          <a:prstGeom prst="rect">
+            <a:avLst/>
+          </a:prstGeom>
+          <a:noFill/>
+          <a:ln/>
+        </p:spPr>
+        <p:txBody>
+          <a:bodyPr wrap="square" rtlCol="0" anchor="ctr"/>
+          <a:lstStyle/>
+          <a:p>
+            <a:pPr algn="ctr" indent="0" marL="0">
+              <a:buNone/>
+            </a:pPr>
+            <a:r>
+              <a:rPr lang="en-US" sz="2000" b="1" dirty="0">
+                <a:solidFill>
+                  <a:srgbClr val="FFFFFF"/>
+                </a:solidFill>
+                <a:latin typeface="Georgia" pitchFamily="34" charset="0"/>
+                <a:ea typeface="Georgia" pitchFamily="34" charset="-122"/>
+                <a:cs typeface="Georgia" pitchFamily="34" charset="-120"/>
+              </a:rPr>
+              <a:t>P</a:t>
+            </a:r>
+            <a:endParaRPr lang="en-US" sz="2000" dirty="0"/>
+          </a:p>
+        </p:txBody>
+      </p:sp>
+      <p:sp>
+        <p:nvSpPr>
+          <p:cNvPr id="8" name="Text 6"/>
+          <p:cNvSpPr/>
+          <p:nvPr/>
+        </p:nvSpPr>
+        <p:spPr>
+          <a:xfrm>
+            <a:off x="1645920" y="1042416"/>
+            <a:ext cx="6766560" cy="704088"/>
+          </a:xfrm>
+          <a:prstGeom prst="rect">
+            <a:avLst/>
+          </a:prstGeom>
+          <a:noFill/>
+          <a:ln/>
+        </p:spPr>
+        <p:txBody>
+          <a:bodyPr wrap="square" rtlCol="0" anchor="ctr"/>
+          <a:lstStyle/>
+          <a:p>
+            <a:pPr indent="0" marL="0">
+              <a:buNone/>
+            </a:pPr>
+            <a:r>
+              <a:rPr lang="en-US" sz="1700" b="1" dirty="0">
+                <a:solidFill>
+                  <a:srgbClr val="0B1D3A"/>
+                </a:solidFill>
+              </a:rPr>
+              <a:t>Preparation</a:t>
+            </a:r>
+            <a:endParaRPr lang="en-US" sz="1700" dirty="0"/>
+          </a:p>
+          <a:p>
+            <a:pPr indent="0" marL="0">
+              <a:buNone/>
+            </a:pPr>
+            <a:r>
+              <a:rPr lang="en-US" sz="1300" dirty="0">
+                <a:solidFill>
+                  <a:srgbClr val="5A7184"/>
+                </a:solidFill>
+              </a:rPr>
+              <a:t>Lecture notes, code demos, and problem sets ready two weeks in advance. No improvising core material.</a:t>
+            </a:r>
+            <a:endParaRPr lang="en-US" sz="1700" dirty="0"/>
+          </a:p>
+        </p:txBody>
+      </p:sp>
+      <p:sp>
+        <p:nvSpPr>
+          <p:cNvPr id="9" name="Shape 7"/>
+          <p:cNvSpPr/>
+          <p:nvPr/>
+        </p:nvSpPr>
+        <p:spPr>
+          <a:xfrm>
+            <a:off x="548640" y="1892808"/>
+            <a:ext cx="8046720" cy="777240"/>
+          </a:xfrm>
+          <a:prstGeom prst="rect">
+            <a:avLst/>
+          </a:prstGeom>
+          <a:solidFill>
+            <a:srgbClr val="FFFFFF"/>
+          </a:solidFill>
+          <a:ln/>
+          <a:effectLst>
+            <a:outerShdw sx="100000" sy="100000" kx="0" ky="0" algn="bl" rotWithShape="0" blurRad="101600" dist="38100" dir="8100000">
+              <a:srgbClr val="000000">
+                <a:alpha val="12000"/>
+              </a:srgbClr>
+            </a:outerShdw>
+          </a:effectLst>
+        </p:spPr>
+      </p:sp>
+      <p:sp>
+        <p:nvSpPr>
+          <p:cNvPr id="10" name="Shape 8"/>
+          <p:cNvSpPr/>
+          <p:nvPr/>
+        </p:nvSpPr>
+        <p:spPr>
+          <a:xfrm>
+            <a:off x="777240" y="1938528"/>
+            <a:ext cx="658368" cy="658368"/>
+          </a:xfrm>
+          <a:prstGeom prst="ellipse">
+            <a:avLst/>
+          </a:prstGeom>
+          <a:solidFill>
+            <a:srgbClr val="1C7293"/>
+          </a:solidFill>
+          <a:ln/>
+        </p:spPr>
+      </p:sp>
+      <p:sp>
+        <p:nvSpPr>
+          <p:cNvPr id="11" name="Text 9"/>
+          <p:cNvSpPr/>
+          <p:nvPr/>
+        </p:nvSpPr>
+        <p:spPr>
+          <a:xfrm>
+            <a:off x="777240" y="1938528"/>
+            <a:ext cx="658368" cy="658368"/>
+          </a:xfrm>
+          <a:prstGeom prst="rect">
+            <a:avLst/>
+          </a:prstGeom>
+          <a:noFill/>
+          <a:ln/>
+        </p:spPr>
+        <p:txBody>
+          <a:bodyPr wrap="square" rtlCol="0" anchor="ctr"/>
+          <a:lstStyle/>
+          <a:p>
+            <a:pPr algn="ctr" indent="0" marL="0">
+              <a:buNone/>
+            </a:pPr>
+            <a:r>
+              <a:rPr lang="en-US" sz="2000" b="1" dirty="0">
+                <a:solidFill>
+                  <a:srgbClr val="FFFFFF"/>
+                </a:solidFill>
+                <a:latin typeface="Georgia" pitchFamily="34" charset="0"/>
+                <a:ea typeface="Georgia" pitchFamily="34" charset="-122"/>
+                <a:cs typeface="Georgia" pitchFamily="34" charset="-120"/>
+              </a:rPr>
+              <a:t>E</a:t>
+            </a:r>
+            <a:endParaRPr lang="en-US" sz="2000" dirty="0"/>
+          </a:p>
+        </p:txBody>
+      </p:sp>
+      <p:sp>
+        <p:nvSpPr>
+          <p:cNvPr id="12" name="Text 10"/>
+          <p:cNvSpPr/>
+          <p:nvPr/>
+        </p:nvSpPr>
+        <p:spPr>
+          <a:xfrm>
+            <a:off x="1645920" y="1929384"/>
+            <a:ext cx="6766560" cy="704088"/>
+          </a:xfrm>
+          <a:prstGeom prst="rect">
+            <a:avLst/>
+          </a:prstGeom>
+          <a:noFill/>
+          <a:ln/>
+        </p:spPr>
+        <p:txBody>
+          <a:bodyPr wrap="square" rtlCol="0" anchor="ctr"/>
+          <a:lstStyle/>
+          <a:p>
+            <a:pPr indent="0" marL="0">
+              <a:buNone/>
+            </a:pPr>
+            <a:r>
+              <a:rPr lang="en-US" sz="1700" b="1" dirty="0">
+                <a:solidFill>
+                  <a:srgbClr val="0B1D3A"/>
+                </a:solidFill>
+              </a:rPr>
+              <a:t>Engagement</a:t>
+            </a:r>
+            <a:endParaRPr lang="en-US" sz="1700" dirty="0"/>
+          </a:p>
+          <a:p>
+            <a:pPr indent="0" marL="0">
+              <a:buNone/>
+            </a:pPr>
+            <a:r>
+              <a:rPr lang="en-US" sz="1300" dirty="0">
+                <a:solidFill>
+                  <a:srgbClr val="5A7184"/>
+                </a:solidFill>
+              </a:rPr>
+              <a:t>Active recall and pair programming in class. No passive slides-only lectures.</a:t>
+            </a:r>
+            <a:endParaRPr lang="en-US" sz="1700" dirty="0"/>
+          </a:p>
+        </p:txBody>
+      </p:sp>
+      <p:sp>
+        <p:nvSpPr>
+          <p:cNvPr id="13" name="Shape 11"/>
+          <p:cNvSpPr/>
+          <p:nvPr/>
+        </p:nvSpPr>
+        <p:spPr>
+          <a:xfrm>
+            <a:off x="548640" y="2779776"/>
+            <a:ext cx="8046720" cy="777240"/>
+          </a:xfrm>
+          <a:prstGeom prst="rect">
+            <a:avLst/>
+          </a:prstGeom>
+          <a:solidFill>
+            <a:srgbClr val="FFFFFF"/>
+          </a:solidFill>
+          <a:ln/>
+          <a:effectLst>
+            <a:outerShdw sx="100000" sy="100000" kx="0" ky="0" algn="bl" rotWithShape="0" blurRad="101600" dist="38100" dir="8100000">
+              <a:srgbClr val="000000">
+                <a:alpha val="12000"/>
+              </a:srgbClr>
+            </a:outerShdw>
+          </a:effectLst>
+        </p:spPr>
+      </p:sp>
+      <p:sp>
+        <p:nvSpPr>
+          <p:cNvPr id="14" name="Shape 12"/>
+          <p:cNvSpPr/>
+          <p:nvPr/>
+        </p:nvSpPr>
+        <p:spPr>
+          <a:xfrm>
+            <a:off x="777240" y="2825496"/>
+            <a:ext cx="658368" cy="658368"/>
+          </a:xfrm>
+          <a:prstGeom prst="ellipse">
+            <a:avLst/>
+          </a:prstGeom>
+          <a:solidFill>
+            <a:srgbClr val="FF6B35"/>
+          </a:solidFill>
+          <a:ln/>
+        </p:spPr>
+      </p:sp>
+      <p:sp>
+        <p:nvSpPr>
+          <p:cNvPr id="15" name="Text 13"/>
+          <p:cNvSpPr/>
+          <p:nvPr/>
+        </p:nvSpPr>
+        <p:spPr>
+          <a:xfrm>
+            <a:off x="777240" y="2825496"/>
+            <a:ext cx="658368" cy="658368"/>
+          </a:xfrm>
+          <a:prstGeom prst="rect">
+            <a:avLst/>
+          </a:prstGeom>
+          <a:noFill/>
+          <a:ln/>
+        </p:spPr>
+        <p:txBody>
+          <a:bodyPr wrap="square" rtlCol="0" anchor="ctr"/>
+          <a:lstStyle/>
+          <a:p>
+            <a:pPr algn="ctr" indent="0" marL="0">
+              <a:buNone/>
+            </a:pPr>
+            <a:r>
+              <a:rPr lang="en-US" sz="2000" b="1" dirty="0">
+                <a:solidFill>
+                  <a:srgbClr val="FFFFFF"/>
+                </a:solidFill>
+                <a:latin typeface="Georgia" pitchFamily="34" charset="0"/>
+                <a:ea typeface="Georgia" pitchFamily="34" charset="-122"/>
+                <a:cs typeface="Georgia" pitchFamily="34" charset="-120"/>
+              </a:rPr>
+              <a:t>M</a:t>
+            </a:r>
+            <a:endParaRPr lang="en-US" sz="2000" dirty="0"/>
+          </a:p>
+        </p:txBody>
+      </p:sp>
+      <p:sp>
+        <p:nvSpPr>
+          <p:cNvPr id="16" name="Text 14"/>
+          <p:cNvSpPr/>
+          <p:nvPr/>
+        </p:nvSpPr>
+        <p:spPr>
+          <a:xfrm>
+            <a:off x="1645920" y="2816352"/>
+            <a:ext cx="6766560" cy="704088"/>
+          </a:xfrm>
+          <a:prstGeom prst="rect">
+            <a:avLst/>
+          </a:prstGeom>
+          <a:noFill/>
+          <a:ln/>
+        </p:spPr>
+        <p:txBody>
+          <a:bodyPr wrap="square" rtlCol="0" anchor="ctr"/>
+          <a:lstStyle/>
+          <a:p>
+            <a:pPr indent="0" marL="0">
+              <a:buNone/>
+            </a:pPr>
+            <a:r>
+              <a:rPr lang="en-US" sz="1700" b="1" dirty="0">
+                <a:solidFill>
+                  <a:srgbClr val="0B1D3A"/>
+                </a:solidFill>
+              </a:rPr>
+              <a:t>Mentorship</a:t>
+            </a:r>
+            <a:endParaRPr lang="en-US" sz="1700" dirty="0"/>
+          </a:p>
+          <a:p>
+            <a:pPr indent="0" marL="0">
+              <a:buNone/>
+            </a:pPr>
+            <a:r>
+              <a:rPr lang="en-US" sz="1300" dirty="0">
+                <a:solidFill>
+                  <a:srgbClr val="5A7184"/>
+                </a:solidFill>
+              </a:rPr>
+              <a:t>1-on-1 check-ins and clear research pathways for students who want to go deeper.</a:t>
+            </a:r>
+            <a:endParaRPr lang="en-US" sz="1700" dirty="0"/>
+          </a:p>
+        </p:txBody>
+      </p:sp>
+      <p:sp>
+        <p:nvSpPr>
+          <p:cNvPr id="17" name="Shape 15"/>
+          <p:cNvSpPr/>
+          <p:nvPr/>
+        </p:nvSpPr>
+        <p:spPr>
+          <a:xfrm>
+            <a:off x="548640" y="3666744"/>
+            <a:ext cx="8046720" cy="777240"/>
+          </a:xfrm>
+          <a:prstGeom prst="rect">
+            <a:avLst/>
+          </a:prstGeom>
+          <a:solidFill>
+            <a:srgbClr val="FFFFFF"/>
+          </a:solidFill>
+          <a:ln/>
+          <a:effectLst>
+            <a:outerShdw sx="100000" sy="100000" kx="0" ky="0" algn="bl" rotWithShape="0" blurRad="101600" dist="38100" dir="8100000">
+              <a:srgbClr val="000000">
+                <a:alpha val="12000"/>
+              </a:srgbClr>
+            </a:outerShdw>
+          </a:effectLst>
+        </p:spPr>
+      </p:sp>
+      <p:sp>
+        <p:nvSpPr>
+          <p:cNvPr id="18" name="Shape 16"/>
+          <p:cNvSpPr/>
+          <p:nvPr/>
+        </p:nvSpPr>
+        <p:spPr>
+          <a:xfrm>
+            <a:off x="777240" y="3712464"/>
+            <a:ext cx="658368" cy="658368"/>
+          </a:xfrm>
+          <a:prstGeom prst="ellipse">
+            <a:avLst/>
+          </a:prstGeom>
+          <a:solidFill>
+            <a:srgbClr val="0B1D3A"/>
+          </a:solidFill>
+          <a:ln/>
+        </p:spPr>
+      </p:sp>
+      <p:sp>
+        <p:nvSpPr>
+          <p:cNvPr id="19" name="Text 17"/>
+          <p:cNvSpPr/>
+          <p:nvPr/>
+        </p:nvSpPr>
+        <p:spPr>
+          <a:xfrm>
+            <a:off x="777240" y="3712464"/>
+            <a:ext cx="658368" cy="658368"/>
+          </a:xfrm>
+          <a:prstGeom prst="rect">
+            <a:avLst/>
+          </a:prstGeom>
+          <a:noFill/>
+          <a:ln/>
+        </p:spPr>
+        <p:txBody>
+          <a:bodyPr wrap="square" rtlCol="0" anchor="ctr"/>
+          <a:lstStyle/>
+          <a:p>
+            <a:pPr algn="ctr" indent="0" marL="0">
+              <a:buNone/>
+            </a:pPr>
+            <a:r>
+              <a:rPr lang="en-US" sz="2000" b="1" dirty="0">
+                <a:solidFill>
+                  <a:srgbClr val="FFFFFF"/>
+                </a:solidFill>
+                <a:latin typeface="Georgia" pitchFamily="34" charset="0"/>
+                <a:ea typeface="Georgia" pitchFamily="34" charset="-122"/>
+                <a:cs typeface="Georgia" pitchFamily="34" charset="-120"/>
+              </a:rPr>
+              <a:t>C</a:t>
+            </a:r>
+            <a:endParaRPr lang="en-US" sz="2000" dirty="0"/>
+          </a:p>
+        </p:txBody>
+      </p:sp>
+      <p:sp>
+        <p:nvSpPr>
+          <p:cNvPr id="20" name="Text 18"/>
+          <p:cNvSpPr/>
+          <p:nvPr/>
+        </p:nvSpPr>
+        <p:spPr>
+          <a:xfrm>
+            <a:off x="1645920" y="3703320"/>
+            <a:ext cx="6766560" cy="704088"/>
+          </a:xfrm>
+          <a:prstGeom prst="rect">
+            <a:avLst/>
+          </a:prstGeom>
+          <a:noFill/>
+          <a:ln/>
+        </p:spPr>
+        <p:txBody>
+          <a:bodyPr wrap="square" rtlCol="0" anchor="ctr"/>
+          <a:lstStyle/>
+          <a:p>
+            <a:pPr indent="0" marL="0">
+              <a:buNone/>
+            </a:pPr>
+            <a:r>
+              <a:rPr lang="en-US" sz="1700" b="1" dirty="0">
+                <a:solidFill>
+                  <a:srgbClr val="0B1D3A"/>
+                </a:solidFill>
+              </a:rPr>
+              <a:t>Collaboration</a:t>
+            </a:r>
+            <a:endParaRPr lang="en-US" sz="1700" dirty="0"/>
+          </a:p>
+          <a:p>
+            <a:pPr indent="0" marL="0">
+              <a:buNone/>
+            </a:pPr>
+            <a:r>
+              <a:rPr lang="en-US" sz="1300" dirty="0">
+                <a:solidFill>
+                  <a:srgbClr val="5A7184"/>
+                </a:solidFill>
+              </a:rPr>
+              <a:t>Cross-disciplinary projects and industry partner connections — students graduate with a network.</a:t>
+            </a:r>
+            <a:endParaRPr lang="en-US" sz="1700" dirty="0"/>
           </a:p>
         </p:txBody>
       </p:sp>
